--- a/results_sample/CBCT_pCT_配准汇报.pptx
+++ b/results_sample/CBCT_pCT_配准汇报.pptx
@@ -7,14 +7,14 @@
   <p:sldIdLst>
     <p:sldId id="256" r:id="rId7"/>
     <p:sldId id="257" r:id="rId8"/>
-    <p:sldId id="258" r:id="rId9"/>
-    <p:sldId id="259" r:id="rId10"/>
-    <p:sldId id="260" r:id="rId11"/>
-    <p:sldId id="261" r:id="rId12"/>
-    <p:sldId id="262" r:id="rId13"/>
-    <p:sldId id="263" r:id="rId14"/>
-    <p:sldId id="264" r:id="rId15"/>
-    <p:sldId id="265" r:id="rId16"/>
+    <p:sldId id="258" r:id="rId10"/>
+    <p:sldId id="259" r:id="rId11"/>
+    <p:sldId id="260" r:id="rId12"/>
+    <p:sldId id="261" r:id="rId13"/>
+    <p:sldId id="262" r:id="rId14"/>
+    <p:sldId id="263" r:id="rId15"/>
+    <p:sldId id="264" r:id="rId16"/>
+    <p:sldId id="265" r:id="rId17"/>
   </p:sldIdLst>
   <p:sldSz cx="12191695" cy="6858000" type="screen4x3"/>
   <p:notesSz cx="6858000" cy="9144000"/>
@@ -114,6 +114,986 @@
     </a:lvl9pPr>
   </p:defaultTextStyle>
 </p:presentation>
+</file>
+
+<file path=ppt/notesMasters/notesMaster1.xml><?xml version="1.0" encoding="utf-8"?>
+<p:notesMaster xmlns:a="http://schemas.openxmlformats.org/drawingml/2006/main" xmlns:p="http://schemas.openxmlformats.org/presentationml/2006/main" xmlns:r="http://schemas.openxmlformats.org/officeDocument/2006/relationships">
+  <p:cSld>
+    <p:bg>
+      <p:bgRef idx="1001">
+        <a:schemeClr val="bg1"/>
+      </p:bgRef>
+    </p:bg>
+    <p:spTree>
+      <p:nvGrpSpPr>
+        <p:cNvPr id="1" name=""/>
+        <p:cNvGrpSpPr/>
+        <p:nvPr/>
+      </p:nvGrpSpPr>
+      <p:grpSpPr>
+        <a:xfrm>
+          <a:off x="0" y="0"/>
+          <a:ext cx="0" cy="0"/>
+          <a:chOff x="0" y="0"/>
+          <a:chExt cx="0" cy="0"/>
+        </a:xfrm>
+      </p:grpSpPr>
+      <p:sp>
+        <p:nvSpPr>
+          <p:cNvPr id="2" name="Header Placeholder 1"/>
+          <p:cNvSpPr>
+            <a:spLocks noGrp="1"/>
+          </p:cNvSpPr>
+          <p:nvPr>
+            <p:ph type="hdr" sz="quarter"/>
+          </p:nvPr>
+        </p:nvSpPr>
+        <p:spPr>
+          <a:xfrm>
+            <a:off x="0" y="0"/>
+            <a:ext cx="2971800" cy="457200"/>
+          </a:xfrm>
+          <a:prstGeom prst="rect">
+            <a:avLst/>
+          </a:prstGeom>
+        </p:spPr>
+        <p:txBody>
+          <a:bodyPr vert="horz" lIns="91440" tIns="45720" rIns="91440" bIns="45720" rtlCol="0"/>
+          <a:lstStyle>
+            <a:lvl1pPr algn="l">
+              <a:defRPr sz="1200"/>
+            </a:lvl1pPr>
+          </a:lstStyle>
+          <a:p>
+            <a:endParaRPr lang="en-US"/>
+          </a:p>
+        </p:txBody>
+      </p:sp>
+      <p:sp>
+        <p:nvSpPr>
+          <p:cNvPr id="3" name="Date Placeholder 2"/>
+          <p:cNvSpPr>
+            <a:spLocks noGrp="1"/>
+          </p:cNvSpPr>
+          <p:nvPr>
+            <p:ph type="dt" idx="1"/>
+          </p:nvPr>
+        </p:nvSpPr>
+        <p:spPr>
+          <a:xfrm>
+            <a:off x="3884613" y="0"/>
+            <a:ext cx="2971800" cy="457200"/>
+          </a:xfrm>
+          <a:prstGeom prst="rect">
+            <a:avLst/>
+          </a:prstGeom>
+        </p:spPr>
+        <p:txBody>
+          <a:bodyPr vert="horz" lIns="91440" tIns="45720" rIns="91440" bIns="45720" rtlCol="0"/>
+          <a:lstStyle>
+            <a:lvl1pPr algn="r">
+              <a:defRPr sz="1200"/>
+            </a:lvl1pPr>
+          </a:lstStyle>
+          <a:p>
+            <a:fld id="{0F89C1C7-3DCD-1040-A9CF-14679D8B5DDD}" type="datetimeFigureOut">
+              <a:rPr lang="en-US" smtClean="0"/>
+              <a:t>10/17/16</a:t>
+            </a:fld>
+            <a:endParaRPr lang="en-US"/>
+          </a:p>
+        </p:txBody>
+      </p:sp>
+      <p:sp>
+        <p:nvSpPr>
+          <p:cNvPr id="4" name="Slide Image Placeholder 3"/>
+          <p:cNvSpPr>
+            <a:spLocks noGrp="1" noRot="1" noChangeAspect="1"/>
+          </p:cNvSpPr>
+          <p:nvPr>
+            <p:ph type="sldImg" idx="2"/>
+          </p:nvPr>
+        </p:nvSpPr>
+        <p:spPr>
+          <a:xfrm>
+            <a:off x="1143000" y="685800"/>
+            <a:ext cx="4572000" cy="3429000"/>
+          </a:xfrm>
+          <a:prstGeom prst="rect">
+            <a:avLst/>
+          </a:prstGeom>
+          <a:noFill/>
+          <a:ln w="12700">
+            <a:solidFill>
+              <a:prstClr val="black"/>
+            </a:solidFill>
+          </a:ln>
+        </p:spPr>
+        <p:txBody>
+          <a:bodyPr vert="horz" lIns="91440" tIns="45720" rIns="91440" bIns="45720" rtlCol="0" anchor="ctr"/>
+          <a:lstStyle/>
+          <a:p>
+            <a:endParaRPr lang="en-US"/>
+          </a:p>
+        </p:txBody>
+      </p:sp>
+      <p:sp>
+        <p:nvSpPr>
+          <p:cNvPr id="5" name="Notes Placeholder 4"/>
+          <p:cNvSpPr>
+            <a:spLocks noGrp="1"/>
+          </p:cNvSpPr>
+          <p:nvPr>
+            <p:ph type="body" sz="quarter" idx="3"/>
+          </p:nvPr>
+        </p:nvSpPr>
+        <p:spPr>
+          <a:xfrm>
+            <a:off x="685800" y="4343400"/>
+            <a:ext cx="5486400" cy="4114800"/>
+          </a:xfrm>
+          <a:prstGeom prst="rect">
+            <a:avLst/>
+          </a:prstGeom>
+        </p:spPr>
+        <p:txBody>
+          <a:bodyPr vert="horz" lIns="91440" tIns="45720" rIns="91440" bIns="45720" rtlCol="0"/>
+          <a:lstStyle/>
+          <a:p>
+            <a:pPr lvl="0"/>
+            <a:r>
+              <a:rPr lang="en-US" smtClean="0"/>
+              <a:t>Click to edit Master text styles</a:t>
+            </a:r>
+          </a:p>
+          <a:p>
+            <a:pPr lvl="1"/>
+            <a:r>
+              <a:rPr lang="en-US" smtClean="0"/>
+              <a:t>Second level</a:t>
+            </a:r>
+          </a:p>
+          <a:p>
+            <a:pPr lvl="2"/>
+            <a:r>
+              <a:rPr lang="en-US" smtClean="0"/>
+              <a:t>Third level</a:t>
+            </a:r>
+          </a:p>
+          <a:p>
+            <a:pPr lvl="3"/>
+            <a:r>
+              <a:rPr lang="en-US" smtClean="0"/>
+              <a:t>Fourth level</a:t>
+            </a:r>
+          </a:p>
+          <a:p>
+            <a:pPr lvl="4"/>
+            <a:r>
+              <a:rPr lang="en-US" smtClean="0"/>
+              <a:t>Fifth level</a:t>
+            </a:r>
+            <a:endParaRPr lang="en-US"/>
+          </a:p>
+        </p:txBody>
+      </p:sp>
+      <p:sp>
+        <p:nvSpPr>
+          <p:cNvPr id="6" name="Footer Placeholder 5"/>
+          <p:cNvSpPr>
+            <a:spLocks noGrp="1"/>
+          </p:cNvSpPr>
+          <p:nvPr>
+            <p:ph type="ftr" sz="quarter" idx="4"/>
+          </p:nvPr>
+        </p:nvSpPr>
+        <p:spPr>
+          <a:xfrm>
+            <a:off x="0" y="8685213"/>
+            <a:ext cx="2971800" cy="457200"/>
+          </a:xfrm>
+          <a:prstGeom prst="rect">
+            <a:avLst/>
+          </a:prstGeom>
+        </p:spPr>
+        <p:txBody>
+          <a:bodyPr vert="horz" lIns="91440" tIns="45720" rIns="91440" bIns="45720" rtlCol="0" anchor="b"/>
+          <a:lstStyle>
+            <a:lvl1pPr algn="l">
+              <a:defRPr sz="1200"/>
+            </a:lvl1pPr>
+          </a:lstStyle>
+          <a:p>
+            <a:endParaRPr lang="en-US"/>
+          </a:p>
+        </p:txBody>
+      </p:sp>
+      <p:sp>
+        <p:nvSpPr>
+          <p:cNvPr id="7" name="Slide Number Placeholder 6"/>
+          <p:cNvSpPr>
+            <a:spLocks noGrp="1"/>
+          </p:cNvSpPr>
+          <p:nvPr>
+            <p:ph type="sldNum" sz="quarter" idx="5"/>
+          </p:nvPr>
+        </p:nvSpPr>
+        <p:spPr>
+          <a:xfrm>
+            <a:off x="3884613" y="8685213"/>
+            <a:ext cx="2971800" cy="457200"/>
+          </a:xfrm>
+          <a:prstGeom prst="rect">
+            <a:avLst/>
+          </a:prstGeom>
+        </p:spPr>
+        <p:txBody>
+          <a:bodyPr vert="horz" lIns="91440" tIns="45720" rIns="91440" bIns="45720" rtlCol="0" anchor="b"/>
+          <a:lstStyle>
+            <a:lvl1pPr algn="r">
+              <a:defRPr sz="1200"/>
+            </a:lvl1pPr>
+          </a:lstStyle>
+          <a:p>
+            <a:fld id="{BB5E49A5-4136-284D-997B-48E1D791AD67}" type="slidenum">
+              <a:rPr lang="en-US" smtClean="0"/>
+              <a:t>‹#›</a:t>
+            </a:fld>
+            <a:endParaRPr lang="en-US"/>
+          </a:p>
+        </p:txBody>
+      </p:sp>
+    </p:spTree>
+    <p:extLst>
+      <p:ext uri="{BB962C8B-B14F-4D97-AF65-F5344CB8AC3E}">
+        <p14:creationId xmlns:p14="http://schemas.microsoft.com/office/powerpoint/2010/main" val="2623252185"/>
+      </p:ext>
+    </p:extLst>
+  </p:cSld>
+  <p:clrMap bg1="lt1" tx1="dk1" bg2="lt2" tx2="dk2" accent1="accent1" accent2="accent2" accent3="accent3" accent4="accent4" accent5="accent5" accent6="accent6" hlink="hlink" folHlink="folHlink"/>
+  <p:notesStyle>
+    <a:lvl1pPr marL="0" algn="l" defTabSz="457200" rtl="0" eaLnBrk="1" latinLnBrk="0" hangingPunct="1">
+      <a:defRPr sz="1200" kern="1200">
+        <a:solidFill>
+          <a:schemeClr val="tx1"/>
+        </a:solidFill>
+        <a:latin typeface="+mn-lt"/>
+        <a:ea typeface="+mn-ea"/>
+        <a:cs typeface="+mn-cs"/>
+      </a:defRPr>
+    </a:lvl1pPr>
+    <a:lvl2pPr marL="457200" algn="l" defTabSz="457200" rtl="0" eaLnBrk="1" latinLnBrk="0" hangingPunct="1">
+      <a:defRPr sz="1200" kern="1200">
+        <a:solidFill>
+          <a:schemeClr val="tx1"/>
+        </a:solidFill>
+        <a:latin typeface="+mn-lt"/>
+        <a:ea typeface="+mn-ea"/>
+        <a:cs typeface="+mn-cs"/>
+      </a:defRPr>
+    </a:lvl2pPr>
+    <a:lvl3pPr marL="914400" algn="l" defTabSz="457200" rtl="0" eaLnBrk="1" latinLnBrk="0" hangingPunct="1">
+      <a:defRPr sz="1200" kern="1200">
+        <a:solidFill>
+          <a:schemeClr val="tx1"/>
+        </a:solidFill>
+        <a:latin typeface="+mn-lt"/>
+        <a:ea typeface="+mn-ea"/>
+        <a:cs typeface="+mn-cs"/>
+      </a:defRPr>
+    </a:lvl3pPr>
+    <a:lvl4pPr marL="1371600" algn="l" defTabSz="457200" rtl="0" eaLnBrk="1" latinLnBrk="0" hangingPunct="1">
+      <a:defRPr sz="1200" kern="1200">
+        <a:solidFill>
+          <a:schemeClr val="tx1"/>
+        </a:solidFill>
+        <a:latin typeface="+mn-lt"/>
+        <a:ea typeface="+mn-ea"/>
+        <a:cs typeface="+mn-cs"/>
+      </a:defRPr>
+    </a:lvl4pPr>
+    <a:lvl5pPr marL="1828800" algn="l" defTabSz="457200" rtl="0" eaLnBrk="1" latinLnBrk="0" hangingPunct="1">
+      <a:defRPr sz="1200" kern="1200">
+        <a:solidFill>
+          <a:schemeClr val="tx1"/>
+        </a:solidFill>
+        <a:latin typeface="+mn-lt"/>
+        <a:ea typeface="+mn-ea"/>
+        <a:cs typeface="+mn-cs"/>
+      </a:defRPr>
+    </a:lvl5pPr>
+    <a:lvl6pPr marL="2286000" algn="l" defTabSz="457200" rtl="0" eaLnBrk="1" latinLnBrk="0" hangingPunct="1">
+      <a:defRPr sz="1200" kern="1200">
+        <a:solidFill>
+          <a:schemeClr val="tx1"/>
+        </a:solidFill>
+        <a:latin typeface="+mn-lt"/>
+        <a:ea typeface="+mn-ea"/>
+        <a:cs typeface="+mn-cs"/>
+      </a:defRPr>
+    </a:lvl6pPr>
+    <a:lvl7pPr marL="2743200" algn="l" defTabSz="457200" rtl="0" eaLnBrk="1" latinLnBrk="0" hangingPunct="1">
+      <a:defRPr sz="1200" kern="1200">
+        <a:solidFill>
+          <a:schemeClr val="tx1"/>
+        </a:solidFill>
+        <a:latin typeface="+mn-lt"/>
+        <a:ea typeface="+mn-ea"/>
+        <a:cs typeface="+mn-cs"/>
+      </a:defRPr>
+    </a:lvl7pPr>
+    <a:lvl8pPr marL="3200400" algn="l" defTabSz="457200" rtl="0" eaLnBrk="1" latinLnBrk="0" hangingPunct="1">
+      <a:defRPr sz="1200" kern="1200">
+        <a:solidFill>
+          <a:schemeClr val="tx1"/>
+        </a:solidFill>
+        <a:latin typeface="+mn-lt"/>
+        <a:ea typeface="+mn-ea"/>
+        <a:cs typeface="+mn-cs"/>
+      </a:defRPr>
+    </a:lvl8pPr>
+    <a:lvl9pPr marL="3657600" algn="l" defTabSz="457200" rtl="0" eaLnBrk="1" latinLnBrk="0" hangingPunct="1">
+      <a:defRPr sz="1200" kern="1200">
+        <a:solidFill>
+          <a:schemeClr val="tx1"/>
+        </a:solidFill>
+        <a:latin typeface="+mn-lt"/>
+        <a:ea typeface="+mn-ea"/>
+        <a:cs typeface="+mn-cs"/>
+      </a:defRPr>
+    </a:lvl9pPr>
+  </p:notesStyle>
+</p:notesMaster>
+</file>
+
+<file path=ppt/notesSlides/notesSlide1.xml><?xml version="1.0" encoding="utf-8"?>
+<p:notes xmlns:a="http://schemas.openxmlformats.org/drawingml/2006/main" xmlns:p="http://schemas.openxmlformats.org/presentationml/2006/main" xmlns:r="http://schemas.openxmlformats.org/officeDocument/2006/relationships">
+  <p:cSld>
+    <p:spTree>
+      <p:nvGrpSpPr>
+        <p:cNvPr id="1" name=""/>
+        <p:cNvGrpSpPr/>
+        <p:nvPr/>
+      </p:nvGrpSpPr>
+      <p:grpSpPr>
+        <a:xfrm>
+          <a:off x="0" y="0"/>
+          <a:ext cx="0" cy="0"/>
+          <a:chOff x="0" y="0"/>
+          <a:chExt cx="0" cy="0"/>
+        </a:xfrm>
+      </p:grpSpPr>
+      <p:sp>
+        <p:nvSpPr>
+          <p:cNvPr id="2" name="Slide Image Placeholder 1"/>
+          <p:cNvSpPr>
+            <a:spLocks noGrp="1"/>
+          </p:cNvSpPr>
+          <p:nvPr>
+            <p:ph type="sldImg" idx="2"/>
+          </p:nvPr>
+        </p:nvSpPr>
+        <p:spPr/>
+      </p:sp>
+      <p:sp>
+        <p:nvSpPr>
+          <p:cNvPr id="3" name="Notes Placeholder 2"/>
+          <p:cNvSpPr>
+            <a:spLocks noGrp="1"/>
+          </p:cNvSpPr>
+          <p:nvPr>
+            <p:ph type="body" idx="3" sz="quarter"/>
+          </p:nvPr>
+        </p:nvSpPr>
+        <p:spPr/>
+        <p:txBody>
+          <a:bodyPr/>
+          <a:lstStyle/>
+          <a:p>
+            <a:r>
+              <a:t>同一病人 M24557 的计划CT与治疗位锥束CT。三大难点决定了后续方法：坐标系不同→需稳健初始化；灰度不一致→需对线性差异鲁棒的相似性(LNCC)；FOV不同→只在CBCT视野内评估。</a:t>
+            </a:r>
+          </a:p>
+        </p:txBody>
+      </p:sp>
+      <p:sp>
+        <p:nvSpPr>
+          <p:cNvPr id="4" name="Slide Number Placeholder 3"/>
+          <p:cNvSpPr>
+            <a:spLocks noGrp="1"/>
+          </p:cNvSpPr>
+          <p:nvPr>
+            <p:ph type="sldNum" idx="5" sz="quarter"/>
+          </p:nvPr>
+        </p:nvSpPr>
+        <p:spPr/>
+      </p:sp>
+    </p:spTree>
+  </p:cSld>
+  <p:clrMapOvr>
+    <a:masterClrMapping/>
+  </p:clrMapOvr>
+</p:notes>
+</file>
+
+<file path=ppt/notesSlides/notesSlide2.xml><?xml version="1.0" encoding="utf-8"?>
+<p:notes xmlns:a="http://schemas.openxmlformats.org/drawingml/2006/main" xmlns:p="http://schemas.openxmlformats.org/presentationml/2006/main" xmlns:r="http://schemas.openxmlformats.org/officeDocument/2006/relationships">
+  <p:cSld>
+    <p:spTree>
+      <p:nvGrpSpPr>
+        <p:cNvPr id="1" name=""/>
+        <p:cNvGrpSpPr/>
+        <p:nvPr/>
+      </p:nvGrpSpPr>
+      <p:grpSpPr>
+        <a:xfrm>
+          <a:off x="0" y="0"/>
+          <a:ext cx="0" cy="0"/>
+          <a:chOff x="0" y="0"/>
+          <a:chExt cx="0" cy="0"/>
+        </a:xfrm>
+      </p:grpSpPr>
+      <p:sp>
+        <p:nvSpPr>
+          <p:cNvPr id="2" name="Slide Image Placeholder 1"/>
+          <p:cNvSpPr>
+            <a:spLocks noGrp="1"/>
+          </p:cNvSpPr>
+          <p:nvPr>
+            <p:ph type="sldImg" idx="2"/>
+          </p:nvPr>
+        </p:nvSpPr>
+        <p:spPr/>
+      </p:sp>
+      <p:sp>
+        <p:nvSpPr>
+          <p:cNvPr id="3" name="Notes Placeholder 2"/>
+          <p:cNvSpPr>
+            <a:spLocks noGrp="1"/>
+          </p:cNvSpPr>
+          <p:nvPr>
+            <p:ph type="body" idx="3" sz="quarter"/>
+          </p:nvPr>
+        </p:nvSpPr>
+        <p:spPr/>
+        <p:txBody>
+          <a:bodyPr/>
+          <a:lstStyle/>
+          <a:p>
+            <a:r>
+              <a:t>CBCT 以治疗机等中心为原点、pCT 以 CT 床为原点；散射导致 cupping 与 HU 偏移；FOV 截断使边缘信息缺失。这些都要求方法对灰度差异鲁棒并限制评估区域。</a:t>
+            </a:r>
+          </a:p>
+        </p:txBody>
+      </p:sp>
+      <p:sp>
+        <p:nvSpPr>
+          <p:cNvPr id="4" name="Slide Number Placeholder 3"/>
+          <p:cNvSpPr>
+            <a:spLocks noGrp="1"/>
+          </p:cNvSpPr>
+          <p:nvPr>
+            <p:ph type="sldNum" idx="5" sz="quarter"/>
+          </p:nvPr>
+        </p:nvSpPr>
+        <p:spPr/>
+      </p:sp>
+    </p:spTree>
+  </p:cSld>
+  <p:clrMapOvr>
+    <a:masterClrMapping/>
+  </p:clrMapOvr>
+</p:notes>
+</file>
+
+<file path=ppt/notesSlides/notesSlide3.xml><?xml version="1.0" encoding="utf-8"?>
+<p:notes xmlns:a="http://schemas.openxmlformats.org/drawingml/2006/main" xmlns:p="http://schemas.openxmlformats.org/presentationml/2006/main" xmlns:r="http://schemas.openxmlformats.org/officeDocument/2006/relationships">
+  <p:cSld>
+    <p:spTree>
+      <p:nvGrpSpPr>
+        <p:cNvPr id="1" name=""/>
+        <p:cNvGrpSpPr/>
+        <p:nvPr/>
+      </p:nvGrpSpPr>
+      <p:grpSpPr>
+        <a:xfrm>
+          <a:off x="0" y="0"/>
+          <a:ext cx="0" cy="0"/>
+          <a:chOff x="0" y="0"/>
+          <a:chExt cx="0" cy="0"/>
+        </a:xfrm>
+      </p:grpSpPr>
+      <p:sp>
+        <p:nvSpPr>
+          <p:cNvPr id="2" name="Slide Image Placeholder 1"/>
+          <p:cNvSpPr>
+            <a:spLocks noGrp="1"/>
+          </p:cNvSpPr>
+          <p:nvPr>
+            <p:ph type="sldImg" idx="2"/>
+          </p:nvPr>
+        </p:nvSpPr>
+        <p:spPr/>
+      </p:sp>
+      <p:sp>
+        <p:nvSpPr>
+          <p:cNvPr id="3" name="Notes Placeholder 2"/>
+          <p:cNvSpPr>
+            <a:spLocks noGrp="1"/>
+          </p:cNvSpPr>
+          <p:nvPr>
+            <p:ph type="body" idx="3" sz="quarter"/>
+          </p:nvPr>
+        </p:nvSpPr>
+        <p:spPr/>
+        <p:txBody>
+          <a:bodyPr/>
+          <a:lstStyle/>
+          <a:p>
+            <a:r>
+              <a:t>不是调用黑箱配准软件，而是用 PyTorch 自行实现：对这一对体数据直接用梯度下降优化刚体参数与（可选）微分同胚形变。</a:t>
+            </a:r>
+          </a:p>
+        </p:txBody>
+      </p:sp>
+      <p:sp>
+        <p:nvSpPr>
+          <p:cNvPr id="4" name="Slide Number Placeholder 3"/>
+          <p:cNvSpPr>
+            <a:spLocks noGrp="1"/>
+          </p:cNvSpPr>
+          <p:nvPr>
+            <p:ph type="sldNum" idx="5" sz="quarter"/>
+          </p:nvPr>
+        </p:nvSpPr>
+        <p:spPr/>
+      </p:sp>
+    </p:spTree>
+  </p:cSld>
+  <p:clrMapOvr>
+    <a:masterClrMapping/>
+  </p:clrMapOvr>
+</p:notes>
+</file>
+
+<file path=ppt/notesSlides/notesSlide4.xml><?xml version="1.0" encoding="utf-8"?>
+<p:notes xmlns:a="http://schemas.openxmlformats.org/drawingml/2006/main" xmlns:p="http://schemas.openxmlformats.org/presentationml/2006/main" xmlns:r="http://schemas.openxmlformats.org/officeDocument/2006/relationships">
+  <p:cSld>
+    <p:spTree>
+      <p:nvGrpSpPr>
+        <p:cNvPr id="1" name=""/>
+        <p:cNvGrpSpPr/>
+        <p:nvPr/>
+      </p:nvGrpSpPr>
+      <p:grpSpPr>
+        <a:xfrm>
+          <a:off x="0" y="0"/>
+          <a:ext cx="0" cy="0"/>
+          <a:chOff x="0" y="0"/>
+          <a:chExt cx="0" cy="0"/>
+        </a:xfrm>
+      </p:grpSpPr>
+      <p:sp>
+        <p:nvSpPr>
+          <p:cNvPr id="2" name="Slide Image Placeholder 1"/>
+          <p:cNvSpPr>
+            <a:spLocks noGrp="1"/>
+          </p:cNvSpPr>
+          <p:nvPr>
+            <p:ph type="sldImg" idx="2"/>
+          </p:nvPr>
+        </p:nvSpPr>
+        <p:spPr/>
+      </p:sp>
+      <p:sp>
+        <p:nvSpPr>
+          <p:cNvPr id="3" name="Notes Placeholder 2"/>
+          <p:cNvSpPr>
+            <a:spLocks noGrp="1"/>
+          </p:cNvSpPr>
+          <p:nvPr>
+            <p:ph type="body" idx="3" sz="quarter"/>
+          </p:nvPr>
+        </p:nvSpPr>
+        <p:spPr/>
+        <p:txBody>
+          <a:bodyPr/>
+          <a:lstStyle/>
+          <a:p>
+            <a:r>
+              <a:t>立方体各向同性网格保证 affine_grid 的归一化旋转就是物理刚体旋转、不引入剪切；z 方向用面积剖面互相关比用质心稳健得多。</a:t>
+            </a:r>
+          </a:p>
+        </p:txBody>
+      </p:sp>
+      <p:sp>
+        <p:nvSpPr>
+          <p:cNvPr id="4" name="Slide Number Placeholder 3"/>
+          <p:cNvSpPr>
+            <a:spLocks noGrp="1"/>
+          </p:cNvSpPr>
+          <p:nvPr>
+            <p:ph type="sldNum" idx="5" sz="quarter"/>
+          </p:nvPr>
+        </p:nvSpPr>
+        <p:spPr/>
+      </p:sp>
+    </p:spTree>
+  </p:cSld>
+  <p:clrMapOvr>
+    <a:masterClrMapping/>
+  </p:clrMapOvr>
+</p:notes>
+</file>
+
+<file path=ppt/notesSlides/notesSlide5.xml><?xml version="1.0" encoding="utf-8"?>
+<p:notes xmlns:a="http://schemas.openxmlformats.org/drawingml/2006/main" xmlns:p="http://schemas.openxmlformats.org/presentationml/2006/main" xmlns:r="http://schemas.openxmlformats.org/officeDocument/2006/relationships">
+  <p:cSld>
+    <p:spTree>
+      <p:nvGrpSpPr>
+        <p:cNvPr id="1" name=""/>
+        <p:cNvGrpSpPr/>
+        <p:nvPr/>
+      </p:nvGrpSpPr>
+      <p:grpSpPr>
+        <a:xfrm>
+          <a:off x="0" y="0"/>
+          <a:ext cx="0" cy="0"/>
+          <a:chOff x="0" y="0"/>
+          <a:chExt cx="0" cy="0"/>
+        </a:xfrm>
+      </p:grpSpPr>
+      <p:sp>
+        <p:nvSpPr>
+          <p:cNvPr id="2" name="Slide Image Placeholder 1"/>
+          <p:cNvSpPr>
+            <a:spLocks noGrp="1"/>
+          </p:cNvSpPr>
+          <p:nvPr>
+            <p:ph type="sldImg" idx="2"/>
+          </p:nvPr>
+        </p:nvSpPr>
+        <p:spPr/>
+      </p:sp>
+      <p:sp>
+        <p:nvSpPr>
+          <p:cNvPr id="3" name="Notes Placeholder 2"/>
+          <p:cNvSpPr>
+            <a:spLocks noGrp="1"/>
+          </p:cNvSpPr>
+          <p:nvPr>
+            <p:ph type="body" idx="3" sz="quarter"/>
+          </p:nvPr>
+        </p:nvSpPr>
+        <p:spPr/>
+        <p:txBody>
+          <a:bodyPr/>
+          <a:lstStyle/>
+          <a:p>
+            <a:r>
+              <a:t>CBCT 软组织 HU 低于 pCT（cupping/标定差异），故用对线性灰度差异鲁棒的LNCC。本例戴面罩头颈近似刚体，形变只做小幅平滑细化以避免过度揉变。</a:t>
+            </a:r>
+          </a:p>
+        </p:txBody>
+      </p:sp>
+      <p:sp>
+        <p:nvSpPr>
+          <p:cNvPr id="4" name="Slide Number Placeholder 3"/>
+          <p:cNvSpPr>
+            <a:spLocks noGrp="1"/>
+          </p:cNvSpPr>
+          <p:nvPr>
+            <p:ph type="sldNum" idx="5" sz="quarter"/>
+          </p:nvPr>
+        </p:nvSpPr>
+        <p:spPr/>
+      </p:sp>
+    </p:spTree>
+  </p:cSld>
+  <p:clrMapOvr>
+    <a:masterClrMapping/>
+  </p:clrMapOvr>
+</p:notes>
+</file>
+
+<file path=ppt/notesSlides/notesSlide6.xml><?xml version="1.0" encoding="utf-8"?>
+<p:notes xmlns:a="http://schemas.openxmlformats.org/drawingml/2006/main" xmlns:p="http://schemas.openxmlformats.org/presentationml/2006/main" xmlns:r="http://schemas.openxmlformats.org/officeDocument/2006/relationships">
+  <p:cSld>
+    <p:spTree>
+      <p:nvGrpSpPr>
+        <p:cNvPr id="1" name=""/>
+        <p:cNvGrpSpPr/>
+        <p:nvPr/>
+      </p:nvGrpSpPr>
+      <p:grpSpPr>
+        <a:xfrm>
+          <a:off x="0" y="0"/>
+          <a:ext cx="0" cy="0"/>
+          <a:chOff x="0" y="0"/>
+          <a:chExt cx="0" cy="0"/>
+        </a:xfrm>
+      </p:grpSpPr>
+      <p:sp>
+        <p:nvSpPr>
+          <p:cNvPr id="2" name="Slide Image Placeholder 1"/>
+          <p:cNvSpPr>
+            <a:spLocks noGrp="1"/>
+          </p:cNvSpPr>
+          <p:nvPr>
+            <p:ph type="sldImg" idx="2"/>
+          </p:nvPr>
+        </p:nvSpPr>
+        <p:spPr/>
+      </p:sp>
+      <p:sp>
+        <p:nvSpPr>
+          <p:cNvPr id="3" name="Notes Placeholder 2"/>
+          <p:cNvSpPr>
+            <a:spLocks noGrp="1"/>
+          </p:cNvSpPr>
+          <p:nvPr>
+            <p:ph type="body" idx="3" sz="quarter"/>
+          </p:nvPr>
+        </p:nvSpPr>
+        <p:spPr/>
+        <p:txBody>
+          <a:bodyPr/>
+          <a:lstStyle/>
+          <a:p>
+            <a:r>
+              <a:t>棋盘格中骨与体表轮廓在配准后跨方格连续；差异图整体明显变暗，残留主要在 CBCT FOV 边缘与couch。</a:t>
+            </a:r>
+          </a:p>
+        </p:txBody>
+      </p:sp>
+      <p:sp>
+        <p:nvSpPr>
+          <p:cNvPr id="4" name="Slide Number Placeholder 3"/>
+          <p:cNvSpPr>
+            <a:spLocks noGrp="1"/>
+          </p:cNvSpPr>
+          <p:nvPr>
+            <p:ph type="sldNum" idx="5" sz="quarter"/>
+          </p:nvPr>
+        </p:nvSpPr>
+        <p:spPr/>
+      </p:sp>
+    </p:spTree>
+  </p:cSld>
+  <p:clrMapOvr>
+    <a:masterClrMapping/>
+  </p:clrMapOvr>
+</p:notes>
+</file>
+
+<file path=ppt/notesSlides/notesSlide7.xml><?xml version="1.0" encoding="utf-8"?>
+<p:notes xmlns:a="http://schemas.openxmlformats.org/drawingml/2006/main" xmlns:p="http://schemas.openxmlformats.org/presentationml/2006/main" xmlns:r="http://schemas.openxmlformats.org/officeDocument/2006/relationships">
+  <p:cSld>
+    <p:spTree>
+      <p:nvGrpSpPr>
+        <p:cNvPr id="1" name=""/>
+        <p:cNvGrpSpPr/>
+        <p:nvPr/>
+      </p:nvGrpSpPr>
+      <p:grpSpPr>
+        <a:xfrm>
+          <a:off x="0" y="0"/>
+          <a:ext cx="0" cy="0"/>
+          <a:chOff x="0" y="0"/>
+          <a:chExt cx="0" cy="0"/>
+        </a:xfrm>
+      </p:grpSpPr>
+      <p:sp>
+        <p:nvSpPr>
+          <p:cNvPr id="2" name="Slide Image Placeholder 1"/>
+          <p:cNvSpPr>
+            <a:spLocks noGrp="1"/>
+          </p:cNvSpPr>
+          <p:nvPr>
+            <p:ph type="sldImg" idx="2"/>
+          </p:nvPr>
+        </p:nvSpPr>
+        <p:spPr/>
+      </p:sp>
+      <p:sp>
+        <p:nvSpPr>
+          <p:cNvPr id="3" name="Notes Placeholder 2"/>
+          <p:cNvSpPr>
+            <a:spLocks noGrp="1"/>
+          </p:cNvSpPr>
+          <p:nvPr>
+            <p:ph type="body" idx="3" sz="quarter"/>
+          </p:nvPr>
+        </p:nvSpPr>
+        <p:spPr/>
+        <p:txBody>
+          <a:bodyPr/>
+          <a:lstStyle/>
+          <a:p>
+            <a:r>
+              <a:t>骨 Dice 用 HU&gt;200 阈值、独立于 LNCC 优化目标，因此大幅提升说明是真实结构对齐而非过拟合相似度。刚体已达到主要精度，形变对 Dice 增益很小。</a:t>
+            </a:r>
+          </a:p>
+        </p:txBody>
+      </p:sp>
+      <p:sp>
+        <p:nvSpPr>
+          <p:cNvPr id="4" name="Slide Number Placeholder 3"/>
+          <p:cNvSpPr>
+            <a:spLocks noGrp="1"/>
+          </p:cNvSpPr>
+          <p:nvPr>
+            <p:ph type="sldNum" idx="5" sz="quarter"/>
+          </p:nvPr>
+        </p:nvSpPr>
+        <p:spPr/>
+      </p:sp>
+    </p:spTree>
+  </p:cSld>
+  <p:clrMapOvr>
+    <a:masterClrMapping/>
+  </p:clrMapOvr>
+</p:notes>
+</file>
+
+<file path=ppt/notesSlides/notesSlide8.xml><?xml version="1.0" encoding="utf-8"?>
+<p:notes xmlns:a="http://schemas.openxmlformats.org/drawingml/2006/main" xmlns:p="http://schemas.openxmlformats.org/presentationml/2006/main" xmlns:r="http://schemas.openxmlformats.org/officeDocument/2006/relationships">
+  <p:cSld>
+    <p:spTree>
+      <p:nvGrpSpPr>
+        <p:cNvPr id="1" name=""/>
+        <p:cNvGrpSpPr/>
+        <p:nvPr/>
+      </p:nvGrpSpPr>
+      <p:grpSpPr>
+        <a:xfrm>
+          <a:off x="0" y="0"/>
+          <a:ext cx="0" cy="0"/>
+          <a:chOff x="0" y="0"/>
+          <a:chExt cx="0" cy="0"/>
+        </a:xfrm>
+      </p:grpSpPr>
+      <p:sp>
+        <p:nvSpPr>
+          <p:cNvPr id="2" name="Slide Image Placeholder 1"/>
+          <p:cNvSpPr>
+            <a:spLocks noGrp="1"/>
+          </p:cNvSpPr>
+          <p:nvPr>
+            <p:ph type="sldImg" idx="2"/>
+          </p:nvPr>
+        </p:nvSpPr>
+        <p:spPr/>
+      </p:sp>
+      <p:sp>
+        <p:nvSpPr>
+          <p:cNvPr id="3" name="Notes Placeholder 2"/>
+          <p:cNvSpPr>
+            <a:spLocks noGrp="1"/>
+          </p:cNvSpPr>
+          <p:nvPr>
+            <p:ph type="body" idx="3" sz="quarter"/>
+          </p:nvPr>
+        </p:nvSpPr>
+        <p:spPr/>
+        <p:txBody>
+          <a:bodyPr/>
+          <a:lstStyle/>
+          <a:p>
+            <a:r>
+              <a:t>左：两阶段 loss 收敛；右：形变场 Jacobian 行列式中心层，颜色接近 1 表示近似保体积、无折叠。</a:t>
+            </a:r>
+          </a:p>
+        </p:txBody>
+      </p:sp>
+      <p:sp>
+        <p:nvSpPr>
+          <p:cNvPr id="4" name="Slide Number Placeholder 3"/>
+          <p:cNvSpPr>
+            <a:spLocks noGrp="1"/>
+          </p:cNvSpPr>
+          <p:nvPr>
+            <p:ph type="sldNum" idx="5" sz="quarter"/>
+          </p:nvPr>
+        </p:nvSpPr>
+        <p:spPr/>
+      </p:sp>
+    </p:spTree>
+  </p:cSld>
+  <p:clrMapOvr>
+    <a:masterClrMapping/>
+  </p:clrMapOvr>
+</p:notes>
+</file>
+
+<file path=ppt/notesSlides/notesSlide9.xml><?xml version="1.0" encoding="utf-8"?>
+<p:notes xmlns:a="http://schemas.openxmlformats.org/drawingml/2006/main" xmlns:p="http://schemas.openxmlformats.org/presentationml/2006/main" xmlns:r="http://schemas.openxmlformats.org/officeDocument/2006/relationships">
+  <p:cSld>
+    <p:spTree>
+      <p:nvGrpSpPr>
+        <p:cNvPr id="1" name=""/>
+        <p:cNvGrpSpPr/>
+        <p:nvPr/>
+      </p:nvGrpSpPr>
+      <p:grpSpPr>
+        <a:xfrm>
+          <a:off x="0" y="0"/>
+          <a:ext cx="0" cy="0"/>
+          <a:chOff x="0" y="0"/>
+          <a:chExt cx="0" cy="0"/>
+        </a:xfrm>
+      </p:grpSpPr>
+      <p:sp>
+        <p:nvSpPr>
+          <p:cNvPr id="2" name="Slide Image Placeholder 1"/>
+          <p:cNvSpPr>
+            <a:spLocks noGrp="1"/>
+          </p:cNvSpPr>
+          <p:nvPr>
+            <p:ph type="sldImg" idx="2"/>
+          </p:nvPr>
+        </p:nvSpPr>
+        <p:spPr/>
+      </p:sp>
+      <p:sp>
+        <p:nvSpPr>
+          <p:cNvPr id="3" name="Notes Placeholder 2"/>
+          <p:cNvSpPr>
+            <a:spLocks noGrp="1"/>
+          </p:cNvSpPr>
+          <p:nvPr>
+            <p:ph type="body" idx="3" sz="quarter"/>
+          </p:nvPr>
+        </p:nvSpPr>
+        <p:spPr/>
+        <p:txBody>
+          <a:bodyPr/>
+          <a:lstStyle/>
+          <a:p>
+            <a:r>
+              <a:t>做了什么 / 验证了什么 / 局限与展望。可拓展：散射与 HU 定量校正、多病例评估、加入标志点 TRE 或轮廓 Dice、学习式配准网络。</a:t>
+            </a:r>
+          </a:p>
+        </p:txBody>
+      </p:sp>
+      <p:sp>
+        <p:nvSpPr>
+          <p:cNvPr id="4" name="Slide Number Placeholder 3"/>
+          <p:cNvSpPr>
+            <a:spLocks noGrp="1"/>
+          </p:cNvSpPr>
+          <p:nvPr>
+            <p:ph type="sldNum" idx="5" sz="quarter"/>
+          </p:nvPr>
+        </p:nvSpPr>
+        <p:spPr/>
+      </p:sp>
+    </p:spTree>
+  </p:cSld>
+  <p:clrMapOvr>
+    <a:masterClrMapping/>
+  </p:clrMapOvr>
+</p:notes>
 </file>
 
 <file path=ppt/slideLayouts/slideLayout1.xml><?xml version="1.0" encoding="utf-8"?>
@@ -3097,22 +4077,46 @@
         <p:nvPr/>
       </p:nvGrpSpPr>
       <p:grpSpPr/>
-      <p:sp>
-        <p:nvSpPr>
-          <p:cNvPr id="2" name="Rectangle 1"/>
+      <p:pic>
+        <p:nvPicPr>
+          <p:cNvPr id="2" name="Picture 1" descr="checkerboard.png"/>
+          <p:cNvPicPr>
+            <a:picLocks noChangeAspect="1"/>
+          </p:cNvPicPr>
+          <p:nvPr/>
+        </p:nvPicPr>
+        <p:blipFill>
+          <a:blip r:embed="rId2"/>
+          <a:stretch>
+            <a:fillRect/>
+          </a:stretch>
+        </p:blipFill>
+        <p:spPr>
+          <a:xfrm>
+            <a:off x="7612972" y="0"/>
+            <a:ext cx="4525095" cy="6858000"/>
+          </a:xfrm>
+          <a:prstGeom prst="rect">
+            <a:avLst/>
+          </a:prstGeom>
+        </p:spPr>
+      </p:pic>
+      <p:sp>
+        <p:nvSpPr>
+          <p:cNvPr id="3" name="Rectangle 2"/>
           <p:cNvSpPr/>
           <p:nvPr/>
         </p:nvSpPr>
         <p:spPr>
           <a:xfrm>
-            <a:off x="0" y="2286000"/>
-            <a:ext cx="12191695" cy="91440"/>
+            <a:off x="0" y="0"/>
+            <a:ext cx="7589520" cy="6858000"/>
           </a:xfrm>
           <a:prstGeom prst="rect">
             <a:avLst/>
           </a:prstGeom>
           <a:solidFill>
-            <a:srgbClr val="1B3B6F"/>
+            <a:srgbClr val="FFFFFF"/>
           </a:solidFill>
           <a:ln>
             <a:noFill/>
@@ -3142,14 +4146,57 @@
       </p:sp>
       <p:sp>
         <p:nvSpPr>
-          <p:cNvPr id="3" name="TextBox 2"/>
+          <p:cNvPr id="4" name="Rectangle 3"/>
+          <p:cNvSpPr/>
+          <p:nvPr/>
+        </p:nvSpPr>
+        <p:spPr>
+          <a:xfrm>
+            <a:off x="822960" y="2286000"/>
+            <a:ext cx="109728" cy="2011680"/>
+          </a:xfrm>
+          <a:prstGeom prst="rect">
+            <a:avLst/>
+          </a:prstGeom>
+          <a:solidFill>
+            <a:srgbClr val="1F3B6E"/>
+          </a:solidFill>
+          <a:ln>
+            <a:noFill/>
+          </a:ln>
+        </p:spPr>
+        <p:style>
+          <a:lnRef idx="1">
+            <a:schemeClr val="accent1"/>
+          </a:lnRef>
+          <a:fillRef idx="3">
+            <a:schemeClr val="accent1"/>
+          </a:fillRef>
+          <a:effectRef idx="2">
+            <a:schemeClr val="accent1"/>
+          </a:effectRef>
+          <a:fontRef idx="minor">
+            <a:schemeClr val="lt1"/>
+          </a:fontRef>
+        </p:style>
+        <p:txBody>
+          <a:bodyPr rtlCol="0" anchor="ctr"/>
+          <a:lstStyle/>
+          <a:p>
+            <a:pPr algn="ctr"/>
+          </a:p>
+        </p:txBody>
+      </p:sp>
+      <p:sp>
+        <p:nvSpPr>
+          <p:cNvPr id="5" name="TextBox 4"/>
           <p:cNvSpPr txBox="1"/>
           <p:nvPr/>
         </p:nvSpPr>
         <p:spPr>
           <a:xfrm>
-            <a:off x="822960" y="2468880"/>
-            <a:ext cx="10515600" cy="1828800"/>
+            <a:off x="1097280" y="2286000"/>
+            <a:ext cx="6126480" cy="2377440"/>
           </a:xfrm>
           <a:prstGeom prst="rect">
             <a:avLst/>
@@ -3163,24 +4210,38 @@
           <a:lstStyle/>
           <a:p>
             <a:r>
-              <a:rPr sz="4000" b="1">
+              <a:rPr sz="3800" b="1">
                 <a:solidFill>
-                  <a:srgbClr val="1B3B6F"/>
+                  <a:srgbClr val="1F3B6E"/>
                 </a:solidFill>
                 <a:latin typeface="Microsoft YaHei"/>
+                <a:ea typeface="Microsoft YaHei"/>
               </a:rPr>
               <a:t>CBCT → pCT 医学影像配准</a:t>
             </a:r>
           </a:p>
           <a:p>
             <a:r>
-              <a:rPr sz="1800" b="0">
+              <a:rPr sz="1700" b="0">
                 <a:solidFill>
                   <a:srgbClr val="5A5A5A"/>
                 </a:solidFill>
                 <a:latin typeface="Microsoft YaHei"/>
+                <a:ea typeface="Microsoft YaHei"/>
               </a:rPr>
-              <a:t>锥束CT 与 计划CT 的刚体 + 微分同胚形变配准（病例 M24557）</a:t>
+              <a:t>锥束CT 与 计划CT 的刚体配准（含可选形变细化）</a:t>
+            </a:r>
+          </a:p>
+          <a:p>
+            <a:r>
+              <a:rPr sz="1500" b="0">
+                <a:solidFill>
+                  <a:srgbClr val="222222"/>
+                </a:solidFill>
+                <a:latin typeface="Microsoft YaHei"/>
+                <a:ea typeface="Microsoft YaHei"/>
+              </a:rPr>
+              <a:t>病例 M24557</a:t>
             </a:r>
           </a:p>
           <a:p>
@@ -3190,8 +4251,9 @@
                   <a:srgbClr val="5A5A5A"/>
                 </a:solidFill>
                 <a:latin typeface="Microsoft YaHei"/>
+                <a:ea typeface="Microsoft YaHei"/>
               </a:rPr>
-              <a:t>汇报人：________      日期：2026-06-19</a:t>
+              <a:t>汇报人：杨同学      2026-06-18</a:t>
             </a:r>
           </a:p>
         </p:txBody>
@@ -3216,54 +4278,20 @@
       <p:grpSpPr/>
       <p:sp>
         <p:nvSpPr>
-          <p:cNvPr id="2" name="TextBox 1"/>
-          <p:cNvSpPr txBox="1"/>
-          <p:nvPr/>
-        </p:nvSpPr>
-        <p:spPr>
-          <a:xfrm>
-            <a:off x="502920" y="274320"/>
-            <a:ext cx="11155680" cy="822960"/>
-          </a:xfrm>
-          <a:prstGeom prst="rect">
-            <a:avLst/>
-          </a:prstGeom>
-          <a:noFill/>
-        </p:spPr>
-        <p:txBody>
-          <a:bodyPr wrap="square">
-            <a:spAutoFit/>
-          </a:bodyPr>
-          <a:lstStyle/>
-          <a:p>
-            <a:r>
-              <a:rPr sz="2800" b="1">
-                <a:solidFill>
-                  <a:srgbClr val="1B3B6F"/>
-                </a:solidFill>
-                <a:latin typeface="Microsoft YaHei"/>
-              </a:rPr>
-              <a:t>小结与局限</a:t>
-            </a:r>
-          </a:p>
-        </p:txBody>
-      </p:sp>
-      <p:sp>
-        <p:nvSpPr>
-          <p:cNvPr id="3" name="Rectangle 2"/>
+          <p:cNvPr id="2" name="Rectangle 1"/>
           <p:cNvSpPr/>
           <p:nvPr/>
         </p:nvSpPr>
         <p:spPr>
           <a:xfrm>
-            <a:off x="530352" y="1078992"/>
-            <a:ext cx="2194560" cy="54864"/>
+            <a:off x="0" y="0"/>
+            <a:ext cx="12191695" cy="201168"/>
           </a:xfrm>
           <a:prstGeom prst="rect">
             <a:avLst/>
           </a:prstGeom>
           <a:solidFill>
-            <a:srgbClr val="1B3B6F"/>
+            <a:srgbClr val="1F3B6E"/>
           </a:solidFill>
           <a:ln>
             <a:noFill/>
@@ -3293,14 +4321,14 @@
       </p:sp>
       <p:sp>
         <p:nvSpPr>
-          <p:cNvPr id="4" name="TextBox 3"/>
+          <p:cNvPr id="3" name="TextBox 2"/>
           <p:cNvSpPr txBox="1"/>
           <p:nvPr/>
         </p:nvSpPr>
         <p:spPr>
           <a:xfrm>
-            <a:off x="640080" y="1371600"/>
-            <a:ext cx="11155680" cy="5120640"/>
+            <a:off x="502920" y="384048"/>
+            <a:ext cx="11155680" cy="822960"/>
           </a:xfrm>
           <a:prstGeom prst="rect">
             <a:avLst/>
@@ -3313,147 +4341,177 @@
           </a:bodyPr>
           <a:lstStyle/>
           <a:p>
+            <a:r>
+              <a:rPr sz="2800" b="1">
+                <a:solidFill>
+                  <a:srgbClr val="1F3B6E"/>
+                </a:solidFill>
+                <a:latin typeface="Microsoft YaHei"/>
+                <a:ea typeface="Microsoft YaHei"/>
+              </a:rPr>
+              <a:t>小结与局限</a:t>
+            </a:r>
+          </a:p>
+        </p:txBody>
+      </p:sp>
+      <p:sp>
+        <p:nvSpPr>
+          <p:cNvPr id="4" name="TextBox 3"/>
+          <p:cNvSpPr txBox="1"/>
+          <p:nvPr/>
+        </p:nvSpPr>
+        <p:spPr>
+          <a:xfrm>
+            <a:off x="502920" y="6419088"/>
+            <a:ext cx="5486400" cy="365760"/>
+          </a:xfrm>
+          <a:prstGeom prst="rect">
+            <a:avLst/>
+          </a:prstGeom>
+          <a:noFill/>
+        </p:spPr>
+        <p:txBody>
+          <a:bodyPr wrap="square">
+            <a:spAutoFit/>
+          </a:bodyPr>
+          <a:lstStyle/>
+          <a:p>
+            <a:r>
+              <a:rPr sz="1000" b="0">
+                <a:solidFill>
+                  <a:srgbClr val="5A5A5A"/>
+                </a:solidFill>
+                <a:latin typeface="Microsoft YaHei"/>
+                <a:ea typeface="Microsoft YaHei"/>
+              </a:rPr>
+              <a:t>CBCT → pCT 配准 · 病例 M24557</a:t>
+            </a:r>
+          </a:p>
+        </p:txBody>
+      </p:sp>
+      <p:sp>
+        <p:nvSpPr>
+          <p:cNvPr id="5" name="TextBox 4"/>
+          <p:cNvSpPr txBox="1"/>
+          <p:nvPr/>
+        </p:nvSpPr>
+        <p:spPr>
+          <a:xfrm>
+            <a:off x="10789920" y="6419088"/>
+            <a:ext cx="914400" cy="365760"/>
+          </a:xfrm>
+          <a:prstGeom prst="rect">
+            <a:avLst/>
+          </a:prstGeom>
+          <a:noFill/>
+        </p:spPr>
+        <p:txBody>
+          <a:bodyPr wrap="square">
+            <a:spAutoFit/>
+          </a:bodyPr>
+          <a:lstStyle/>
+          <a:p>
+            <a:pPr algn="r"/>
+            <a:r>
+              <a:rPr sz="1000" b="0">
+                <a:solidFill>
+                  <a:srgbClr val="5A5A5A"/>
+                </a:solidFill>
+                <a:latin typeface="Microsoft YaHei"/>
+                <a:ea typeface="Microsoft YaHei"/>
+              </a:rPr>
+              <a:t>10</a:t>
+            </a:r>
+          </a:p>
+        </p:txBody>
+      </p:sp>
+      <p:sp>
+        <p:nvSpPr>
+          <p:cNvPr id="6" name="TextBox 5"/>
+          <p:cNvSpPr txBox="1"/>
+          <p:nvPr/>
+        </p:nvSpPr>
+        <p:spPr>
+          <a:xfrm>
+            <a:off x="640080" y="1554480"/>
+            <a:ext cx="10972800" cy="4389120"/>
+          </a:xfrm>
+          <a:prstGeom prst="rect">
+            <a:avLst/>
+          </a:prstGeom>
+          <a:noFill/>
+        </p:spPr>
+        <p:txBody>
+          <a:bodyPr wrap="square">
+            <a:spAutoFit/>
+          </a:bodyPr>
+          <a:lstStyle/>
+          <a:p>
             <a:pPr>
               <a:spcAft>
-                <a:spcPts val="600"/>
+                <a:spcPts val="1000"/>
               </a:spcAft>
             </a:pPr>
             <a:r>
-              <a:rPr sz="1700" b="0">
+              <a:rPr sz="1800" b="0">
                 <a:solidFill>
                   <a:srgbClr val="222222"/>
                 </a:solidFill>
                 <a:latin typeface="Microsoft YaHei"/>
+                <a:ea typeface="Microsoft YaHei"/>
               </a:rPr>
-              <a:t>• 做了什么</a:t>
-            </a:r>
-          </a:p>
-          <a:p>
-            <a:pPr lvl="1">
+              <a:t>▪ 纯 PyTorch 实现 CBCT→pCT 刚体配准，导出物理摆位修正</a:t>
+            </a:r>
+          </a:p>
+          <a:p>
+            <a:pPr>
               <a:spcAft>
-                <a:spcPts val="600"/>
+                <a:spcPts val="1000"/>
               </a:spcAft>
             </a:pPr>
             <a:r>
-              <a:rPr sz="1500" b="0">
-                <a:solidFill>
-                  <a:srgbClr val="5A5A5A"/>
-                </a:solidFill>
-                <a:latin typeface="Microsoft YaHei"/>
-              </a:rPr>
-              <a:t>– 纯 PyTorch 实现 CBCT→pCT 刚体 + 微分同胚形变配准，导出物理单位摆位修正。</a:t>
-            </a:r>
-          </a:p>
-          <a:p>
-            <a:pPr lvl="1">
-              <a:spcAft>
-                <a:spcPts val="600"/>
-              </a:spcAft>
-            </a:pPr>
-            <a:r>
-              <a:rPr sz="1500" b="0">
-                <a:solidFill>
-                  <a:srgbClr val="5A5A5A"/>
-                </a:solidFill>
-                <a:latin typeface="Microsoft YaHei"/>
-              </a:rPr>
-              <a:t>– 针对 CBCT 物理特性做了：稳健初始化、LNCC、FOV 掩膜、立方体真刚体。</a:t>
-            </a:r>
-          </a:p>
-          <a:p>
-            <a:pPr>
-              <a:spcAft>
-                <a:spcPts val="600"/>
-              </a:spcAft>
-            </a:pPr>
-            <a:r>
-              <a:rPr sz="1700" b="0">
+              <a:rPr sz="1800" b="0">
                 <a:solidFill>
                   <a:srgbClr val="222222"/>
                 </a:solidFill>
                 <a:latin typeface="Microsoft YaHei"/>
+                <a:ea typeface="Microsoft YaHei"/>
               </a:rPr>
-              <a:t>• 验证了什么</a:t>
-            </a:r>
-          </a:p>
-          <a:p>
-            <a:pPr lvl="1">
+              <a:t>▪ 针对 CBCT 物理特性：稳健初始化 / LNCC / FOV 掩膜 / 真刚体</a:t>
+            </a:r>
+          </a:p>
+          <a:p>
+            <a:pPr>
               <a:spcAft>
-                <a:spcPts val="600"/>
+                <a:spcPts val="1000"/>
               </a:spcAft>
             </a:pPr>
             <a:r>
-              <a:rPr sz="1500" b="0">
-                <a:solidFill>
-                  <a:srgbClr val="5A5A5A"/>
-                </a:solidFill>
-                <a:latin typeface="Microsoft YaHei"/>
-              </a:rPr>
-              <a:t>– 独立于优化目标的骨 Dice 大幅提升；Jacobian 负值≈0 证明形变合法。</a:t>
-            </a:r>
-          </a:p>
-          <a:p>
-            <a:pPr>
-              <a:spcAft>
-                <a:spcPts val="600"/>
-              </a:spcAft>
-            </a:pPr>
-            <a:r>
-              <a:rPr sz="1700" b="0">
+              <a:rPr sz="1800" b="0">
                 <a:solidFill>
                   <a:srgbClr val="222222"/>
                 </a:solidFill>
                 <a:latin typeface="Microsoft YaHei"/>
+                <a:ea typeface="Microsoft YaHei"/>
               </a:rPr>
-              <a:t>• 局限</a:t>
-            </a:r>
-          </a:p>
-          <a:p>
-            <a:pPr lvl="1">
+              <a:t>▪ 独立骨 Dice 验证（0.128→0.832）；形变仅小幅细化、无折叠</a:t>
+            </a:r>
+          </a:p>
+          <a:p>
+            <a:pPr>
               <a:spcAft>
-                <a:spcPts val="600"/>
+                <a:spcPts val="1000"/>
               </a:spcAft>
             </a:pPr>
             <a:r>
-              <a:rPr sz="1500" b="0">
-                <a:solidFill>
-                  <a:srgbClr val="5A5A5A"/>
-                </a:solidFill>
-                <a:latin typeface="Microsoft YaHei"/>
-              </a:rPr>
-              <a:t>– 未对 CBCT 散射 / HU 做定量校正；单病例；未做标志点 TRE 几何精度评估。</a:t>
-            </a:r>
-          </a:p>
-          <a:p>
-            <a:pPr>
-              <a:spcAft>
-                <a:spcPts val="600"/>
-              </a:spcAft>
-            </a:pPr>
-            <a:r>
-              <a:rPr sz="1700" b="0">
+              <a:rPr sz="1800" b="0">
                 <a:solidFill>
                   <a:srgbClr val="222222"/>
                 </a:solidFill>
                 <a:latin typeface="Microsoft YaHei"/>
+                <a:ea typeface="Microsoft YaHei"/>
               </a:rPr>
-              <a:t>• 可拓展</a:t>
-            </a:r>
-          </a:p>
-          <a:p>
-            <a:pPr lvl="1">
-              <a:spcAft>
-                <a:spcPts val="600"/>
-              </a:spcAft>
-            </a:pPr>
-            <a:r>
-              <a:rPr sz="1500" b="0">
-                <a:solidFill>
-                  <a:srgbClr val="5A5A5A"/>
-                </a:solidFill>
-                <a:latin typeface="Microsoft YaHei"/>
-              </a:rPr>
-              <a:t>– 散射/HU 校正、多病例评估、加入标志点或轮廓 Dice、学习式配准网络。</a:t>
+              <a:t>▪ 局限：未做散射/HU 校正、单病例、未做标志点 TRE</a:t>
             </a:r>
           </a:p>
         </p:txBody>
@@ -3478,54 +4536,20 @@
       <p:grpSpPr/>
       <p:sp>
         <p:nvSpPr>
-          <p:cNvPr id="2" name="TextBox 1"/>
-          <p:cNvSpPr txBox="1"/>
-          <p:nvPr/>
-        </p:nvSpPr>
-        <p:spPr>
-          <a:xfrm>
-            <a:off x="502920" y="274320"/>
-            <a:ext cx="11155680" cy="822960"/>
-          </a:xfrm>
-          <a:prstGeom prst="rect">
-            <a:avLst/>
-          </a:prstGeom>
-          <a:noFill/>
-        </p:spPr>
-        <p:txBody>
-          <a:bodyPr wrap="square">
-            <a:spAutoFit/>
-          </a:bodyPr>
-          <a:lstStyle/>
-          <a:p>
-            <a:r>
-              <a:rPr sz="2800" b="1">
-                <a:solidFill>
-                  <a:srgbClr val="1B3B6F"/>
-                </a:solidFill>
-                <a:latin typeface="Microsoft YaHei"/>
-              </a:rPr>
-              <a:t>任务与数据</a:t>
-            </a:r>
-          </a:p>
-        </p:txBody>
-      </p:sp>
-      <p:sp>
-        <p:nvSpPr>
-          <p:cNvPr id="3" name="Rectangle 2"/>
+          <p:cNvPr id="2" name="Rectangle 1"/>
           <p:cNvSpPr/>
           <p:nvPr/>
         </p:nvSpPr>
         <p:spPr>
           <a:xfrm>
-            <a:off x="530352" y="1078992"/>
-            <a:ext cx="2194560" cy="54864"/>
+            <a:off x="0" y="0"/>
+            <a:ext cx="12191695" cy="201168"/>
           </a:xfrm>
           <a:prstGeom prst="rect">
             <a:avLst/>
           </a:prstGeom>
           <a:solidFill>
-            <a:srgbClr val="1B3B6F"/>
+            <a:srgbClr val="1F3B6E"/>
           </a:solidFill>
           <a:ln>
             <a:noFill/>
@@ -3553,9 +4577,115 @@
           </a:p>
         </p:txBody>
       </p:sp>
+      <p:sp>
+        <p:nvSpPr>
+          <p:cNvPr id="3" name="TextBox 2"/>
+          <p:cNvSpPr txBox="1"/>
+          <p:nvPr/>
+        </p:nvSpPr>
+        <p:spPr>
+          <a:xfrm>
+            <a:off x="502920" y="384048"/>
+            <a:ext cx="11155680" cy="822960"/>
+          </a:xfrm>
+          <a:prstGeom prst="rect">
+            <a:avLst/>
+          </a:prstGeom>
+          <a:noFill/>
+        </p:spPr>
+        <p:txBody>
+          <a:bodyPr wrap="square">
+            <a:spAutoFit/>
+          </a:bodyPr>
+          <a:lstStyle/>
+          <a:p>
+            <a:r>
+              <a:rPr sz="2800" b="1">
+                <a:solidFill>
+                  <a:srgbClr val="1F3B6E"/>
+                </a:solidFill>
+                <a:latin typeface="Microsoft YaHei"/>
+                <a:ea typeface="Microsoft YaHei"/>
+              </a:rPr>
+              <a:t>任务与数据</a:t>
+            </a:r>
+          </a:p>
+        </p:txBody>
+      </p:sp>
+      <p:sp>
+        <p:nvSpPr>
+          <p:cNvPr id="4" name="TextBox 3"/>
+          <p:cNvSpPr txBox="1"/>
+          <p:nvPr/>
+        </p:nvSpPr>
+        <p:spPr>
+          <a:xfrm>
+            <a:off x="502920" y="6419088"/>
+            <a:ext cx="5486400" cy="365760"/>
+          </a:xfrm>
+          <a:prstGeom prst="rect">
+            <a:avLst/>
+          </a:prstGeom>
+          <a:noFill/>
+        </p:spPr>
+        <p:txBody>
+          <a:bodyPr wrap="square">
+            <a:spAutoFit/>
+          </a:bodyPr>
+          <a:lstStyle/>
+          <a:p>
+            <a:r>
+              <a:rPr sz="1000" b="0">
+                <a:solidFill>
+                  <a:srgbClr val="5A5A5A"/>
+                </a:solidFill>
+                <a:latin typeface="Microsoft YaHei"/>
+                <a:ea typeface="Microsoft YaHei"/>
+              </a:rPr>
+              <a:t>CBCT → pCT 配准 · 病例 M24557</a:t>
+            </a:r>
+          </a:p>
+        </p:txBody>
+      </p:sp>
+      <p:sp>
+        <p:nvSpPr>
+          <p:cNvPr id="5" name="TextBox 4"/>
+          <p:cNvSpPr txBox="1"/>
+          <p:nvPr/>
+        </p:nvSpPr>
+        <p:spPr>
+          <a:xfrm>
+            <a:off x="10789920" y="6419088"/>
+            <a:ext cx="914400" cy="365760"/>
+          </a:xfrm>
+          <a:prstGeom prst="rect">
+            <a:avLst/>
+          </a:prstGeom>
+          <a:noFill/>
+        </p:spPr>
+        <p:txBody>
+          <a:bodyPr wrap="square">
+            <a:spAutoFit/>
+          </a:bodyPr>
+          <a:lstStyle/>
+          <a:p>
+            <a:pPr algn="r"/>
+            <a:r>
+              <a:rPr sz="1000" b="0">
+                <a:solidFill>
+                  <a:srgbClr val="5A5A5A"/>
+                </a:solidFill>
+                <a:latin typeface="Microsoft YaHei"/>
+                <a:ea typeface="Microsoft YaHei"/>
+              </a:rPr>
+              <a:t>2</a:t>
+            </a:r>
+          </a:p>
+        </p:txBody>
+      </p:sp>
       <p:pic>
         <p:nvPicPr>
-          <p:cNvPr id="4" name="Picture 3" descr="data_overview.png"/>
+          <p:cNvPr id="6" name="Picture 5" descr="data_overview.png"/>
           <p:cNvPicPr>
             <a:picLocks noChangeAspect="1"/>
           </p:cNvPicPr>
@@ -3569,8 +4699,8 @@
         </p:blipFill>
         <p:spPr>
           <a:xfrm>
-            <a:off x="1358449" y="1325880"/>
-            <a:ext cx="3866780" cy="4572000"/>
+            <a:off x="457200" y="1476383"/>
+            <a:ext cx="6583680" cy="4453873"/>
           </a:xfrm>
           <a:prstGeom prst="rect">
             <a:avLst/>
@@ -3579,15 +4709,15 @@
       </p:pic>
       <p:graphicFrame>
         <p:nvGraphicFramePr>
-          <p:cNvPr id="5" name="Table 4"/>
+          <p:cNvPr id="7" name="Table 6"/>
           <p:cNvGraphicFramePr>
             <a:graphicFrameLocks noGrp="1"/>
           </p:cNvGraphicFramePr>
           <p:nvPr/>
         </p:nvGraphicFramePr>
         <p:xfrm>
-          <a:off x="6400800" y="1554480"/>
-          <a:ext cx="5394960" cy="2377440"/>
+          <a:off x="7223760" y="1554480"/>
+          <a:ext cx="4572000" cy="2011680"/>
         </p:xfrm>
         <a:graphic>
           <a:graphicData uri="http://schemas.openxmlformats.org/drawingml/2006/table">
@@ -3596,11 +4726,11 @@
                 <a:tableStyleId>{5C22544A-7EE6-4342-B048-85BDC9FD1C3A}</a:tableStyleId>
               </a:tblPr>
               <a:tblGrid>
-                <a:gridCol w="1280160"/>
-                <a:gridCol w="2194560"/>
-                <a:gridCol w="1920240"/>
+                <a:gridCol w="1188720"/>
+                <a:gridCol w="1737360"/>
+                <a:gridCol w="1645920"/>
               </a:tblGrid>
-              <a:tr h="396240">
+              <a:tr h="402336">
                 <a:tc>
                   <a:txBody>
                     <a:bodyPr/>
@@ -3612,6 +4742,7 @@
                             <a:srgbClr val="FFFFFF"/>
                           </a:solidFill>
                           <a:latin typeface="Microsoft YaHei"/>
+                          <a:ea typeface="Microsoft YaHei"/>
                         </a:rPr>
                         <a:t/>
                       </a:r>
@@ -3619,7 +4750,7 @@
                   </a:txBody>
                   <a:tcPr anchor="ctr" marT="25400" marB="25400">
                     <a:solidFill>
-                      <a:srgbClr val="1B3B6F"/>
+                      <a:srgbClr val="1F3B6E"/>
                     </a:solidFill>
                   </a:tcPr>
                 </a:tc>
@@ -3634,6 +4765,7 @@
                             <a:srgbClr val="FFFFFF"/>
                           </a:solidFill>
                           <a:latin typeface="Microsoft YaHei"/>
+                          <a:ea typeface="Microsoft YaHei"/>
                         </a:rPr>
                         <a:t>pCT 计划CT</a:t>
                       </a:r>
@@ -3641,7 +4773,7 @@
                   </a:txBody>
                   <a:tcPr anchor="ctr" marT="25400" marB="25400">
                     <a:solidFill>
-                      <a:srgbClr val="1B3B6F"/>
+                      <a:srgbClr val="1F3B6E"/>
                     </a:solidFill>
                   </a:tcPr>
                 </a:tc>
@@ -3656,6 +4788,7 @@
                             <a:srgbClr val="FFFFFF"/>
                           </a:solidFill>
                           <a:latin typeface="Microsoft YaHei"/>
+                          <a:ea typeface="Microsoft YaHei"/>
                         </a:rPr>
                         <a:t>CBCT 锥束CT</a:t>
                       </a:r>
@@ -3663,12 +4796,12 @@
                   </a:txBody>
                   <a:tcPr anchor="ctr" marT="25400" marB="25400">
                     <a:solidFill>
-                      <a:srgbClr val="1B3B6F"/>
+                      <a:srgbClr val="1F3B6E"/>
                     </a:solidFill>
                   </a:tcPr>
                 </a:tc>
               </a:tr>
-              <a:tr h="396240">
+              <a:tr h="402336">
                 <a:tc>
                   <a:txBody>
                     <a:bodyPr/>
@@ -3680,6 +4813,7 @@
                             <a:srgbClr val="222222"/>
                           </a:solidFill>
                           <a:latin typeface="Microsoft YaHei"/>
+                          <a:ea typeface="Microsoft YaHei"/>
                         </a:rPr>
                         <a:t>设备</a:t>
                       </a:r>
@@ -3702,8 +4836,9 @@
                             <a:srgbClr val="222222"/>
                           </a:solidFill>
                           <a:latin typeface="Microsoft YaHei"/>
+                          <a:ea typeface="Microsoft YaHei"/>
                         </a:rPr>
-                        <a:t>Philips Brilliance</a:t>
+                        <a:t>Philips</a:t>
                       </a:r>
                     </a:p>
                   </a:txBody>
@@ -3724,6 +4859,7 @@
                             <a:srgbClr val="222222"/>
                           </a:solidFill>
                           <a:latin typeface="Microsoft YaHei"/>
+                          <a:ea typeface="Microsoft YaHei"/>
                         </a:rPr>
                         <a:t>Elekta XVI</a:t>
                       </a:r>
@@ -3736,7 +4872,7 @@
                   </a:tcPr>
                 </a:tc>
               </a:tr>
-              <a:tr h="396240">
+              <a:tr h="402336">
                 <a:tc>
                   <a:txBody>
                     <a:bodyPr/>
@@ -3748,14 +4884,15 @@
                             <a:srgbClr val="222222"/>
                           </a:solidFill>
                           <a:latin typeface="Microsoft YaHei"/>
+                          <a:ea typeface="Microsoft YaHei"/>
                         </a:rPr>
-                        <a:t>模态</a:t>
+                        <a:t>矩阵</a:t>
                       </a:r>
                     </a:p>
                   </a:txBody>
                   <a:tcPr anchor="ctr" marT="25400" marB="25400">
                     <a:solidFill>
-                      <a:srgbClr val="E8EDF5"/>
+                      <a:srgbClr val="E9EEF6"/>
                     </a:solidFill>
                   </a:tcPr>
                 </a:tc>
@@ -3770,14 +4907,15 @@
                             <a:srgbClr val="222222"/>
                           </a:solidFill>
                           <a:latin typeface="Microsoft YaHei"/>
+                          <a:ea typeface="Microsoft YaHei"/>
                         </a:rPr>
-                        <a:t>CT</a:t>
+                        <a:t>512×512×112</a:t>
                       </a:r>
                     </a:p>
                   </a:txBody>
                   <a:tcPr anchor="ctr" marT="25400" marB="25400">
                     <a:solidFill>
-                      <a:srgbClr val="E8EDF5"/>
+                      <a:srgbClr val="E9EEF6"/>
                     </a:solidFill>
                   </a:tcPr>
                 </a:tc>
@@ -3792,19 +4930,20 @@
                             <a:srgbClr val="222222"/>
                           </a:solidFill>
                           <a:latin typeface="Microsoft YaHei"/>
+                          <a:ea typeface="Microsoft YaHei"/>
                         </a:rPr>
-                        <a:t>CBCT(CT)</a:t>
+                        <a:t>270×270×128</a:t>
                       </a:r>
                     </a:p>
                   </a:txBody>
                   <a:tcPr anchor="ctr" marT="25400" marB="25400">
                     <a:solidFill>
-                      <a:srgbClr val="E8EDF5"/>
+                      <a:srgbClr val="E9EEF6"/>
                     </a:solidFill>
                   </a:tcPr>
                 </a:tc>
               </a:tr>
-              <a:tr h="396240">
+              <a:tr h="402336">
                 <a:tc>
                   <a:txBody>
                     <a:bodyPr/>
@@ -3816,8 +4955,9 @@
                             <a:srgbClr val="222222"/>
                           </a:solidFill>
                           <a:latin typeface="Microsoft YaHei"/>
+                          <a:ea typeface="Microsoft YaHei"/>
                         </a:rPr>
-                        <a:t>矩阵</a:t>
+                        <a:t>体素(mm)</a:t>
                       </a:r>
                     </a:p>
                   </a:txBody>
@@ -3838,8 +4978,9 @@
                             <a:srgbClr val="222222"/>
                           </a:solidFill>
                           <a:latin typeface="Microsoft YaHei"/>
+                          <a:ea typeface="Microsoft YaHei"/>
                         </a:rPr>
-                        <a:t>512×512×112</a:t>
+                        <a:t>1.16×1.16×3.0</a:t>
                       </a:r>
                     </a:p>
                   </a:txBody>
@@ -3860,8 +5001,9 @@
                             <a:srgbClr val="222222"/>
                           </a:solidFill>
                           <a:latin typeface="Microsoft YaHei"/>
+                          <a:ea typeface="Microsoft YaHei"/>
                         </a:rPr>
-                        <a:t>270×270×128</a:t>
+                        <a:t>1.0×1.0×1.0</a:t>
                       </a:r>
                     </a:p>
                   </a:txBody>
@@ -3872,7 +5014,7 @@
                   </a:tcPr>
                 </a:tc>
               </a:tr>
-              <a:tr h="396240">
+              <a:tr h="402336">
                 <a:tc>
                   <a:txBody>
                     <a:bodyPr/>
@@ -3884,14 +5026,15 @@
                             <a:srgbClr val="222222"/>
                           </a:solidFill>
                           <a:latin typeface="Microsoft YaHei"/>
+                          <a:ea typeface="Microsoft YaHei"/>
                         </a:rPr>
-                        <a:t>体素(mm)</a:t>
+                        <a:t>坐标系</a:t>
                       </a:r>
                     </a:p>
                   </a:txBody>
                   <a:tcPr anchor="ctr" marT="25400" marB="25400">
                     <a:solidFill>
-                      <a:srgbClr val="E8EDF5"/>
+                      <a:srgbClr val="E9EEF6"/>
                     </a:solidFill>
                   </a:tcPr>
                 </a:tc>
@@ -3906,14 +5049,15 @@
                             <a:srgbClr val="222222"/>
                           </a:solidFill>
                           <a:latin typeface="Microsoft YaHei"/>
+                          <a:ea typeface="Microsoft YaHei"/>
                         </a:rPr>
-                        <a:t>1.16×1.16×3.0</a:t>
+                        <a:t>床坐标 z≈-800</a:t>
                       </a:r>
                     </a:p>
                   </a:txBody>
                   <a:tcPr anchor="ctr" marT="25400" marB="25400">
                     <a:solidFill>
-                      <a:srgbClr val="E8EDF5"/>
+                      <a:srgbClr val="E9EEF6"/>
                     </a:solidFill>
                   </a:tcPr>
                 </a:tc>
@@ -3928,82 +5072,15 @@
                             <a:srgbClr val="222222"/>
                           </a:solidFill>
                           <a:latin typeface="Microsoft YaHei"/>
+                          <a:ea typeface="Microsoft YaHei"/>
                         </a:rPr>
-                        <a:t>1.0×1.0×1.0</a:t>
+                        <a:t>等中心 z≈0</a:t>
                       </a:r>
                     </a:p>
                   </a:txBody>
                   <a:tcPr anchor="ctr" marT="25400" marB="25400">
                     <a:solidFill>
-                      <a:srgbClr val="E8EDF5"/>
-                    </a:solidFill>
-                  </a:tcPr>
-                </a:tc>
-              </a:tr>
-              <a:tr h="396240">
-                <a:tc>
-                  <a:txBody>
-                    <a:bodyPr/>
-                    <a:lstStyle/>
-                    <a:p>
-                      <a:r>
-                        <a:rPr sz="1200" b="0">
-                          <a:solidFill>
-                            <a:srgbClr val="222222"/>
-                          </a:solidFill>
-                          <a:latin typeface="Microsoft YaHei"/>
-                        </a:rPr>
-                        <a:t>坐标系</a:t>
-                      </a:r>
-                    </a:p>
-                  </a:txBody>
-                  <a:tcPr anchor="ctr" marT="25400" marB="25400">
-                    <a:solidFill>
-                      <a:srgbClr val="FFFFFF"/>
-                    </a:solidFill>
-                  </a:tcPr>
-                </a:tc>
-                <a:tc>
-                  <a:txBody>
-                    <a:bodyPr/>
-                    <a:lstStyle/>
-                    <a:p>
-                      <a:r>
-                        <a:rPr sz="1200" b="0">
-                          <a:solidFill>
-                            <a:srgbClr val="222222"/>
-                          </a:solidFill>
-                          <a:latin typeface="Microsoft YaHei"/>
-                        </a:rPr>
-                        <a:t>CT 床坐标 (z≈-800)</a:t>
-                      </a:r>
-                    </a:p>
-                  </a:txBody>
-                  <a:tcPr anchor="ctr" marT="25400" marB="25400">
-                    <a:solidFill>
-                      <a:srgbClr val="FFFFFF"/>
-                    </a:solidFill>
-                  </a:tcPr>
-                </a:tc>
-                <a:tc>
-                  <a:txBody>
-                    <a:bodyPr/>
-                    <a:lstStyle/>
-                    <a:p>
-                      <a:r>
-                        <a:rPr sz="1200" b="0">
-                          <a:solidFill>
-                            <a:srgbClr val="222222"/>
-                          </a:solidFill>
-                          <a:latin typeface="Microsoft YaHei"/>
-                        </a:rPr>
-                        <a:t>等中心坐标 (z≈0)</a:t>
-                      </a:r>
-                    </a:p>
-                  </a:txBody>
-                  <a:tcPr anchor="ctr" marT="25400" marB="25400">
-                    <a:solidFill>
-                      <a:srgbClr val="FFFFFF"/>
+                      <a:srgbClr val="E9EEF6"/>
                     </a:solidFill>
                   </a:tcPr>
                 </a:tc>
@@ -4014,14 +5091,14 @@
       </p:graphicFrame>
       <p:sp>
         <p:nvSpPr>
-          <p:cNvPr id="6" name="TextBox 5"/>
+          <p:cNvPr id="8" name="TextBox 7"/>
           <p:cNvSpPr txBox="1"/>
           <p:nvPr/>
         </p:nvSpPr>
         <p:spPr>
           <a:xfrm>
-            <a:off x="6400800" y="4114800"/>
-            <a:ext cx="5394960" cy="2011680"/>
+            <a:off x="7223760" y="3931920"/>
+            <a:ext cx="4572000" cy="2194560"/>
           </a:xfrm>
           <a:prstGeom prst="rect">
             <a:avLst/>
@@ -4036,65 +5113,52 @@
           <a:p>
             <a:pPr>
               <a:spcAft>
-                <a:spcPts val="600"/>
+                <a:spcPts val="1000"/>
               </a:spcAft>
             </a:pPr>
             <a:r>
-              <a:rPr sz="1600" b="0">
+              <a:rPr sz="1800" b="0">
                 <a:solidFill>
                   <a:srgbClr val="222222"/>
                 </a:solidFill>
                 <a:latin typeface="Microsoft YaHei"/>
+                <a:ea typeface="Microsoft YaHei"/>
               </a:rPr>
-              <a:t>• 三个难点：</a:t>
-            </a:r>
-          </a:p>
-          <a:p>
-            <a:pPr lvl="1">
+              <a:t>▪ 不同 Frame of Reference（坐标不重叠）</a:t>
+            </a:r>
+          </a:p>
+          <a:p>
+            <a:pPr>
               <a:spcAft>
-                <a:spcPts val="600"/>
+                <a:spcPts val="1000"/>
               </a:spcAft>
             </a:pPr>
             <a:r>
-              <a:rPr sz="1400" b="0">
+              <a:rPr sz="1800" b="0">
                 <a:solidFill>
-                  <a:srgbClr val="5A5A5A"/>
+                  <a:srgbClr val="222222"/>
                 </a:solidFill>
                 <a:latin typeface="Microsoft YaHei"/>
+                <a:ea typeface="Microsoft YaHei"/>
               </a:rPr>
-              <a:t>– 不同 Frame of Reference（世界坐标不重叠）</a:t>
-            </a:r>
-          </a:p>
-          <a:p>
-            <a:pPr lvl="1">
+              <a:t>▪ 灰度不一致（散射 / HU 标定差异）</a:t>
+            </a:r>
+          </a:p>
+          <a:p>
+            <a:pPr>
               <a:spcAft>
-                <a:spcPts val="600"/>
+                <a:spcPts val="1000"/>
               </a:spcAft>
             </a:pPr>
             <a:r>
-              <a:rPr sz="1400" b="0">
+              <a:rPr sz="1800" b="0">
                 <a:solidFill>
-                  <a:srgbClr val="5A5A5A"/>
+                  <a:srgbClr val="222222"/>
                 </a:solidFill>
                 <a:latin typeface="Microsoft YaHei"/>
+                <a:ea typeface="Microsoft YaHei"/>
               </a:rPr>
-              <a:t>– 灰度不一致（散射/HU 标定差异）</a:t>
-            </a:r>
-          </a:p>
-          <a:p>
-            <a:pPr lvl="1">
-              <a:spcAft>
-                <a:spcPts val="600"/>
-              </a:spcAft>
-            </a:pPr>
-            <a:r>
-              <a:rPr sz="1400" b="0">
-                <a:solidFill>
-                  <a:srgbClr val="5A5A5A"/>
-                </a:solidFill>
-                <a:latin typeface="Microsoft YaHei"/>
-              </a:rPr>
-              <a:t>– 分辨率与 FOV 不同（CBCT 视野小、被截断）</a:t>
+              <a:t>▪ 分辨率与 FOV 不同（CBCT 视野小）</a:t>
             </a:r>
           </a:p>
         </p:txBody>
@@ -4119,54 +5183,20 @@
       <p:grpSpPr/>
       <p:sp>
         <p:nvSpPr>
-          <p:cNvPr id="2" name="TextBox 1"/>
-          <p:cNvSpPr txBox="1"/>
-          <p:nvPr/>
-        </p:nvSpPr>
-        <p:spPr>
-          <a:xfrm>
-            <a:off x="502920" y="274320"/>
-            <a:ext cx="11155680" cy="822960"/>
-          </a:xfrm>
-          <a:prstGeom prst="rect">
-            <a:avLst/>
-          </a:prstGeom>
-          <a:noFill/>
-        </p:spPr>
-        <p:txBody>
-          <a:bodyPr wrap="square">
-            <a:spAutoFit/>
-          </a:bodyPr>
-          <a:lstStyle/>
-          <a:p>
-            <a:r>
-              <a:rPr sz="2800" b="1">
-                <a:solidFill>
-                  <a:srgbClr val="1B3B6F"/>
-                </a:solidFill>
-                <a:latin typeface="Microsoft YaHei"/>
-              </a:rPr>
-              <a:t>为什么不平凡：CBCT 的物理特性决定方法</a:t>
-            </a:r>
-          </a:p>
-        </p:txBody>
-      </p:sp>
-      <p:sp>
-        <p:nvSpPr>
-          <p:cNvPr id="3" name="Rectangle 2"/>
+          <p:cNvPr id="2" name="Rectangle 1"/>
           <p:cNvSpPr/>
           <p:nvPr/>
         </p:nvSpPr>
         <p:spPr>
           <a:xfrm>
-            <a:off x="530352" y="1078992"/>
-            <a:ext cx="2194560" cy="54864"/>
+            <a:off x="0" y="0"/>
+            <a:ext cx="12191695" cy="201168"/>
           </a:xfrm>
           <a:prstGeom prst="rect">
             <a:avLst/>
           </a:prstGeom>
           <a:solidFill>
-            <a:srgbClr val="1B3B6F"/>
+            <a:srgbClr val="1F3B6E"/>
           </a:solidFill>
           <a:ln>
             <a:noFill/>
@@ -4194,9 +5224,115 @@
           </a:p>
         </p:txBody>
       </p:sp>
+      <p:sp>
+        <p:nvSpPr>
+          <p:cNvPr id="3" name="TextBox 2"/>
+          <p:cNvSpPr txBox="1"/>
+          <p:nvPr/>
+        </p:nvSpPr>
+        <p:spPr>
+          <a:xfrm>
+            <a:off x="502920" y="384048"/>
+            <a:ext cx="11155680" cy="822960"/>
+          </a:xfrm>
+          <a:prstGeom prst="rect">
+            <a:avLst/>
+          </a:prstGeom>
+          <a:noFill/>
+        </p:spPr>
+        <p:txBody>
+          <a:bodyPr wrap="square">
+            <a:spAutoFit/>
+          </a:bodyPr>
+          <a:lstStyle/>
+          <a:p>
+            <a:r>
+              <a:rPr sz="2800" b="1">
+                <a:solidFill>
+                  <a:srgbClr val="1F3B6E"/>
+                </a:solidFill>
+                <a:latin typeface="Microsoft YaHei"/>
+                <a:ea typeface="Microsoft YaHei"/>
+              </a:rPr>
+              <a:t>为什么不平凡：CBCT 的物理特性</a:t>
+            </a:r>
+          </a:p>
+        </p:txBody>
+      </p:sp>
+      <p:sp>
+        <p:nvSpPr>
+          <p:cNvPr id="4" name="TextBox 3"/>
+          <p:cNvSpPr txBox="1"/>
+          <p:nvPr/>
+        </p:nvSpPr>
+        <p:spPr>
+          <a:xfrm>
+            <a:off x="502920" y="6419088"/>
+            <a:ext cx="5486400" cy="365760"/>
+          </a:xfrm>
+          <a:prstGeom prst="rect">
+            <a:avLst/>
+          </a:prstGeom>
+          <a:noFill/>
+        </p:spPr>
+        <p:txBody>
+          <a:bodyPr wrap="square">
+            <a:spAutoFit/>
+          </a:bodyPr>
+          <a:lstStyle/>
+          <a:p>
+            <a:r>
+              <a:rPr sz="1000" b="0">
+                <a:solidFill>
+                  <a:srgbClr val="5A5A5A"/>
+                </a:solidFill>
+                <a:latin typeface="Microsoft YaHei"/>
+                <a:ea typeface="Microsoft YaHei"/>
+              </a:rPr>
+              <a:t>CBCT → pCT 配准 · 病例 M24557</a:t>
+            </a:r>
+          </a:p>
+        </p:txBody>
+      </p:sp>
+      <p:sp>
+        <p:nvSpPr>
+          <p:cNvPr id="5" name="TextBox 4"/>
+          <p:cNvSpPr txBox="1"/>
+          <p:nvPr/>
+        </p:nvSpPr>
+        <p:spPr>
+          <a:xfrm>
+            <a:off x="10789920" y="6419088"/>
+            <a:ext cx="914400" cy="365760"/>
+          </a:xfrm>
+          <a:prstGeom prst="rect">
+            <a:avLst/>
+          </a:prstGeom>
+          <a:noFill/>
+        </p:spPr>
+        <p:txBody>
+          <a:bodyPr wrap="square">
+            <a:spAutoFit/>
+          </a:bodyPr>
+          <a:lstStyle/>
+          <a:p>
+            <a:pPr algn="r"/>
+            <a:r>
+              <a:rPr sz="1000" b="0">
+                <a:solidFill>
+                  <a:srgbClr val="5A5A5A"/>
+                </a:solidFill>
+                <a:latin typeface="Microsoft YaHei"/>
+                <a:ea typeface="Microsoft YaHei"/>
+              </a:rPr>
+              <a:t>3</a:t>
+            </a:r>
+          </a:p>
+        </p:txBody>
+      </p:sp>
       <p:pic>
         <p:nvPicPr>
-          <p:cNvPr id="4" name="Picture 3" descr="coord_offset.png"/>
+          <p:cNvPr id="6" name="Picture 5" descr="coord_offset.png"/>
           <p:cNvPicPr>
             <a:picLocks noChangeAspect="1"/>
           </p:cNvPicPr>
@@ -4210,8 +5346,8 @@
         </p:blipFill>
         <p:spPr>
           <a:xfrm>
-            <a:off x="1426342" y="1234440"/>
-            <a:ext cx="9308834" cy="2651760"/>
+            <a:off x="1265845" y="1280160"/>
+            <a:ext cx="9629829" cy="2743200"/>
           </a:xfrm>
           <a:prstGeom prst="rect">
             <a:avLst/>
@@ -4220,14 +5356,14 @@
       </p:pic>
       <p:sp>
         <p:nvSpPr>
-          <p:cNvPr id="5" name="TextBox 4"/>
+          <p:cNvPr id="7" name="TextBox 6"/>
           <p:cNvSpPr txBox="1"/>
           <p:nvPr/>
         </p:nvSpPr>
         <p:spPr>
           <a:xfrm>
-            <a:off x="548640" y="4114800"/>
-            <a:ext cx="11155680" cy="2560320"/>
+            <a:off x="640080" y="4206240"/>
+            <a:ext cx="10972800" cy="2194560"/>
           </a:xfrm>
           <a:prstGeom prst="rect">
             <a:avLst/>
@@ -4242,81 +5378,69 @@
           <a:p>
             <a:pPr>
               <a:spcAft>
-                <a:spcPts val="600"/>
+                <a:spcPts val="1000"/>
               </a:spcAft>
             </a:pPr>
             <a:r>
-              <a:rPr sz="1400" b="0">
+              <a:rPr sz="1800" b="0">
                 <a:solidFill>
                   <a:srgbClr val="222222"/>
                 </a:solidFill>
                 <a:latin typeface="Microsoft YaHei"/>
+                <a:ea typeface="Microsoft YaHei"/>
               </a:rPr>
-              <a:t>• 世界坐标系不同：CBCT 以治疗机等中心为原点、pCT 以 CT 床为原点，z 相差约 800 mm，DICOM 头无法直接对齐。</a:t>
+              <a:t>▪ 坐标系不同：z 相差约 800 mm，DICOM 头不能直接对齐</a:t>
             </a:r>
           </a:p>
           <a:p>
             <a:pPr>
               <a:spcAft>
-                <a:spcPts val="600"/>
+                <a:spcPts val="1000"/>
               </a:spcAft>
             </a:pPr>
             <a:r>
-              <a:rPr sz="1400" b="0">
+              <a:rPr sz="1800" b="0">
                 <a:solidFill>
                   <a:srgbClr val="222222"/>
                 </a:solidFill>
                 <a:latin typeface="Microsoft YaHei"/>
+                <a:ea typeface="Microsoft YaHei"/>
               </a:rPr>
-              <a:t>• X 射线散射 → cupping 伪影，软组织区 HU 向中心塌陷。</a:t>
+              <a:t>▪ X 射线散射 → cupping 伪影，软组织 HU 塌陷</a:t>
             </a:r>
           </a:p>
           <a:p>
             <a:pPr>
               <a:spcAft>
-                <a:spcPts val="600"/>
+                <a:spcPts val="1000"/>
               </a:spcAft>
             </a:pPr>
             <a:r>
-              <a:rPr sz="1400" b="0">
+              <a:rPr sz="1800" b="0">
                 <a:solidFill>
                   <a:srgbClr val="222222"/>
                 </a:solidFill>
                 <a:latin typeface="Microsoft YaHei"/>
+                <a:ea typeface="Microsoft YaHei"/>
               </a:rPr>
-              <a:t>• HU 标定不准：CBCT 的 CT 值与计划 CT 不可直接比较。</a:t>
+              <a:t>▪ HU 标定不准：CBCT 与计划CT 不可直接比较</a:t>
             </a:r>
           </a:p>
           <a:p>
             <a:pPr>
               <a:spcAft>
-                <a:spcPts val="600"/>
+                <a:spcPts val="1000"/>
               </a:spcAft>
             </a:pPr>
             <a:r>
-              <a:rPr sz="1400" b="0">
+              <a:rPr sz="1800" b="0">
                 <a:solidFill>
                   <a:srgbClr val="222222"/>
                 </a:solidFill>
                 <a:latin typeface="Microsoft YaHei"/>
+                <a:ea typeface="Microsoft YaHei"/>
               </a:rPr>
-              <a:t>• FOV 截断：CBCT 视野小，边缘信息缺失。</a:t>
-            </a:r>
-          </a:p>
-          <a:p>
-            <a:pPr>
-              <a:spcAft>
-                <a:spcPts val="600"/>
-              </a:spcAft>
-            </a:pPr>
-            <a:r>
-              <a:rPr sz="1400" b="0">
-                <a:solidFill>
-                  <a:srgbClr val="222222"/>
-                </a:solidFill>
-                <a:latin typeface="Microsoft YaHei"/>
-              </a:rPr>
-              <a:t>• → 需要：稳健初始化 + 对灰度差异鲁棒的相似性 + 仅在 CBCT 视野内评估。</a:t>
+              <a:t>▪ FOV 截断：CBCT 视野小、边缘缺失</a:t>
             </a:r>
           </a:p>
         </p:txBody>
@@ -4341,54 +5465,20 @@
       <p:grpSpPr/>
       <p:sp>
         <p:nvSpPr>
-          <p:cNvPr id="2" name="TextBox 1"/>
-          <p:cNvSpPr txBox="1"/>
-          <p:nvPr/>
-        </p:nvSpPr>
-        <p:spPr>
-          <a:xfrm>
-            <a:off x="502920" y="274320"/>
-            <a:ext cx="11155680" cy="822960"/>
-          </a:xfrm>
-          <a:prstGeom prst="rect">
-            <a:avLst/>
-          </a:prstGeom>
-          <a:noFill/>
-        </p:spPr>
-        <p:txBody>
-          <a:bodyPr wrap="square">
-            <a:spAutoFit/>
-          </a:bodyPr>
-          <a:lstStyle/>
-          <a:p>
-            <a:r>
-              <a:rPr sz="2800" b="1">
-                <a:solidFill>
-                  <a:srgbClr val="1B3B6F"/>
-                </a:solidFill>
-                <a:latin typeface="Microsoft YaHei"/>
-              </a:rPr>
-              <a:t>方法总览：纯 PyTorch 实例优化（非黑箱工具）</a:t>
-            </a:r>
-          </a:p>
-        </p:txBody>
-      </p:sp>
-      <p:sp>
-        <p:nvSpPr>
-          <p:cNvPr id="3" name="Rectangle 2"/>
+          <p:cNvPr id="2" name="Rectangle 1"/>
           <p:cNvSpPr/>
           <p:nvPr/>
         </p:nvSpPr>
         <p:spPr>
           <a:xfrm>
-            <a:off x="530352" y="1078992"/>
-            <a:ext cx="2194560" cy="54864"/>
+            <a:off x="0" y="0"/>
+            <a:ext cx="12191695" cy="201168"/>
           </a:xfrm>
           <a:prstGeom prst="rect">
             <a:avLst/>
           </a:prstGeom>
           <a:solidFill>
-            <a:srgbClr val="1B3B6F"/>
+            <a:srgbClr val="1F3B6E"/>
           </a:solidFill>
           <a:ln>
             <a:noFill/>
@@ -4418,24 +5508,130 @@
       </p:sp>
       <p:sp>
         <p:nvSpPr>
-          <p:cNvPr id="4" name="Rounded Rectangle 3"/>
+          <p:cNvPr id="3" name="TextBox 2"/>
+          <p:cNvSpPr txBox="1"/>
+          <p:nvPr/>
+        </p:nvSpPr>
+        <p:spPr>
+          <a:xfrm>
+            <a:off x="502920" y="384048"/>
+            <a:ext cx="11155680" cy="822960"/>
+          </a:xfrm>
+          <a:prstGeom prst="rect">
+            <a:avLst/>
+          </a:prstGeom>
+          <a:noFill/>
+        </p:spPr>
+        <p:txBody>
+          <a:bodyPr wrap="square">
+            <a:spAutoFit/>
+          </a:bodyPr>
+          <a:lstStyle/>
+          <a:p>
+            <a:r>
+              <a:rPr sz="2800" b="1">
+                <a:solidFill>
+                  <a:srgbClr val="1F3B6E"/>
+                </a:solidFill>
+                <a:latin typeface="Microsoft YaHei"/>
+                <a:ea typeface="Microsoft YaHei"/>
+              </a:rPr>
+              <a:t>方法总览：纯 PyTorch 实例优化</a:t>
+            </a:r>
+          </a:p>
+        </p:txBody>
+      </p:sp>
+      <p:sp>
+        <p:nvSpPr>
+          <p:cNvPr id="4" name="TextBox 3"/>
+          <p:cNvSpPr txBox="1"/>
+          <p:nvPr/>
+        </p:nvSpPr>
+        <p:spPr>
+          <a:xfrm>
+            <a:off x="502920" y="6419088"/>
+            <a:ext cx="5486400" cy="365760"/>
+          </a:xfrm>
+          <a:prstGeom prst="rect">
+            <a:avLst/>
+          </a:prstGeom>
+          <a:noFill/>
+        </p:spPr>
+        <p:txBody>
+          <a:bodyPr wrap="square">
+            <a:spAutoFit/>
+          </a:bodyPr>
+          <a:lstStyle/>
+          <a:p>
+            <a:r>
+              <a:rPr sz="1000" b="0">
+                <a:solidFill>
+                  <a:srgbClr val="5A5A5A"/>
+                </a:solidFill>
+                <a:latin typeface="Microsoft YaHei"/>
+                <a:ea typeface="Microsoft YaHei"/>
+              </a:rPr>
+              <a:t>CBCT → pCT 配准 · 病例 M24557</a:t>
+            </a:r>
+          </a:p>
+        </p:txBody>
+      </p:sp>
+      <p:sp>
+        <p:nvSpPr>
+          <p:cNvPr id="5" name="TextBox 4"/>
+          <p:cNvSpPr txBox="1"/>
+          <p:nvPr/>
+        </p:nvSpPr>
+        <p:spPr>
+          <a:xfrm>
+            <a:off x="10789920" y="6419088"/>
+            <a:ext cx="914400" cy="365760"/>
+          </a:xfrm>
+          <a:prstGeom prst="rect">
+            <a:avLst/>
+          </a:prstGeom>
+          <a:noFill/>
+        </p:spPr>
+        <p:txBody>
+          <a:bodyPr wrap="square">
+            <a:spAutoFit/>
+          </a:bodyPr>
+          <a:lstStyle/>
+          <a:p>
+            <a:pPr algn="r"/>
+            <a:r>
+              <a:rPr sz="1000" b="0">
+                <a:solidFill>
+                  <a:srgbClr val="5A5A5A"/>
+                </a:solidFill>
+                <a:latin typeface="Microsoft YaHei"/>
+                <a:ea typeface="Microsoft YaHei"/>
+              </a:rPr>
+              <a:t>4</a:t>
+            </a:r>
+          </a:p>
+        </p:txBody>
+      </p:sp>
+      <p:sp>
+        <p:nvSpPr>
+          <p:cNvPr id="6" name="Rounded Rectangle 5"/>
           <p:cNvSpPr/>
           <p:nvPr/>
         </p:nvSpPr>
         <p:spPr>
           <a:xfrm>
-            <a:off x="586587" y="2743200"/>
+            <a:off x="495147" y="2834640"/>
             <a:ext cx="1874519" cy="1371600"/>
           </a:xfrm>
           <a:prstGeom prst="roundRect">
             <a:avLst/>
           </a:prstGeom>
           <a:solidFill>
-            <a:srgbClr val="1B3B6F"/>
+            <a:srgbClr val="1F3B6E"/>
           </a:solidFill>
-          <a:ln>
+          <a:ln w="12700">
             <a:solidFill>
-              <a:srgbClr val="1B3B6F"/>
+              <a:srgbClr val="1F3B6E"/>
             </a:solidFill>
           </a:ln>
         </p:spPr>
@@ -4464,8 +5660,9 @@
                   <a:srgbClr val="FFFFFF"/>
                 </a:solidFill>
                 <a:latin typeface="Microsoft YaHei"/>
+                <a:ea typeface="Microsoft YaHei"/>
               </a:rPr>
-              <a:t>DICOM 读取
+              <a:t>DICOM
 → HU</a:t>
             </a:r>
           </a:p>
@@ -4473,20 +5670,20 @@
       </p:sp>
       <p:sp>
         <p:nvSpPr>
-          <p:cNvPr id="5" name="Right Arrow 4"/>
+          <p:cNvPr id="7" name="Right Arrow 6"/>
           <p:cNvSpPr/>
           <p:nvPr/>
         </p:nvSpPr>
         <p:spPr>
           <a:xfrm>
-            <a:off x="2497683" y="3264408"/>
-            <a:ext cx="338328" cy="329184"/>
+            <a:off x="2424531" y="3374136"/>
+            <a:ext cx="347472" cy="292608"/>
           </a:xfrm>
           <a:prstGeom prst="rightArrow">
             <a:avLst/>
           </a:prstGeom>
           <a:solidFill>
-            <a:srgbClr val="1B3B6F"/>
+            <a:srgbClr val="1F3B6E"/>
           </a:solidFill>
           <a:ln>
             <a:noFill/>
@@ -4516,13 +5713,13 @@
       </p:sp>
       <p:sp>
         <p:nvSpPr>
-          <p:cNvPr id="6" name="Rounded Rectangle 5"/>
+          <p:cNvPr id="8" name="Rounded Rectangle 7"/>
           <p:cNvSpPr/>
           <p:nvPr/>
         </p:nvSpPr>
         <p:spPr>
           <a:xfrm>
-            <a:off x="2872587" y="2743200"/>
+            <a:off x="2826867" y="2834640"/>
             <a:ext cx="1874519" cy="1371600"/>
           </a:xfrm>
           <a:prstGeom prst="roundRect">
@@ -4531,9 +5728,9 @@
           <a:solidFill>
             <a:srgbClr val="5A5A5A"/>
           </a:solidFill>
-          <a:ln>
+          <a:ln w="12700">
             <a:solidFill>
-              <a:srgbClr val="1B3B6F"/>
+              <a:srgbClr val="1F3B6E"/>
             </a:solidFill>
           </a:ln>
         </p:spPr>
@@ -4562,8 +5759,9 @@
                   <a:srgbClr val="FFFFFF"/>
                 </a:solidFill>
                 <a:latin typeface="Microsoft YaHei"/>
+                <a:ea typeface="Microsoft YaHei"/>
               </a:rPr>
-              <a:t>立方体公共网格
+              <a:t>立方体网格
 + 初始对齐</a:t>
             </a:r>
           </a:p>
@@ -4571,20 +5769,20 @@
       </p:sp>
       <p:sp>
         <p:nvSpPr>
-          <p:cNvPr id="7" name="Right Arrow 6"/>
+          <p:cNvPr id="9" name="Right Arrow 8"/>
           <p:cNvSpPr/>
           <p:nvPr/>
         </p:nvSpPr>
         <p:spPr>
           <a:xfrm>
-            <a:off x="4783683" y="3264408"/>
-            <a:ext cx="338328" cy="329184"/>
+            <a:off x="4756251" y="3374136"/>
+            <a:ext cx="347472" cy="292608"/>
           </a:xfrm>
           <a:prstGeom prst="rightArrow">
             <a:avLst/>
           </a:prstGeom>
           <a:solidFill>
-            <a:srgbClr val="1B3B6F"/>
+            <a:srgbClr val="1F3B6E"/>
           </a:solidFill>
           <a:ln>
             <a:noFill/>
@@ -4614,24 +5812,24 @@
       </p:sp>
       <p:sp>
         <p:nvSpPr>
-          <p:cNvPr id="8" name="Rounded Rectangle 7"/>
+          <p:cNvPr id="10" name="Rounded Rectangle 9"/>
           <p:cNvSpPr/>
           <p:nvPr/>
         </p:nvSpPr>
         <p:spPr>
           <a:xfrm>
-            <a:off x="5158587" y="2743200"/>
+            <a:off x="5158587" y="2834640"/>
             <a:ext cx="1874519" cy="1371600"/>
           </a:xfrm>
           <a:prstGeom prst="roundRect">
             <a:avLst/>
           </a:prstGeom>
           <a:solidFill>
-            <a:srgbClr val="1B3B6F"/>
+            <a:srgbClr val="1F3B6E"/>
           </a:solidFill>
-          <a:ln>
+          <a:ln w="12700">
             <a:solidFill>
-              <a:srgbClr val="1B3B6F"/>
+              <a:srgbClr val="1F3B6E"/>
             </a:solidFill>
           </a:ln>
         </p:spPr>
@@ -4660,6 +5858,7 @@
                   <a:srgbClr val="FFFFFF"/>
                 </a:solidFill>
                 <a:latin typeface="Microsoft YaHei"/>
+                <a:ea typeface="Microsoft YaHei"/>
               </a:rPr>
               <a:t>多分辨率刚体
 (LNCC)</a:t>
@@ -4669,20 +5868,20 @@
       </p:sp>
       <p:sp>
         <p:nvSpPr>
-          <p:cNvPr id="9" name="Right Arrow 8"/>
+          <p:cNvPr id="11" name="Right Arrow 10"/>
           <p:cNvSpPr/>
           <p:nvPr/>
         </p:nvSpPr>
         <p:spPr>
           <a:xfrm>
-            <a:off x="7069683" y="3264408"/>
-            <a:ext cx="338328" cy="329184"/>
+            <a:off x="7087971" y="3374136"/>
+            <a:ext cx="347472" cy="292608"/>
           </a:xfrm>
           <a:prstGeom prst="rightArrow">
             <a:avLst/>
           </a:prstGeom>
           <a:solidFill>
-            <a:srgbClr val="1B3B6F"/>
+            <a:srgbClr val="1F3B6E"/>
           </a:solidFill>
           <a:ln>
             <a:noFill/>
@@ -4712,13 +5911,13 @@
       </p:sp>
       <p:sp>
         <p:nvSpPr>
-          <p:cNvPr id="10" name="Rounded Rectangle 9"/>
+          <p:cNvPr id="12" name="Rounded Rectangle 11"/>
           <p:cNvSpPr/>
           <p:nvPr/>
         </p:nvSpPr>
         <p:spPr>
           <a:xfrm>
-            <a:off x="7444587" y="2743200"/>
+            <a:off x="7490307" y="2834640"/>
             <a:ext cx="1874519" cy="1371600"/>
           </a:xfrm>
           <a:prstGeom prst="roundRect">
@@ -4727,9 +5926,9 @@
           <a:solidFill>
             <a:srgbClr val="5A5A5A"/>
           </a:solidFill>
-          <a:ln>
+          <a:ln w="12700">
             <a:solidFill>
-              <a:srgbClr val="1B3B6F"/>
+              <a:srgbClr val="1F3B6E"/>
             </a:solidFill>
           </a:ln>
         </p:spPr>
@@ -4758,29 +5957,30 @@
                   <a:srgbClr val="FFFFFF"/>
                 </a:solidFill>
                 <a:latin typeface="Microsoft YaHei"/>
+                <a:ea typeface="Microsoft YaHei"/>
               </a:rPr>
-              <a:t>微分同胚形变
-(速度场积分)</a:t>
-            </a:r>
-          </a:p>
-        </p:txBody>
-      </p:sp>
-      <p:sp>
-        <p:nvSpPr>
-          <p:cNvPr id="11" name="Right Arrow 10"/>
+              <a:t>可选形变
+(微分同胚)</a:t>
+            </a:r>
+          </a:p>
+        </p:txBody>
+      </p:sp>
+      <p:sp>
+        <p:nvSpPr>
+          <p:cNvPr id="13" name="Right Arrow 12"/>
           <p:cNvSpPr/>
           <p:nvPr/>
         </p:nvSpPr>
         <p:spPr>
           <a:xfrm>
-            <a:off x="9355683" y="3264408"/>
-            <a:ext cx="338328" cy="329184"/>
+            <a:off x="9419691" y="3374136"/>
+            <a:ext cx="347472" cy="292608"/>
           </a:xfrm>
           <a:prstGeom prst="rightArrow">
             <a:avLst/>
           </a:prstGeom>
           <a:solidFill>
-            <a:srgbClr val="1B3B6F"/>
+            <a:srgbClr val="1F3B6E"/>
           </a:solidFill>
           <a:ln>
             <a:noFill/>
@@ -4810,24 +6010,24 @@
       </p:sp>
       <p:sp>
         <p:nvSpPr>
-          <p:cNvPr id="12" name="Rounded Rectangle 11"/>
+          <p:cNvPr id="14" name="Rounded Rectangle 13"/>
           <p:cNvSpPr/>
           <p:nvPr/>
         </p:nvSpPr>
         <p:spPr>
           <a:xfrm>
-            <a:off x="9730587" y="2743200"/>
+            <a:off x="9822027" y="2834640"/>
             <a:ext cx="1874519" cy="1371600"/>
           </a:xfrm>
           <a:prstGeom prst="roundRect">
             <a:avLst/>
           </a:prstGeom>
           <a:solidFill>
-            <a:srgbClr val="1B3B6F"/>
+            <a:srgbClr val="1F3B6E"/>
           </a:solidFill>
-          <a:ln>
+          <a:ln w="12700">
             <a:solidFill>
-              <a:srgbClr val="1B3B6F"/>
+              <a:srgbClr val="1F3B6E"/>
             </a:solidFill>
           </a:ln>
         </p:spPr>
@@ -4856,23 +6056,24 @@
                   <a:srgbClr val="FFFFFF"/>
                 </a:solidFill>
                 <a:latin typeface="Microsoft YaHei"/>
+                <a:ea typeface="Microsoft YaHei"/>
               </a:rPr>
               <a:t>输出
-变换/指标/图</a:t>
-            </a:r>
-          </a:p>
-        </p:txBody>
-      </p:sp>
-      <p:sp>
-        <p:nvSpPr>
-          <p:cNvPr id="13" name="TextBox 12"/>
+变换/指标</a:t>
+            </a:r>
+          </a:p>
+        </p:txBody>
+      </p:sp>
+      <p:sp>
+        <p:nvSpPr>
+          <p:cNvPr id="15" name="TextBox 14"/>
           <p:cNvSpPr txBox="1"/>
           <p:nvPr/>
         </p:nvSpPr>
         <p:spPr>
           <a:xfrm>
-            <a:off x="731520" y="4754880"/>
-            <a:ext cx="10789920" cy="1463040"/>
+            <a:off x="1097280" y="4846320"/>
+            <a:ext cx="10058400" cy="1280160"/>
           </a:xfrm>
           <a:prstGeom prst="rect">
             <a:avLst/>
@@ -4887,33 +6088,35 @@
           <a:p>
             <a:pPr>
               <a:spcAft>
-                <a:spcPts val="600"/>
+                <a:spcPts val="1000"/>
               </a:spcAft>
             </a:pPr>
             <a:r>
-              <a:rPr sz="1600" b="0">
+              <a:rPr sz="1800" b="0">
                 <a:solidFill>
                   <a:srgbClr val="222222"/>
                 </a:solidFill>
                 <a:latin typeface="Microsoft YaHei"/>
+                <a:ea typeface="Microsoft YaHei"/>
               </a:rPr>
-              <a:t>• 单对图像的实例优化：直接对这一对体数据用梯度下降优化空间变换，无需训练数据 / 预训练模型。</a:t>
+              <a:t>▪ 单对图像实例优化：无需训练数据 / 预训练模型</a:t>
             </a:r>
           </a:p>
           <a:p>
             <a:pPr>
               <a:spcAft>
-                <a:spcPts val="600"/>
+                <a:spcPts val="1000"/>
               </a:spcAft>
             </a:pPr>
             <a:r>
-              <a:rPr sz="1600" b="0">
+              <a:rPr sz="1800" b="0">
                 <a:solidFill>
                   <a:srgbClr val="222222"/>
                 </a:solidFill>
                 <a:latin typeface="Microsoft YaHei"/>
+                <a:ea typeface="Microsoft YaHei"/>
               </a:rPr>
-              <a:t>• 全部基于 PyTorch 的 affine_grid / grid_sample 自行实现。</a:t>
+              <a:t>▪ 全部基于 PyTorch 的 affine_grid / grid_sample 自行实现</a:t>
             </a:r>
           </a:p>
         </p:txBody>
@@ -4938,54 +6141,20 @@
       <p:grpSpPr/>
       <p:sp>
         <p:nvSpPr>
-          <p:cNvPr id="2" name="TextBox 1"/>
-          <p:cNvSpPr txBox="1"/>
-          <p:nvPr/>
-        </p:nvSpPr>
-        <p:spPr>
-          <a:xfrm>
-            <a:off x="502920" y="274320"/>
-            <a:ext cx="11155680" cy="822960"/>
-          </a:xfrm>
-          <a:prstGeom prst="rect">
-            <a:avLst/>
-          </a:prstGeom>
-          <a:noFill/>
-        </p:spPr>
-        <p:txBody>
-          <a:bodyPr wrap="square">
-            <a:spAutoFit/>
-          </a:bodyPr>
-          <a:lstStyle/>
-          <a:p>
-            <a:r>
-              <a:rPr sz="2800" b="1">
-                <a:solidFill>
-                  <a:srgbClr val="1B3B6F"/>
-                </a:solidFill>
-                <a:latin typeface="Microsoft YaHei"/>
-              </a:rPr>
-              <a:t>关键设计①：稳健初始对齐</a:t>
-            </a:r>
-          </a:p>
-        </p:txBody>
-      </p:sp>
-      <p:sp>
-        <p:nvSpPr>
-          <p:cNvPr id="3" name="Rectangle 2"/>
+          <p:cNvPr id="2" name="Rectangle 1"/>
           <p:cNvSpPr/>
           <p:nvPr/>
         </p:nvSpPr>
         <p:spPr>
           <a:xfrm>
-            <a:off x="530352" y="1078992"/>
-            <a:ext cx="2194560" cy="54864"/>
+            <a:off x="0" y="0"/>
+            <a:ext cx="12191695" cy="201168"/>
           </a:xfrm>
           <a:prstGeom prst="rect">
             <a:avLst/>
           </a:prstGeom>
           <a:solidFill>
-            <a:srgbClr val="1B3B6F"/>
+            <a:srgbClr val="1F3B6E"/>
           </a:solidFill>
           <a:ln>
             <a:noFill/>
@@ -5013,9 +6182,115 @@
           </a:p>
         </p:txBody>
       </p:sp>
+      <p:sp>
+        <p:nvSpPr>
+          <p:cNvPr id="3" name="TextBox 2"/>
+          <p:cNvSpPr txBox="1"/>
+          <p:nvPr/>
+        </p:nvSpPr>
+        <p:spPr>
+          <a:xfrm>
+            <a:off x="502920" y="384048"/>
+            <a:ext cx="11155680" cy="822960"/>
+          </a:xfrm>
+          <a:prstGeom prst="rect">
+            <a:avLst/>
+          </a:prstGeom>
+          <a:noFill/>
+        </p:spPr>
+        <p:txBody>
+          <a:bodyPr wrap="square">
+            <a:spAutoFit/>
+          </a:bodyPr>
+          <a:lstStyle/>
+          <a:p>
+            <a:r>
+              <a:rPr sz="2800" b="1">
+                <a:solidFill>
+                  <a:srgbClr val="1F3B6E"/>
+                </a:solidFill>
+                <a:latin typeface="Microsoft YaHei"/>
+                <a:ea typeface="Microsoft YaHei"/>
+              </a:rPr>
+              <a:t>关键设计①：稳健初始对齐</a:t>
+            </a:r>
+          </a:p>
+        </p:txBody>
+      </p:sp>
+      <p:sp>
+        <p:nvSpPr>
+          <p:cNvPr id="4" name="TextBox 3"/>
+          <p:cNvSpPr txBox="1"/>
+          <p:nvPr/>
+        </p:nvSpPr>
+        <p:spPr>
+          <a:xfrm>
+            <a:off x="502920" y="6419088"/>
+            <a:ext cx="5486400" cy="365760"/>
+          </a:xfrm>
+          <a:prstGeom prst="rect">
+            <a:avLst/>
+          </a:prstGeom>
+          <a:noFill/>
+        </p:spPr>
+        <p:txBody>
+          <a:bodyPr wrap="square">
+            <a:spAutoFit/>
+          </a:bodyPr>
+          <a:lstStyle/>
+          <a:p>
+            <a:r>
+              <a:rPr sz="1000" b="0">
+                <a:solidFill>
+                  <a:srgbClr val="5A5A5A"/>
+                </a:solidFill>
+                <a:latin typeface="Microsoft YaHei"/>
+                <a:ea typeface="Microsoft YaHei"/>
+              </a:rPr>
+              <a:t>CBCT → pCT 配准 · 病例 M24557</a:t>
+            </a:r>
+          </a:p>
+        </p:txBody>
+      </p:sp>
+      <p:sp>
+        <p:nvSpPr>
+          <p:cNvPr id="5" name="TextBox 4"/>
+          <p:cNvSpPr txBox="1"/>
+          <p:nvPr/>
+        </p:nvSpPr>
+        <p:spPr>
+          <a:xfrm>
+            <a:off x="10789920" y="6419088"/>
+            <a:ext cx="914400" cy="365760"/>
+          </a:xfrm>
+          <a:prstGeom prst="rect">
+            <a:avLst/>
+          </a:prstGeom>
+          <a:noFill/>
+        </p:spPr>
+        <p:txBody>
+          <a:bodyPr wrap="square">
+            <a:spAutoFit/>
+          </a:bodyPr>
+          <a:lstStyle/>
+          <a:p>
+            <a:pPr algn="r"/>
+            <a:r>
+              <a:rPr sz="1000" b="0">
+                <a:solidFill>
+                  <a:srgbClr val="5A5A5A"/>
+                </a:solidFill>
+                <a:latin typeface="Microsoft YaHei"/>
+                <a:ea typeface="Microsoft YaHei"/>
+              </a:rPr>
+              <a:t>5</a:t>
+            </a:r>
+          </a:p>
+        </p:txBody>
+      </p:sp>
       <p:pic>
         <p:nvPicPr>
-          <p:cNvPr id="4" name="Picture 3" descr="zinit_xcorr.png"/>
+          <p:cNvPr id="6" name="Picture 5" descr="zinit_xcorr.png"/>
           <p:cNvPicPr>
             <a:picLocks noChangeAspect="1"/>
           </p:cNvPicPr>
@@ -5029,7 +6304,7 @@
         </p:blipFill>
         <p:spPr>
           <a:xfrm>
-            <a:off x="457200" y="2238921"/>
+            <a:off x="457200" y="2147481"/>
             <a:ext cx="6583680" cy="3020236"/>
           </a:xfrm>
           <a:prstGeom prst="rect">
@@ -5039,14 +6314,14 @@
       </p:pic>
       <p:sp>
         <p:nvSpPr>
-          <p:cNvPr id="5" name="TextBox 4"/>
+          <p:cNvPr id="7" name="TextBox 6"/>
           <p:cNvSpPr txBox="1"/>
           <p:nvPr/>
         </p:nvSpPr>
         <p:spPr>
           <a:xfrm>
-            <a:off x="7223760" y="1554480"/>
-            <a:ext cx="4572000" cy="4572000"/>
+            <a:off x="7223760" y="1737360"/>
+            <a:ext cx="4572000" cy="4206240"/>
           </a:xfrm>
           <a:prstGeom prst="rect">
             <a:avLst/>
@@ -5061,81 +6336,69 @@
           <a:p>
             <a:pPr>
               <a:spcAft>
-                <a:spcPts val="600"/>
+                <a:spcPts val="1000"/>
               </a:spcAft>
             </a:pPr>
             <a:r>
-              <a:rPr sz="1600" b="0">
+              <a:rPr sz="1800" b="0">
                 <a:solidFill>
                   <a:srgbClr val="222222"/>
                 </a:solidFill>
                 <a:latin typeface="Microsoft YaHei"/>
+                <a:ea typeface="Microsoft YaHei"/>
               </a:rPr>
-              <a:t>• 立方体 + 各向同性公共网格</a:t>
-            </a:r>
-          </a:p>
-          <a:p>
-            <a:pPr lvl="1">
+              <a:t>▪ 立方体 + 各向同性网格 → 归一化旋转 = 物理刚体</a:t>
+            </a:r>
+          </a:p>
+          <a:p>
+            <a:pPr>
               <a:spcAft>
-                <a:spcPts val="600"/>
+                <a:spcPts val="1000"/>
               </a:spcAft>
             </a:pPr>
             <a:r>
-              <a:rPr sz="1400" b="0">
-                <a:solidFill>
-                  <a:srgbClr val="5A5A5A"/>
-                </a:solidFill>
-                <a:latin typeface="Microsoft YaHei"/>
-              </a:rPr>
-              <a:t>– 使 affine_grid 的归一化旋转 = 物理刚体旋转，不引入剪切。</a:t>
-            </a:r>
-          </a:p>
-          <a:p>
-            <a:pPr>
-              <a:spcAft>
-                <a:spcPts val="600"/>
-              </a:spcAft>
-            </a:pPr>
-            <a:r>
-              <a:rPr sz="1600" b="0">
+              <a:rPr sz="1800" b="0">
                 <a:solidFill>
                   <a:srgbClr val="222222"/>
                 </a:solidFill>
                 <a:latin typeface="Microsoft YaHei"/>
+                <a:ea typeface="Microsoft YaHei"/>
               </a:rPr>
-              <a:t>• x / y：身体质心对齐</a:t>
+              <a:t>▪ x / y：身体质心对齐</a:t>
             </a:r>
           </a:p>
           <a:p>
             <a:pPr>
               <a:spcAft>
-                <a:spcPts val="600"/>
+                <a:spcPts val="1000"/>
               </a:spcAft>
             </a:pPr>
             <a:r>
-              <a:rPr sz="1600" b="0">
+              <a:rPr sz="1800" b="0">
                 <a:solidFill>
                   <a:srgbClr val="222222"/>
                 </a:solidFill>
                 <a:latin typeface="Microsoft YaHei"/>
+                <a:ea typeface="Microsoft YaHei"/>
               </a:rPr>
-              <a:t>• z：横截面积剖面的 1D 互相关</a:t>
-            </a:r>
-          </a:p>
-          <a:p>
-            <a:pPr lvl="1">
+              <a:t>▪ z：横截面积剖面的 1D 互相关</a:t>
+            </a:r>
+          </a:p>
+          <a:p>
+            <a:pPr>
               <a:spcAft>
-                <a:spcPts val="600"/>
+                <a:spcPts val="1000"/>
               </a:spcAft>
             </a:pPr>
             <a:r>
-              <a:rPr sz="1400" b="0">
+              <a:rPr sz="1800" b="0">
                 <a:solidFill>
-                  <a:srgbClr val="5A5A5A"/>
+                  <a:srgbClr val="222222"/>
                 </a:solidFill>
                 <a:latin typeface="Microsoft YaHei"/>
+                <a:ea typeface="Microsoft YaHei"/>
               </a:rPr>
-              <a:t>– pCT 的 z 覆盖远大于 CBCT，z 质心落在不同解剖范围、不可比；用面积剖面互相关定位更稳健。</a:t>
+              <a:t>▪ 因 pCT 的 z 覆盖远大于 CBCT，z 质心不可比</a:t>
             </a:r>
           </a:p>
         </p:txBody>
@@ -5160,54 +6423,20 @@
       <p:grpSpPr/>
       <p:sp>
         <p:nvSpPr>
-          <p:cNvPr id="2" name="TextBox 1"/>
-          <p:cNvSpPr txBox="1"/>
-          <p:nvPr/>
-        </p:nvSpPr>
-        <p:spPr>
-          <a:xfrm>
-            <a:off x="502920" y="274320"/>
-            <a:ext cx="11155680" cy="822960"/>
-          </a:xfrm>
-          <a:prstGeom prst="rect">
-            <a:avLst/>
-          </a:prstGeom>
-          <a:noFill/>
-        </p:spPr>
-        <p:txBody>
-          <a:bodyPr wrap="square">
-            <a:spAutoFit/>
-          </a:bodyPr>
-          <a:lstStyle/>
-          <a:p>
-            <a:r>
-              <a:rPr sz="2800" b="1">
-                <a:solidFill>
-                  <a:srgbClr val="1B3B6F"/>
-                </a:solidFill>
-                <a:latin typeface="Microsoft YaHei"/>
-              </a:rPr>
-              <a:t>关键设计②：相似性度量与形变模型</a:t>
-            </a:r>
-          </a:p>
-        </p:txBody>
-      </p:sp>
-      <p:sp>
-        <p:nvSpPr>
-          <p:cNvPr id="3" name="Rectangle 2"/>
+          <p:cNvPr id="2" name="Rectangle 1"/>
           <p:cNvSpPr/>
           <p:nvPr/>
         </p:nvSpPr>
         <p:spPr>
           <a:xfrm>
-            <a:off x="530352" y="1078992"/>
-            <a:ext cx="2194560" cy="54864"/>
+            <a:off x="0" y="0"/>
+            <a:ext cx="12191695" cy="201168"/>
           </a:xfrm>
           <a:prstGeom prst="rect">
             <a:avLst/>
           </a:prstGeom>
           <a:solidFill>
-            <a:srgbClr val="1B3B6F"/>
+            <a:srgbClr val="1F3B6E"/>
           </a:solidFill>
           <a:ln>
             <a:noFill/>
@@ -5235,9 +6464,115 @@
           </a:p>
         </p:txBody>
       </p:sp>
+      <p:sp>
+        <p:nvSpPr>
+          <p:cNvPr id="3" name="TextBox 2"/>
+          <p:cNvSpPr txBox="1"/>
+          <p:nvPr/>
+        </p:nvSpPr>
+        <p:spPr>
+          <a:xfrm>
+            <a:off x="502920" y="384048"/>
+            <a:ext cx="11155680" cy="822960"/>
+          </a:xfrm>
+          <a:prstGeom prst="rect">
+            <a:avLst/>
+          </a:prstGeom>
+          <a:noFill/>
+        </p:spPr>
+        <p:txBody>
+          <a:bodyPr wrap="square">
+            <a:spAutoFit/>
+          </a:bodyPr>
+          <a:lstStyle/>
+          <a:p>
+            <a:r>
+              <a:rPr sz="2800" b="1">
+                <a:solidFill>
+                  <a:srgbClr val="1F3B6E"/>
+                </a:solidFill>
+                <a:latin typeface="Microsoft YaHei"/>
+                <a:ea typeface="Microsoft YaHei"/>
+              </a:rPr>
+              <a:t>关键设计②：相似性与形变</a:t>
+            </a:r>
+          </a:p>
+        </p:txBody>
+      </p:sp>
+      <p:sp>
+        <p:nvSpPr>
+          <p:cNvPr id="4" name="TextBox 3"/>
+          <p:cNvSpPr txBox="1"/>
+          <p:nvPr/>
+        </p:nvSpPr>
+        <p:spPr>
+          <a:xfrm>
+            <a:off x="502920" y="6419088"/>
+            <a:ext cx="5486400" cy="365760"/>
+          </a:xfrm>
+          <a:prstGeom prst="rect">
+            <a:avLst/>
+          </a:prstGeom>
+          <a:noFill/>
+        </p:spPr>
+        <p:txBody>
+          <a:bodyPr wrap="square">
+            <a:spAutoFit/>
+          </a:bodyPr>
+          <a:lstStyle/>
+          <a:p>
+            <a:r>
+              <a:rPr sz="1000" b="0">
+                <a:solidFill>
+                  <a:srgbClr val="5A5A5A"/>
+                </a:solidFill>
+                <a:latin typeface="Microsoft YaHei"/>
+                <a:ea typeface="Microsoft YaHei"/>
+              </a:rPr>
+              <a:t>CBCT → pCT 配准 · 病例 M24557</a:t>
+            </a:r>
+          </a:p>
+        </p:txBody>
+      </p:sp>
+      <p:sp>
+        <p:nvSpPr>
+          <p:cNvPr id="5" name="TextBox 4"/>
+          <p:cNvSpPr txBox="1"/>
+          <p:nvPr/>
+        </p:nvSpPr>
+        <p:spPr>
+          <a:xfrm>
+            <a:off x="10789920" y="6419088"/>
+            <a:ext cx="914400" cy="365760"/>
+          </a:xfrm>
+          <a:prstGeom prst="rect">
+            <a:avLst/>
+          </a:prstGeom>
+          <a:noFill/>
+        </p:spPr>
+        <p:txBody>
+          <a:bodyPr wrap="square">
+            <a:spAutoFit/>
+          </a:bodyPr>
+          <a:lstStyle/>
+          <a:p>
+            <a:pPr algn="r"/>
+            <a:r>
+              <a:rPr sz="1000" b="0">
+                <a:solidFill>
+                  <a:srgbClr val="5A5A5A"/>
+                </a:solidFill>
+                <a:latin typeface="Microsoft YaHei"/>
+                <a:ea typeface="Microsoft YaHei"/>
+              </a:rPr>
+              <a:t>6</a:t>
+            </a:r>
+          </a:p>
+        </p:txBody>
+      </p:sp>
       <p:pic>
         <p:nvPicPr>
-          <p:cNvPr id="4" name="Picture 3" descr="intensity_cupping.png"/>
+          <p:cNvPr id="6" name="Picture 5" descr="intensity_cupping.png"/>
           <p:cNvPicPr>
             <a:picLocks noChangeAspect="1"/>
           </p:cNvPicPr>
@@ -5261,14 +6596,14 @@
       </p:pic>
       <p:sp>
         <p:nvSpPr>
-          <p:cNvPr id="5" name="TextBox 4"/>
+          <p:cNvPr id="7" name="TextBox 6"/>
           <p:cNvSpPr txBox="1"/>
           <p:nvPr/>
         </p:nvSpPr>
         <p:spPr>
           <a:xfrm>
-            <a:off x="7223760" y="1554480"/>
-            <a:ext cx="4572000" cy="4754880"/>
+            <a:off x="7223760" y="1737360"/>
+            <a:ext cx="4572000" cy="4206240"/>
           </a:xfrm>
           <a:prstGeom prst="rect">
             <a:avLst/>
@@ -5283,113 +6618,69 @@
           <a:p>
             <a:pPr>
               <a:spcAft>
-                <a:spcPts val="600"/>
+                <a:spcPts val="1000"/>
               </a:spcAft>
             </a:pPr>
             <a:r>
-              <a:rPr sz="1500" b="0">
+              <a:rPr sz="1800" b="0">
                 <a:solidFill>
                   <a:srgbClr val="222222"/>
                 </a:solidFill>
                 <a:latin typeface="Microsoft YaHei"/>
+                <a:ea typeface="Microsoft YaHei"/>
               </a:rPr>
-              <a:t>• 相似性：局部归一化互相关 LNCC</a:t>
-            </a:r>
-          </a:p>
-          <a:p>
-            <a:pPr lvl="1">
+              <a:t>▪ 相似性：局部归一化互相关 LNCC（抗灰度差异）</a:t>
+            </a:r>
+          </a:p>
+          <a:p>
+            <a:pPr>
               <a:spcAft>
-                <a:spcPts val="600"/>
+                <a:spcPts val="1000"/>
               </a:spcAft>
             </a:pPr>
             <a:r>
-              <a:rPr sz="1300" b="0">
-                <a:solidFill>
-                  <a:srgbClr val="5A5A5A"/>
-                </a:solidFill>
-                <a:latin typeface="Microsoft YaHei"/>
-              </a:rPr>
-              <a:t>– 对 CBCT/pCT 的线性灰度差异、cupping 鲁棒。</a:t>
-            </a:r>
-          </a:p>
-          <a:p>
-            <a:pPr>
-              <a:spcAft>
-                <a:spcPts val="600"/>
-              </a:spcAft>
-            </a:pPr>
-            <a:r>
-              <a:rPr sz="1500" b="0">
+              <a:rPr sz="1800" b="0">
                 <a:solidFill>
                   <a:srgbClr val="222222"/>
                 </a:solidFill>
                 <a:latin typeface="Microsoft YaHei"/>
+                <a:ea typeface="Microsoft YaHei"/>
               </a:rPr>
-              <a:t>• 多分辨率金字塔 (4×→2×→1×)</a:t>
-            </a:r>
-          </a:p>
-          <a:p>
-            <a:pPr lvl="1">
+              <a:t>▪ 多分辨率金字塔 4×→2×→1× 扩大捕获范围</a:t>
+            </a:r>
+          </a:p>
+          <a:p>
+            <a:pPr>
               <a:spcAft>
-                <a:spcPts val="600"/>
+                <a:spcPts val="1000"/>
               </a:spcAft>
             </a:pPr>
             <a:r>
-              <a:rPr sz="1300" b="0">
-                <a:solidFill>
-                  <a:srgbClr val="5A5A5A"/>
-                </a:solidFill>
-                <a:latin typeface="Microsoft YaHei"/>
-              </a:rPr>
-              <a:t>– 扩大捕获范围，避免陷入局部极小。</a:t>
-            </a:r>
-          </a:p>
-          <a:p>
-            <a:pPr>
-              <a:spcAft>
-                <a:spcPts val="600"/>
-              </a:spcAft>
-            </a:pPr>
-            <a:r>
-              <a:rPr sz="1500" b="0">
+              <a:rPr sz="1800" b="0">
                 <a:solidFill>
                   <a:srgbClr val="222222"/>
                 </a:solidFill>
                 <a:latin typeface="Microsoft YaHei"/>
+                <a:ea typeface="Microsoft YaHei"/>
               </a:rPr>
-              <a:t>• 形变：速度场 scaling-and-squaring 积分</a:t>
-            </a:r>
-          </a:p>
-          <a:p>
-            <a:pPr lvl="1">
+              <a:t>▪ 形变：速度场积分得微分同胚位移场</a:t>
+            </a:r>
+          </a:p>
+          <a:p>
+            <a:pPr>
               <a:spcAft>
-                <a:spcPts val="600"/>
+                <a:spcPts val="1000"/>
               </a:spcAft>
             </a:pPr>
             <a:r>
-              <a:rPr sz="1300" b="0">
-                <a:solidFill>
-                  <a:srgbClr val="5A5A5A"/>
-                </a:solidFill>
-                <a:latin typeface="Microsoft YaHei"/>
-              </a:rPr>
-              <a:t>– 得到微分同胚位移场 → 可逆、无折叠。</a:t>
-            </a:r>
-          </a:p>
-          <a:p>
-            <a:pPr>
-              <a:spcAft>
-                <a:spcPts val="600"/>
-              </a:spcAft>
-            </a:pPr>
-            <a:r>
-              <a:rPr sz="1500" b="0">
+              <a:rPr sz="1800" b="0">
                 <a:solidFill>
                   <a:srgbClr val="222222"/>
                 </a:solidFill>
                 <a:latin typeface="Microsoft YaHei"/>
+                <a:ea typeface="Microsoft YaHei"/>
               </a:rPr>
-              <a:t>• 仅在 CBCT 视野(FOV)掩膜内计算损失。</a:t>
+              <a:t>▪ 强正则 + 粗网格 + 平滑 → 仅小幅细化</a:t>
             </a:r>
           </a:p>
         </p:txBody>
@@ -5414,54 +6705,20 @@
       <p:grpSpPr/>
       <p:sp>
         <p:nvSpPr>
-          <p:cNvPr id="2" name="TextBox 1"/>
-          <p:cNvSpPr txBox="1"/>
-          <p:nvPr/>
-        </p:nvSpPr>
-        <p:spPr>
-          <a:xfrm>
-            <a:off x="502920" y="274320"/>
-            <a:ext cx="11155680" cy="822960"/>
-          </a:xfrm>
-          <a:prstGeom prst="rect">
-            <a:avLst/>
-          </a:prstGeom>
-          <a:noFill/>
-        </p:spPr>
-        <p:txBody>
-          <a:bodyPr wrap="square">
-            <a:spAutoFit/>
-          </a:bodyPr>
-          <a:lstStyle/>
-          <a:p>
-            <a:r>
-              <a:rPr sz="2800" b="1">
-                <a:solidFill>
-                  <a:srgbClr val="1B3B6F"/>
-                </a:solidFill>
-                <a:latin typeface="Microsoft YaHei"/>
-              </a:rPr>
-              <a:t>结果 · 定性：棋盘格与差异图（前 vs 后）</a:t>
-            </a:r>
-          </a:p>
-        </p:txBody>
-      </p:sp>
-      <p:sp>
-        <p:nvSpPr>
-          <p:cNvPr id="3" name="Rectangle 2"/>
+          <p:cNvPr id="2" name="Rectangle 1"/>
           <p:cNvSpPr/>
           <p:nvPr/>
         </p:nvSpPr>
         <p:spPr>
           <a:xfrm>
-            <a:off x="530352" y="1078992"/>
-            <a:ext cx="2194560" cy="54864"/>
+            <a:off x="0" y="0"/>
+            <a:ext cx="12191695" cy="201168"/>
           </a:xfrm>
           <a:prstGeom prst="rect">
             <a:avLst/>
           </a:prstGeom>
           <a:solidFill>
-            <a:srgbClr val="1B3B6F"/>
+            <a:srgbClr val="1F3B6E"/>
           </a:solidFill>
           <a:ln>
             <a:noFill/>
@@ -5489,9 +6746,115 @@
           </a:p>
         </p:txBody>
       </p:sp>
+      <p:sp>
+        <p:nvSpPr>
+          <p:cNvPr id="3" name="TextBox 2"/>
+          <p:cNvSpPr txBox="1"/>
+          <p:nvPr/>
+        </p:nvSpPr>
+        <p:spPr>
+          <a:xfrm>
+            <a:off x="502920" y="384048"/>
+            <a:ext cx="11155680" cy="822960"/>
+          </a:xfrm>
+          <a:prstGeom prst="rect">
+            <a:avLst/>
+          </a:prstGeom>
+          <a:noFill/>
+        </p:spPr>
+        <p:txBody>
+          <a:bodyPr wrap="square">
+            <a:spAutoFit/>
+          </a:bodyPr>
+          <a:lstStyle/>
+          <a:p>
+            <a:r>
+              <a:rPr sz="2800" b="1">
+                <a:solidFill>
+                  <a:srgbClr val="1F3B6E"/>
+                </a:solidFill>
+                <a:latin typeface="Microsoft YaHei"/>
+                <a:ea typeface="Microsoft YaHei"/>
+              </a:rPr>
+              <a:t>结果 · 定性：棋盘格与差异图</a:t>
+            </a:r>
+          </a:p>
+        </p:txBody>
+      </p:sp>
+      <p:sp>
+        <p:nvSpPr>
+          <p:cNvPr id="4" name="TextBox 3"/>
+          <p:cNvSpPr txBox="1"/>
+          <p:nvPr/>
+        </p:nvSpPr>
+        <p:spPr>
+          <a:xfrm>
+            <a:off x="502920" y="6419088"/>
+            <a:ext cx="5486400" cy="365760"/>
+          </a:xfrm>
+          <a:prstGeom prst="rect">
+            <a:avLst/>
+          </a:prstGeom>
+          <a:noFill/>
+        </p:spPr>
+        <p:txBody>
+          <a:bodyPr wrap="square">
+            <a:spAutoFit/>
+          </a:bodyPr>
+          <a:lstStyle/>
+          <a:p>
+            <a:r>
+              <a:rPr sz="1000" b="0">
+                <a:solidFill>
+                  <a:srgbClr val="5A5A5A"/>
+                </a:solidFill>
+                <a:latin typeface="Microsoft YaHei"/>
+                <a:ea typeface="Microsoft YaHei"/>
+              </a:rPr>
+              <a:t>CBCT → pCT 配准 · 病例 M24557</a:t>
+            </a:r>
+          </a:p>
+        </p:txBody>
+      </p:sp>
+      <p:sp>
+        <p:nvSpPr>
+          <p:cNvPr id="5" name="TextBox 4"/>
+          <p:cNvSpPr txBox="1"/>
+          <p:nvPr/>
+        </p:nvSpPr>
+        <p:spPr>
+          <a:xfrm>
+            <a:off x="10789920" y="6419088"/>
+            <a:ext cx="914400" cy="365760"/>
+          </a:xfrm>
+          <a:prstGeom prst="rect">
+            <a:avLst/>
+          </a:prstGeom>
+          <a:noFill/>
+        </p:spPr>
+        <p:txBody>
+          <a:bodyPr wrap="square">
+            <a:spAutoFit/>
+          </a:bodyPr>
+          <a:lstStyle/>
+          <a:p>
+            <a:pPr algn="r"/>
+            <a:r>
+              <a:rPr sz="1000" b="0">
+                <a:solidFill>
+                  <a:srgbClr val="5A5A5A"/>
+                </a:solidFill>
+                <a:latin typeface="Microsoft YaHei"/>
+                <a:ea typeface="Microsoft YaHei"/>
+              </a:rPr>
+              <a:t>7</a:t>
+            </a:r>
+          </a:p>
+        </p:txBody>
+      </p:sp>
       <p:pic>
         <p:nvPicPr>
-          <p:cNvPr id="4" name="Picture 3" descr="checkerboard.png"/>
+          <p:cNvPr id="6" name="Picture 5" descr="checkerboard.png"/>
           <p:cNvPicPr>
             <a:picLocks noChangeAspect="1"/>
           </p:cNvPicPr>
@@ -5505,8 +6868,8 @@
         </p:blipFill>
         <p:spPr>
           <a:xfrm>
-            <a:off x="1479925" y="1325880"/>
-            <a:ext cx="3258068" cy="4937760"/>
+            <a:off x="1510093" y="1325880"/>
+            <a:ext cx="3197733" cy="4846320"/>
           </a:xfrm>
           <a:prstGeom prst="rect">
             <a:avLst/>
@@ -5515,7 +6878,7 @@
       </p:pic>
       <p:pic>
         <p:nvPicPr>
-          <p:cNvPr id="5" name="Picture 4" descr="difference.png"/>
+          <p:cNvPr id="7" name="Picture 6" descr="difference.png"/>
           <p:cNvPicPr>
             <a:picLocks noChangeAspect="1"/>
           </p:cNvPicPr>
@@ -5529,48 +6892,14 @@
         </p:blipFill>
         <p:spPr>
           <a:xfrm>
-            <a:off x="6567667" y="1325880"/>
-            <a:ext cx="4786904" cy="4937760"/>
+            <a:off x="6611990" y="1325880"/>
+            <a:ext cx="4698258" cy="4846320"/>
           </a:xfrm>
           <a:prstGeom prst="rect">
             <a:avLst/>
           </a:prstGeom>
         </p:spPr>
       </p:pic>
-      <p:sp>
-        <p:nvSpPr>
-          <p:cNvPr id="6" name="TextBox 5"/>
-          <p:cNvSpPr txBox="1"/>
-          <p:nvPr/>
-        </p:nvSpPr>
-        <p:spPr>
-          <a:xfrm>
-            <a:off x="502920" y="6355080"/>
-            <a:ext cx="11155680" cy="457200"/>
-          </a:xfrm>
-          <a:prstGeom prst="rect">
-            <a:avLst/>
-          </a:prstGeom>
-          <a:noFill/>
-        </p:spPr>
-        <p:txBody>
-          <a:bodyPr wrap="square">
-            <a:spAutoFit/>
-          </a:bodyPr>
-          <a:lstStyle/>
-          <a:p>
-            <a:r>
-              <a:rPr sz="1200" b="0">
-                <a:solidFill>
-                  <a:srgbClr val="5A5A5A"/>
-                </a:solidFill>
-                <a:latin typeface="Microsoft YaHei"/>
-              </a:rPr>
-              <a:t>棋盘格中骨与体表轮廓在配准后跨方格连续；差异图整体变暗。</a:t>
-            </a:r>
-          </a:p>
-        </p:txBody>
-      </p:sp>
     </p:spTree>
   </p:cSld>
   <p:clrMapOvr>
@@ -5591,54 +6920,20 @@
       <p:grpSpPr/>
       <p:sp>
         <p:nvSpPr>
-          <p:cNvPr id="2" name="TextBox 1"/>
-          <p:cNvSpPr txBox="1"/>
-          <p:nvPr/>
-        </p:nvSpPr>
-        <p:spPr>
-          <a:xfrm>
-            <a:off x="502920" y="274320"/>
-            <a:ext cx="11155680" cy="822960"/>
-          </a:xfrm>
-          <a:prstGeom prst="rect">
-            <a:avLst/>
-          </a:prstGeom>
-          <a:noFill/>
-        </p:spPr>
-        <p:txBody>
-          <a:bodyPr wrap="square">
-            <a:spAutoFit/>
-          </a:bodyPr>
-          <a:lstStyle/>
-          <a:p>
-            <a:r>
-              <a:rPr sz="2800" b="1">
-                <a:solidFill>
-                  <a:srgbClr val="1B3B6F"/>
-                </a:solidFill>
-                <a:latin typeface="Microsoft YaHei"/>
-              </a:rPr>
-              <a:t>结果 · 定量（真实数值）</a:t>
-            </a:r>
-          </a:p>
-        </p:txBody>
-      </p:sp>
-      <p:sp>
-        <p:nvSpPr>
-          <p:cNvPr id="3" name="Rectangle 2"/>
+          <p:cNvPr id="2" name="Rectangle 1"/>
           <p:cNvSpPr/>
           <p:nvPr/>
         </p:nvSpPr>
         <p:spPr>
           <a:xfrm>
-            <a:off x="530352" y="1078992"/>
-            <a:ext cx="2194560" cy="54864"/>
+            <a:off x="0" y="0"/>
+            <a:ext cx="12191695" cy="201168"/>
           </a:xfrm>
           <a:prstGeom prst="rect">
             <a:avLst/>
           </a:prstGeom>
           <a:solidFill>
-            <a:srgbClr val="1B3B6F"/>
+            <a:srgbClr val="1F3B6E"/>
           </a:solidFill>
           <a:ln>
             <a:noFill/>
@@ -5666,9 +6961,115 @@
           </a:p>
         </p:txBody>
       </p:sp>
+      <p:sp>
+        <p:nvSpPr>
+          <p:cNvPr id="3" name="TextBox 2"/>
+          <p:cNvSpPr txBox="1"/>
+          <p:nvPr/>
+        </p:nvSpPr>
+        <p:spPr>
+          <a:xfrm>
+            <a:off x="502920" y="384048"/>
+            <a:ext cx="11155680" cy="822960"/>
+          </a:xfrm>
+          <a:prstGeom prst="rect">
+            <a:avLst/>
+          </a:prstGeom>
+          <a:noFill/>
+        </p:spPr>
+        <p:txBody>
+          <a:bodyPr wrap="square">
+            <a:spAutoFit/>
+          </a:bodyPr>
+          <a:lstStyle/>
+          <a:p>
+            <a:r>
+              <a:rPr sz="2800" b="1">
+                <a:solidFill>
+                  <a:srgbClr val="1F3B6E"/>
+                </a:solidFill>
+                <a:latin typeface="Microsoft YaHei"/>
+                <a:ea typeface="Microsoft YaHei"/>
+              </a:rPr>
+              <a:t>结果 · 定量（真实数值）</a:t>
+            </a:r>
+          </a:p>
+        </p:txBody>
+      </p:sp>
+      <p:sp>
+        <p:nvSpPr>
+          <p:cNvPr id="4" name="TextBox 3"/>
+          <p:cNvSpPr txBox="1"/>
+          <p:nvPr/>
+        </p:nvSpPr>
+        <p:spPr>
+          <a:xfrm>
+            <a:off x="502920" y="6419088"/>
+            <a:ext cx="5486400" cy="365760"/>
+          </a:xfrm>
+          <a:prstGeom prst="rect">
+            <a:avLst/>
+          </a:prstGeom>
+          <a:noFill/>
+        </p:spPr>
+        <p:txBody>
+          <a:bodyPr wrap="square">
+            <a:spAutoFit/>
+          </a:bodyPr>
+          <a:lstStyle/>
+          <a:p>
+            <a:r>
+              <a:rPr sz="1000" b="0">
+                <a:solidFill>
+                  <a:srgbClr val="5A5A5A"/>
+                </a:solidFill>
+                <a:latin typeface="Microsoft YaHei"/>
+                <a:ea typeface="Microsoft YaHei"/>
+              </a:rPr>
+              <a:t>CBCT → pCT 配准 · 病例 M24557</a:t>
+            </a:r>
+          </a:p>
+        </p:txBody>
+      </p:sp>
+      <p:sp>
+        <p:nvSpPr>
+          <p:cNvPr id="5" name="TextBox 4"/>
+          <p:cNvSpPr txBox="1"/>
+          <p:nvPr/>
+        </p:nvSpPr>
+        <p:spPr>
+          <a:xfrm>
+            <a:off x="10789920" y="6419088"/>
+            <a:ext cx="914400" cy="365760"/>
+          </a:xfrm>
+          <a:prstGeom prst="rect">
+            <a:avLst/>
+          </a:prstGeom>
+          <a:noFill/>
+        </p:spPr>
+        <p:txBody>
+          <a:bodyPr wrap="square">
+            <a:spAutoFit/>
+          </a:bodyPr>
+          <a:lstStyle/>
+          <a:p>
+            <a:pPr algn="r"/>
+            <a:r>
+              <a:rPr sz="1000" b="0">
+                <a:solidFill>
+                  <a:srgbClr val="5A5A5A"/>
+                </a:solidFill>
+                <a:latin typeface="Microsoft YaHei"/>
+                <a:ea typeface="Microsoft YaHei"/>
+              </a:rPr>
+              <a:t>8</a:t>
+            </a:r>
+          </a:p>
+        </p:txBody>
+      </p:sp>
       <p:pic>
         <p:nvPicPr>
-          <p:cNvPr id="4" name="Picture 3" descr="metrics_bar.png"/>
+          <p:cNvPr id="6" name="Picture 5" descr="metrics_bar.png"/>
           <p:cNvPicPr>
             <a:picLocks noChangeAspect="1"/>
           </p:cNvPicPr>
@@ -5682,8 +7083,8 @@
         </p:blipFill>
         <p:spPr>
           <a:xfrm>
-            <a:off x="457200" y="2036354"/>
-            <a:ext cx="5852160" cy="2693851"/>
+            <a:off x="457200" y="2011680"/>
+            <a:ext cx="5760720" cy="2651760"/>
           </a:xfrm>
           <a:prstGeom prst="rect">
             <a:avLst/>
@@ -5692,15 +7093,15 @@
       </p:pic>
       <p:graphicFrame>
         <p:nvGraphicFramePr>
-          <p:cNvPr id="5" name="Table 4"/>
+          <p:cNvPr id="7" name="Table 6"/>
           <p:cNvGraphicFramePr>
             <a:graphicFrameLocks noGrp="1"/>
           </p:cNvGraphicFramePr>
           <p:nvPr/>
         </p:nvGraphicFramePr>
         <p:xfrm>
-          <a:off x="6492240" y="1554480"/>
-          <a:ext cx="5303520" cy="3291840"/>
+          <a:off x="6400800" y="1554480"/>
+          <a:ext cx="5394960" cy="1280160"/>
         </p:xfrm>
         <a:graphic>
           <a:graphicData uri="http://schemas.openxmlformats.org/drawingml/2006/table">
@@ -5709,10 +7110,11 @@
                 <a:tableStyleId>{5C22544A-7EE6-4342-B048-85BDC9FD1C3A}</a:tableStyleId>
               </a:tblPr>
               <a:tblGrid>
-                <a:gridCol w="2926080"/>
-                <a:gridCol w="2377440"/>
+                <a:gridCol w="1920240"/>
+                <a:gridCol w="1737360"/>
+                <a:gridCol w="1737360"/>
               </a:tblGrid>
-              <a:tr h="470262">
+              <a:tr h="426720">
                 <a:tc>
                   <a:txBody>
                     <a:bodyPr/>
@@ -5724,6 +7126,7 @@
                             <a:srgbClr val="FFFFFF"/>
                           </a:solidFill>
                           <a:latin typeface="Microsoft YaHei"/>
+                          <a:ea typeface="Microsoft YaHei"/>
                         </a:rPr>
                         <a:t>指标</a:t>
                       </a:r>
@@ -5731,7 +7134,7 @@
                   </a:txBody>
                   <a:tcPr anchor="ctr" marT="25400" marB="25400">
                     <a:solidFill>
-                      <a:srgbClr val="1B3B6F"/>
+                      <a:srgbClr val="1F3B6E"/>
                     </a:solidFill>
                   </a:tcPr>
                 </a:tc>
@@ -5746,19 +7149,43 @@
                             <a:srgbClr val="FFFFFF"/>
                           </a:solidFill>
                           <a:latin typeface="Microsoft YaHei"/>
+                          <a:ea typeface="Microsoft YaHei"/>
                         </a:rPr>
-                        <a:t>数值</a:t>
+                        <a:t>仅刚体</a:t>
                       </a:r>
                     </a:p>
                   </a:txBody>
                   <a:tcPr anchor="ctr" marT="25400" marB="25400">
                     <a:solidFill>
-                      <a:srgbClr val="1B3B6F"/>
+                      <a:srgbClr val="1F3B6E"/>
+                    </a:solidFill>
+                  </a:tcPr>
+                </a:tc>
+                <a:tc>
+                  <a:txBody>
+                    <a:bodyPr/>
+                    <a:lstStyle/>
+                    <a:p>
+                      <a:r>
+                        <a:rPr sz="1300" b="1">
+                          <a:solidFill>
+                            <a:srgbClr val="FFFFFF"/>
+                          </a:solidFill>
+                          <a:latin typeface="Microsoft YaHei"/>
+                          <a:ea typeface="Microsoft YaHei"/>
+                        </a:rPr>
+                        <a:t>+形变</a:t>
+                      </a:r>
+                    </a:p>
+                  </a:txBody>
+                  <a:tcPr anchor="ctr" marT="25400" marB="25400">
+                    <a:solidFill>
+                      <a:srgbClr val="1F3B6E"/>
                     </a:solidFill>
                   </a:tcPr>
                 </a:tc>
               </a:tr>
-              <a:tr h="470262">
+              <a:tr h="426720">
                 <a:tc>
                   <a:txBody>
                     <a:bodyPr/>
@@ -5770,8 +7197,9 @@
                             <a:srgbClr val="222222"/>
                           </a:solidFill>
                           <a:latin typeface="Microsoft YaHei"/>
+                          <a:ea typeface="Microsoft YaHei"/>
                         </a:rPr>
-                        <a:t>刚体平移 tx,ty,tz (mm)</a:t>
+                        <a:t>骨 Dice</a:t>
                       </a:r>
                     </a:p>
                   </a:txBody>
@@ -5793,38 +7221,15 @@
                             <a:srgbClr val="222222"/>
                           </a:solidFill>
                           <a:latin typeface="Microsoft YaHei"/>
+                          <a:ea typeface="Microsoft YaHei"/>
                         </a:rPr>
-                        <a:t>3.90, -37.85, 1.65</a:t>
+                        <a:t>0.832</a:t>
                       </a:r>
                     </a:p>
                   </a:txBody>
                   <a:tcPr anchor="ctr" marT="25400" marB="25400">
                     <a:solidFill>
                       <a:srgbClr val="FFFFFF"/>
-                    </a:solidFill>
-                  </a:tcPr>
-                </a:tc>
-              </a:tr>
-              <a:tr h="470262">
-                <a:tc>
-                  <a:txBody>
-                    <a:bodyPr/>
-                    <a:lstStyle/>
-                    <a:p>
-                      <a:r>
-                        <a:rPr sz="1200" b="0">
-                          <a:solidFill>
-                            <a:srgbClr val="222222"/>
-                          </a:solidFill>
-                          <a:latin typeface="Microsoft YaHei"/>
-                        </a:rPr>
-                        <a:t>刚体旋转 rx,ry,rz (度)</a:t>
-                      </a:r>
-                    </a:p>
-                  </a:txBody>
-                  <a:tcPr anchor="ctr" marT="25400" marB="25400">
-                    <a:solidFill>
-                      <a:srgbClr val="E8EDF5"/>
                     </a:solidFill>
                   </a:tcPr>
                 </a:tc>
@@ -5840,19 +7245,20 @@
                             <a:srgbClr val="222222"/>
                           </a:solidFill>
                           <a:latin typeface="Microsoft YaHei"/>
+                          <a:ea typeface="Microsoft YaHei"/>
                         </a:rPr>
-                        <a:t>-0.87, 0.37, 0.16</a:t>
+                        <a:t>0.875</a:t>
                       </a:r>
                     </a:p>
                   </a:txBody>
                   <a:tcPr anchor="ctr" marT="25400" marB="25400">
                     <a:solidFill>
-                      <a:srgbClr val="E8EDF5"/>
+                      <a:srgbClr val="FFFFFF"/>
                     </a:solidFill>
                   </a:tcPr>
                 </a:tc>
               </a:tr>
-              <a:tr h="470262">
+              <a:tr h="426720">
                 <a:tc>
                   <a:txBody>
                     <a:bodyPr/>
@@ -5864,6 +7270,252 @@
                             <a:srgbClr val="222222"/>
                           </a:solidFill>
                           <a:latin typeface="Microsoft YaHei"/>
+                          <a:ea typeface="Microsoft YaHei"/>
+                        </a:rPr>
+                        <a:t>LNCC</a:t>
+                      </a:r>
+                    </a:p>
+                  </a:txBody>
+                  <a:tcPr anchor="ctr" marT="25400" marB="25400">
+                    <a:solidFill>
+                      <a:srgbClr val="E9EEF6"/>
+                    </a:solidFill>
+                  </a:tcPr>
+                </a:tc>
+                <a:tc>
+                  <a:txBody>
+                    <a:bodyPr/>
+                    <a:lstStyle/>
+                    <a:p>
+                      <a:pPr algn="r"/>
+                      <a:r>
+                        <a:rPr sz="1200" b="0">
+                          <a:solidFill>
+                            <a:srgbClr val="222222"/>
+                          </a:solidFill>
+                          <a:latin typeface="Microsoft YaHei"/>
+                          <a:ea typeface="Microsoft YaHei"/>
+                        </a:rPr>
+                        <a:t>0.409</a:t>
+                      </a:r>
+                    </a:p>
+                  </a:txBody>
+                  <a:tcPr anchor="ctr" marT="25400" marB="25400">
+                    <a:solidFill>
+                      <a:srgbClr val="E9EEF6"/>
+                    </a:solidFill>
+                  </a:tcPr>
+                </a:tc>
+                <a:tc>
+                  <a:txBody>
+                    <a:bodyPr/>
+                    <a:lstStyle/>
+                    <a:p>
+                      <a:pPr algn="r"/>
+                      <a:r>
+                        <a:rPr sz="1200" b="0">
+                          <a:solidFill>
+                            <a:srgbClr val="222222"/>
+                          </a:solidFill>
+                          <a:latin typeface="Microsoft YaHei"/>
+                          <a:ea typeface="Microsoft YaHei"/>
+                        </a:rPr>
+                        <a:t>0.465</a:t>
+                      </a:r>
+                    </a:p>
+                  </a:txBody>
+                  <a:tcPr anchor="ctr" marT="25400" marB="25400">
+                    <a:solidFill>
+                      <a:srgbClr val="E9EEF6"/>
+                    </a:solidFill>
+                  </a:tcPr>
+                </a:tc>
+              </a:tr>
+            </a:tbl>
+          </a:graphicData>
+        </a:graphic>
+      </p:graphicFrame>
+      <p:graphicFrame>
+        <p:nvGraphicFramePr>
+          <p:cNvPr id="8" name="Table 7"/>
+          <p:cNvGraphicFramePr>
+            <a:graphicFrameLocks noGrp="1"/>
+          </p:cNvGraphicFramePr>
+          <p:nvPr/>
+        </p:nvGraphicFramePr>
+        <p:xfrm>
+          <a:off x="6400800" y="3063240"/>
+          <a:ext cx="5394960" cy="2103120"/>
+        </p:xfrm>
+        <a:graphic>
+          <a:graphicData uri="http://schemas.openxmlformats.org/drawingml/2006/table">
+            <a:tbl>
+              <a:tblPr firstRow="1" bandRow="1">
+                <a:tableStyleId>{5C22544A-7EE6-4342-B048-85BDC9FD1C3A}</a:tableStyleId>
+              </a:tblPr>
+              <a:tblGrid>
+                <a:gridCol w="2834640"/>
+                <a:gridCol w="2560320"/>
+              </a:tblGrid>
+              <a:tr h="420624">
+                <a:tc>
+                  <a:txBody>
+                    <a:bodyPr/>
+                    <a:lstStyle/>
+                    <a:p>
+                      <a:r>
+                        <a:rPr sz="1300" b="1">
+                          <a:solidFill>
+                            <a:srgbClr val="FFFFFF"/>
+                          </a:solidFill>
+                          <a:latin typeface="Microsoft YaHei"/>
+                          <a:ea typeface="Microsoft YaHei"/>
+                        </a:rPr>
+                        <a:t>刚体摆位修正</a:t>
+                      </a:r>
+                    </a:p>
+                  </a:txBody>
+                  <a:tcPr anchor="ctr" marT="25400" marB="25400">
+                    <a:solidFill>
+                      <a:srgbClr val="1F3B6E"/>
+                    </a:solidFill>
+                  </a:tcPr>
+                </a:tc>
+                <a:tc>
+                  <a:txBody>
+                    <a:bodyPr/>
+                    <a:lstStyle/>
+                    <a:p>
+                      <a:r>
+                        <a:rPr sz="1300" b="1">
+                          <a:solidFill>
+                            <a:srgbClr val="FFFFFF"/>
+                          </a:solidFill>
+                          <a:latin typeface="Microsoft YaHei"/>
+                          <a:ea typeface="Microsoft YaHei"/>
+                        </a:rPr>
+                        <a:t>数值</a:t>
+                      </a:r>
+                    </a:p>
+                  </a:txBody>
+                  <a:tcPr anchor="ctr" marT="25400" marB="25400">
+                    <a:solidFill>
+                      <a:srgbClr val="1F3B6E"/>
+                    </a:solidFill>
+                  </a:tcPr>
+                </a:tc>
+              </a:tr>
+              <a:tr h="420624">
+                <a:tc>
+                  <a:txBody>
+                    <a:bodyPr/>
+                    <a:lstStyle/>
+                    <a:p>
+                      <a:r>
+                        <a:rPr sz="1200" b="0">
+                          <a:solidFill>
+                            <a:srgbClr val="222222"/>
+                          </a:solidFill>
+                          <a:latin typeface="Microsoft YaHei"/>
+                          <a:ea typeface="Microsoft YaHei"/>
+                        </a:rPr>
+                        <a:t>平移 tx,ty,tz (mm)</a:t>
+                      </a:r>
+                    </a:p>
+                  </a:txBody>
+                  <a:tcPr anchor="ctr" marT="25400" marB="25400">
+                    <a:solidFill>
+                      <a:srgbClr val="FFFFFF"/>
+                    </a:solidFill>
+                  </a:tcPr>
+                </a:tc>
+                <a:tc>
+                  <a:txBody>
+                    <a:bodyPr/>
+                    <a:lstStyle/>
+                    <a:p>
+                      <a:pPr algn="r"/>
+                      <a:r>
+                        <a:rPr sz="1200" b="0">
+                          <a:solidFill>
+                            <a:srgbClr val="222222"/>
+                          </a:solidFill>
+                          <a:latin typeface="Microsoft YaHei"/>
+                          <a:ea typeface="Microsoft YaHei"/>
+                        </a:rPr>
+                        <a:t>3.90, -37.85, 1.65</a:t>
+                      </a:r>
+                    </a:p>
+                  </a:txBody>
+                  <a:tcPr anchor="ctr" marT="25400" marB="25400">
+                    <a:solidFill>
+                      <a:srgbClr val="FFFFFF"/>
+                    </a:solidFill>
+                  </a:tcPr>
+                </a:tc>
+              </a:tr>
+              <a:tr h="420624">
+                <a:tc>
+                  <a:txBody>
+                    <a:bodyPr/>
+                    <a:lstStyle/>
+                    <a:p>
+                      <a:r>
+                        <a:rPr sz="1200" b="0">
+                          <a:solidFill>
+                            <a:srgbClr val="222222"/>
+                          </a:solidFill>
+                          <a:latin typeface="Microsoft YaHei"/>
+                          <a:ea typeface="Microsoft YaHei"/>
+                        </a:rPr>
+                        <a:t>旋转 rx,ry,rz (度)</a:t>
+                      </a:r>
+                    </a:p>
+                  </a:txBody>
+                  <a:tcPr anchor="ctr" marT="25400" marB="25400">
+                    <a:solidFill>
+                      <a:srgbClr val="E9EEF6"/>
+                    </a:solidFill>
+                  </a:tcPr>
+                </a:tc>
+                <a:tc>
+                  <a:txBody>
+                    <a:bodyPr/>
+                    <a:lstStyle/>
+                    <a:p>
+                      <a:pPr algn="r"/>
+                      <a:r>
+                        <a:rPr sz="1200" b="0">
+                          <a:solidFill>
+                            <a:srgbClr val="222222"/>
+                          </a:solidFill>
+                          <a:latin typeface="Microsoft YaHei"/>
+                          <a:ea typeface="Microsoft YaHei"/>
+                        </a:rPr>
+                        <a:t>-0.87, 0.37, 0.16</a:t>
+                      </a:r>
+                    </a:p>
+                  </a:txBody>
+                  <a:tcPr anchor="ctr" marT="25400" marB="25400">
+                    <a:solidFill>
+                      <a:srgbClr val="E9EEF6"/>
+                    </a:solidFill>
+                  </a:tcPr>
+                </a:tc>
+              </a:tr>
+              <a:tr h="420624">
+                <a:tc>
+                  <a:txBody>
+                    <a:bodyPr/>
+                    <a:lstStyle/>
+                    <a:p>
+                      <a:r>
+                        <a:rPr sz="1200" b="0">
+                          <a:solidFill>
+                            <a:srgbClr val="222222"/>
+                          </a:solidFill>
+                          <a:latin typeface="Microsoft YaHei"/>
+                          <a:ea typeface="Microsoft YaHei"/>
                         </a:rPr>
                         <a:t>骨 Dice（前→后）</a:t>
                       </a:r>
@@ -5887,8 +7539,9 @@
                             <a:srgbClr val="222222"/>
                           </a:solidFill>
                           <a:latin typeface="Microsoft YaHei"/>
+                          <a:ea typeface="Microsoft YaHei"/>
                         </a:rPr>
-                        <a:t>0.128 → 0.919</a:t>
+                        <a:t>0.128→0.832</a:t>
                       </a:r>
                     </a:p>
                   </a:txBody>
@@ -5899,7 +7552,7 @@
                   </a:tcPr>
                 </a:tc>
               </a:tr>
-              <a:tr h="470262">
+              <a:tr h="420624">
                 <a:tc>
                   <a:txBody>
                     <a:bodyPr/>
@@ -5911,14 +7564,15 @@
                             <a:srgbClr val="222222"/>
                           </a:solidFill>
                           <a:latin typeface="Microsoft YaHei"/>
+                          <a:ea typeface="Microsoft YaHei"/>
                         </a:rPr>
-                        <a:t>LNCC（前→后）</a:t>
+                        <a:t>Jacobian min / 负值占比</a:t>
                       </a:r>
                     </a:p>
                   </a:txBody>
                   <a:tcPr anchor="ctr" marT="25400" marB="25400">
                     <a:solidFill>
-                      <a:srgbClr val="E8EDF5"/>
+                      <a:srgbClr val="E9EEF6"/>
                     </a:solidFill>
                   </a:tcPr>
                 </a:tc>
@@ -5934,108 +7588,15 @@
                             <a:srgbClr val="222222"/>
                           </a:solidFill>
                           <a:latin typeface="Microsoft YaHei"/>
+                          <a:ea typeface="Microsoft YaHei"/>
                         </a:rPr>
-                        <a:t>0.079 → 0.613</a:t>
+                        <a:t>0.506 / 0.00%</a:t>
                       </a:r>
                     </a:p>
                   </a:txBody>
                   <a:tcPr anchor="ctr" marT="25400" marB="25400">
                     <a:solidFill>
-                      <a:srgbClr val="E8EDF5"/>
-                    </a:solidFill>
-                  </a:tcPr>
-                </a:tc>
-              </a:tr>
-              <a:tr h="470262">
-                <a:tc>
-                  <a:txBody>
-                    <a:bodyPr/>
-                    <a:lstStyle/>
-                    <a:p>
-                      <a:r>
-                        <a:rPr sz="1200" b="0">
-                          <a:solidFill>
-                            <a:srgbClr val="222222"/>
-                          </a:solidFill>
-                          <a:latin typeface="Microsoft YaHei"/>
-                        </a:rPr>
-                        <a:t>Jacobian 最小值</a:t>
-                      </a:r>
-                    </a:p>
-                  </a:txBody>
-                  <a:tcPr anchor="ctr" marT="25400" marB="25400">
-                    <a:solidFill>
-                      <a:srgbClr val="FFFFFF"/>
-                    </a:solidFill>
-                  </a:tcPr>
-                </a:tc>
-                <a:tc>
-                  <a:txBody>
-                    <a:bodyPr/>
-                    <a:lstStyle/>
-                    <a:p>
-                      <a:pPr algn="r"/>
-                      <a:r>
-                        <a:rPr sz="1200" b="0">
-                          <a:solidFill>
-                            <a:srgbClr val="222222"/>
-                          </a:solidFill>
-                          <a:latin typeface="Microsoft YaHei"/>
-                        </a:rPr>
-                        <a:t>-7.13</a:t>
-                      </a:r>
-                    </a:p>
-                  </a:txBody>
-                  <a:tcPr anchor="ctr" marT="25400" marB="25400">
-                    <a:solidFill>
-                      <a:srgbClr val="FFFFFF"/>
-                    </a:solidFill>
-                  </a:tcPr>
-                </a:tc>
-              </a:tr>
-              <a:tr h="470268">
-                <a:tc>
-                  <a:txBody>
-                    <a:bodyPr/>
-                    <a:lstStyle/>
-                    <a:p>
-                      <a:r>
-                        <a:rPr sz="1200" b="0">
-                          <a:solidFill>
-                            <a:srgbClr val="222222"/>
-                          </a:solidFill>
-                          <a:latin typeface="Microsoft YaHei"/>
-                        </a:rPr>
-                        <a:t>Jacobian 负值占比</a:t>
-                      </a:r>
-                    </a:p>
-                  </a:txBody>
-                  <a:tcPr anchor="ctr" marT="25400" marB="25400">
-                    <a:solidFill>
-                      <a:srgbClr val="E8EDF5"/>
-                    </a:solidFill>
-                  </a:tcPr>
-                </a:tc>
-                <a:tc>
-                  <a:txBody>
-                    <a:bodyPr/>
-                    <a:lstStyle/>
-                    <a:p>
-                      <a:pPr algn="r"/>
-                      <a:r>
-                        <a:rPr sz="1200" b="0">
-                          <a:solidFill>
-                            <a:srgbClr val="222222"/>
-                          </a:solidFill>
-                          <a:latin typeface="Microsoft YaHei"/>
-                        </a:rPr>
-                        <a:t>0.333%</a:t>
-                      </a:r>
-                    </a:p>
-                  </a:txBody>
-                  <a:tcPr anchor="ctr" marT="25400" marB="25400">
-                    <a:solidFill>
-                      <a:srgbClr val="E8EDF5"/>
+                      <a:srgbClr val="E9EEF6"/>
                     </a:solidFill>
                   </a:tcPr>
                 </a:tc>
@@ -6046,14 +7607,14 @@
       </p:graphicFrame>
       <p:sp>
         <p:nvSpPr>
-          <p:cNvPr id="6" name="TextBox 5"/>
+          <p:cNvPr id="9" name="TextBox 8"/>
           <p:cNvSpPr txBox="1"/>
           <p:nvPr/>
         </p:nvSpPr>
         <p:spPr>
           <a:xfrm>
-            <a:off x="6492240" y="4983480"/>
-            <a:ext cx="5303520" cy="1463040"/>
+            <a:off x="6400800" y="5349240"/>
+            <a:ext cx="5394960" cy="1005840"/>
           </a:xfrm>
           <a:prstGeom prst="rect">
             <a:avLst/>
@@ -6068,7 +7629,7 @@
           <a:p>
             <a:pPr>
               <a:spcAft>
-                <a:spcPts val="600"/>
+                <a:spcPts val="1000"/>
               </a:spcAft>
             </a:pPr>
             <a:r>
@@ -6077,14 +7638,15 @@
                   <a:srgbClr val="222222"/>
                 </a:solidFill>
                 <a:latin typeface="Microsoft YaHei"/>
+                <a:ea typeface="Microsoft YaHei"/>
               </a:rPr>
-              <a:t>• 骨 Dice 独立于优化目标 LNCC：大幅提升说明是真实结构对齐，而非过拟合相似度。</a:t>
+              <a:t>▪ 骨 Dice 独立于优化目标，证明真实结构对齐</a:t>
             </a:r>
           </a:p>
           <a:p>
             <a:pPr>
               <a:spcAft>
-                <a:spcPts val="600"/>
+                <a:spcPts val="1000"/>
               </a:spcAft>
             </a:pPr>
             <a:r>
@@ -6093,8 +7655,9 @@
                   <a:srgbClr val="222222"/>
                 </a:solidFill>
                 <a:latin typeface="Microsoft YaHei"/>
+                <a:ea typeface="Microsoft YaHei"/>
               </a:rPr>
-              <a:t>• Jacobian 负值占比 ≈ 0 → 形变合法、无折叠。</a:t>
+              <a:t>▪ 刚体为主结果；形变仅小幅细化</a:t>
             </a:r>
           </a:p>
         </p:txBody>
@@ -6119,54 +7682,20 @@
       <p:grpSpPr/>
       <p:sp>
         <p:nvSpPr>
-          <p:cNvPr id="2" name="TextBox 1"/>
-          <p:cNvSpPr txBox="1"/>
-          <p:nvPr/>
-        </p:nvSpPr>
-        <p:spPr>
-          <a:xfrm>
-            <a:off x="502920" y="274320"/>
-            <a:ext cx="11155680" cy="822960"/>
-          </a:xfrm>
-          <a:prstGeom prst="rect">
-            <a:avLst/>
-          </a:prstGeom>
-          <a:noFill/>
-        </p:spPr>
-        <p:txBody>
-          <a:bodyPr wrap="square">
-            <a:spAutoFit/>
-          </a:bodyPr>
-          <a:lstStyle/>
-          <a:p>
-            <a:r>
-              <a:rPr sz="2800" b="1">
-                <a:solidFill>
-                  <a:srgbClr val="1B3B6F"/>
-                </a:solidFill>
-                <a:latin typeface="Microsoft YaHei"/>
-              </a:rPr>
-              <a:t>收敛过程与形变合法性</a:t>
-            </a:r>
-          </a:p>
-        </p:txBody>
-      </p:sp>
-      <p:sp>
-        <p:nvSpPr>
-          <p:cNvPr id="3" name="Rectangle 2"/>
+          <p:cNvPr id="2" name="Rectangle 1"/>
           <p:cNvSpPr/>
           <p:nvPr/>
         </p:nvSpPr>
         <p:spPr>
           <a:xfrm>
-            <a:off x="530352" y="1078992"/>
-            <a:ext cx="2194560" cy="54864"/>
+            <a:off x="0" y="0"/>
+            <a:ext cx="12191695" cy="201168"/>
           </a:xfrm>
           <a:prstGeom prst="rect">
             <a:avLst/>
           </a:prstGeom>
           <a:solidFill>
-            <a:srgbClr val="1B3B6F"/>
+            <a:srgbClr val="1F3B6E"/>
           </a:solidFill>
           <a:ln>
             <a:noFill/>
@@ -6194,9 +7723,115 @@
           </a:p>
         </p:txBody>
       </p:sp>
+      <p:sp>
+        <p:nvSpPr>
+          <p:cNvPr id="3" name="TextBox 2"/>
+          <p:cNvSpPr txBox="1"/>
+          <p:nvPr/>
+        </p:nvSpPr>
+        <p:spPr>
+          <a:xfrm>
+            <a:off x="502920" y="384048"/>
+            <a:ext cx="11155680" cy="822960"/>
+          </a:xfrm>
+          <a:prstGeom prst="rect">
+            <a:avLst/>
+          </a:prstGeom>
+          <a:noFill/>
+        </p:spPr>
+        <p:txBody>
+          <a:bodyPr wrap="square">
+            <a:spAutoFit/>
+          </a:bodyPr>
+          <a:lstStyle/>
+          <a:p>
+            <a:r>
+              <a:rPr sz="2800" b="1">
+                <a:solidFill>
+                  <a:srgbClr val="1F3B6E"/>
+                </a:solidFill>
+                <a:latin typeface="Microsoft YaHei"/>
+                <a:ea typeface="Microsoft YaHei"/>
+              </a:rPr>
+              <a:t>收敛过程与形变合法性</a:t>
+            </a:r>
+          </a:p>
+        </p:txBody>
+      </p:sp>
+      <p:sp>
+        <p:nvSpPr>
+          <p:cNvPr id="4" name="TextBox 3"/>
+          <p:cNvSpPr txBox="1"/>
+          <p:nvPr/>
+        </p:nvSpPr>
+        <p:spPr>
+          <a:xfrm>
+            <a:off x="502920" y="6419088"/>
+            <a:ext cx="5486400" cy="365760"/>
+          </a:xfrm>
+          <a:prstGeom prst="rect">
+            <a:avLst/>
+          </a:prstGeom>
+          <a:noFill/>
+        </p:spPr>
+        <p:txBody>
+          <a:bodyPr wrap="square">
+            <a:spAutoFit/>
+          </a:bodyPr>
+          <a:lstStyle/>
+          <a:p>
+            <a:r>
+              <a:rPr sz="1000" b="0">
+                <a:solidFill>
+                  <a:srgbClr val="5A5A5A"/>
+                </a:solidFill>
+                <a:latin typeface="Microsoft YaHei"/>
+                <a:ea typeface="Microsoft YaHei"/>
+              </a:rPr>
+              <a:t>CBCT → pCT 配准 · 病例 M24557</a:t>
+            </a:r>
+          </a:p>
+        </p:txBody>
+      </p:sp>
+      <p:sp>
+        <p:nvSpPr>
+          <p:cNvPr id="5" name="TextBox 4"/>
+          <p:cNvSpPr txBox="1"/>
+          <p:nvPr/>
+        </p:nvSpPr>
+        <p:spPr>
+          <a:xfrm>
+            <a:off x="10789920" y="6419088"/>
+            <a:ext cx="914400" cy="365760"/>
+          </a:xfrm>
+          <a:prstGeom prst="rect">
+            <a:avLst/>
+          </a:prstGeom>
+          <a:noFill/>
+        </p:spPr>
+        <p:txBody>
+          <a:bodyPr wrap="square">
+            <a:spAutoFit/>
+          </a:bodyPr>
+          <a:lstStyle/>
+          <a:p>
+            <a:pPr algn="r"/>
+            <a:r>
+              <a:rPr sz="1000" b="0">
+                <a:solidFill>
+                  <a:srgbClr val="5A5A5A"/>
+                </a:solidFill>
+                <a:latin typeface="Microsoft YaHei"/>
+                <a:ea typeface="Microsoft YaHei"/>
+              </a:rPr>
+              <a:t>9</a:t>
+            </a:r>
+          </a:p>
+        </p:txBody>
+      </p:sp>
       <p:pic>
         <p:nvPicPr>
-          <p:cNvPr id="4" name="Picture 3" descr="loss_curve.png"/>
+          <p:cNvPr id="6" name="Picture 5" descr="loss_curve.png"/>
           <p:cNvPicPr>
             <a:picLocks noChangeAspect="1"/>
           </p:cNvPicPr>
@@ -6210,7 +7845,7 @@
         </p:blipFill>
         <p:spPr>
           <a:xfrm>
-            <a:off x="457200" y="2493818"/>
+            <a:off x="457200" y="2402378"/>
             <a:ext cx="6400800" cy="2327563"/>
           </a:xfrm>
           <a:prstGeom prst="rect">
@@ -6220,7 +7855,7 @@
       </p:pic>
       <p:pic>
         <p:nvPicPr>
-          <p:cNvPr id="5" name="Picture 4" descr="jacobian_map.png"/>
+          <p:cNvPr id="7" name="Picture 6" descr="jacobian_map.png"/>
           <p:cNvPicPr>
             <a:picLocks noChangeAspect="1"/>
           </p:cNvPicPr>
@@ -6234,8 +7869,8 @@
         </p:blipFill>
         <p:spPr>
           <a:xfrm>
-            <a:off x="7040880" y="1495859"/>
-            <a:ext cx="4754880" cy="4323480"/>
+            <a:off x="7040880" y="1409160"/>
+            <a:ext cx="4754880" cy="4313998"/>
           </a:xfrm>
           <a:prstGeom prst="rect">
             <a:avLst/>
@@ -6244,14 +7879,14 @@
       </p:pic>
       <p:sp>
         <p:nvSpPr>
-          <p:cNvPr id="6" name="TextBox 5"/>
+          <p:cNvPr id="8" name="TextBox 7"/>
           <p:cNvSpPr txBox="1"/>
           <p:nvPr/>
         </p:nvSpPr>
         <p:spPr>
           <a:xfrm>
-            <a:off x="502920" y="6355080"/>
-            <a:ext cx="11155680" cy="457200"/>
+            <a:off x="548640" y="5806440"/>
+            <a:ext cx="10972800" cy="640080"/>
           </a:xfrm>
           <a:prstGeom prst="rect">
             <a:avLst/>
@@ -6264,14 +7899,20 @@
           </a:bodyPr>
           <a:lstStyle/>
           <a:p>
-            <a:r>
-              <a:rPr sz="1200" b="0">
+            <a:pPr>
+              <a:spcAft>
+                <a:spcPts val="1000"/>
+              </a:spcAft>
+            </a:pPr>
+            <a:r>
+              <a:rPr sz="1500" b="0">
                 <a:solidFill>
-                  <a:srgbClr val="5A5A5A"/>
+                  <a:srgbClr val="222222"/>
                 </a:solidFill>
                 <a:latin typeface="Microsoft YaHei"/>
+                <a:ea typeface="Microsoft YaHei"/>
               </a:rPr>
-              <a:t>左：两阶段 loss 收敛；右：形变场 Jacobian 行列式中心层，绝大多数为正（全局负值占比 0.33%）。</a:t>
+              <a:t>▪ 形变场 Jacobian 处处为正、无折叠（微分同胚）</a:t>
             </a:r>
           </a:p>
         </p:txBody>
@@ -6602,4 +8243,324 @@
   </a:objectDefaults>
   <a:extraClrSchemeLst/>
 </a:theme>
+</file>
+
+<file path=ppt/theme/theme2.xml><?xml version="1.0" encoding="utf-8"?>
+<a:theme xmlns:a="http://schemas.openxmlformats.org/drawingml/2006/main" name="Office Theme">
+  <a:themeElements>
+    <a:clrScheme name="Office">
+      <a:dk1>
+        <a:sysClr val="windowText" lastClr="000000"/>
+      </a:dk1>
+      <a:lt1>
+        <a:sysClr val="window" lastClr="FFFFFF"/>
+      </a:lt1>
+      <a:dk2>
+        <a:srgbClr val="1F497D"/>
+      </a:dk2>
+      <a:lt2>
+        <a:srgbClr val="EEECE1"/>
+      </a:lt2>
+      <a:accent1>
+        <a:srgbClr val="4F81BD"/>
+      </a:accent1>
+      <a:accent2>
+        <a:srgbClr val="C0504D"/>
+      </a:accent2>
+      <a:accent3>
+        <a:srgbClr val="9BBB59"/>
+      </a:accent3>
+      <a:accent4>
+        <a:srgbClr val="8064A2"/>
+      </a:accent4>
+      <a:accent5>
+        <a:srgbClr val="4BACC6"/>
+      </a:accent5>
+      <a:accent6>
+        <a:srgbClr val="F79646"/>
+      </a:accent6>
+      <a:hlink>
+        <a:srgbClr val="0000FF"/>
+      </a:hlink>
+      <a:folHlink>
+        <a:srgbClr val="800080"/>
+      </a:folHlink>
+    </a:clrScheme>
+    <a:fontScheme name="Office">
+      <a:majorFont>
+        <a:latin typeface="Calibri"/>
+        <a:ea typeface=""/>
+        <a:cs typeface=""/>
+        <a:font script="Jpan" typeface="ＭＳ Ｐゴシック"/>
+        <a:font script="Hang" typeface="맑은 고딕"/>
+        <a:font script="Hans" typeface="宋体"/>
+        <a:font script="Hant" typeface="新細明體"/>
+        <a:font script="Arab" typeface="Times New Roman"/>
+        <a:font script="Hebr" typeface="Times New Roman"/>
+        <a:font script="Thai" typeface="Angsana New"/>
+        <a:font script="Ethi" typeface="Nyala"/>
+        <a:font script="Beng" typeface="Vrinda"/>
+        <a:font script="Gujr" typeface="Shruti"/>
+        <a:font script="Khmr" typeface="MoolBoran"/>
+        <a:font script="Knda" typeface="Tunga"/>
+        <a:font script="Guru" typeface="Raavi"/>
+        <a:font script="Cans" typeface="Euphemia"/>
+        <a:font script="Cher" typeface="Plantagenet Cherokee"/>
+        <a:font script="Yiii" typeface="Microsoft Yi Baiti"/>
+        <a:font script="Tibt" typeface="Microsoft Himalaya"/>
+        <a:font script="Thaa" typeface="MV Boli"/>
+        <a:font script="Deva" typeface="Mangal"/>
+        <a:font script="Telu" typeface="Gautami"/>
+        <a:font script="Taml" typeface="Latha"/>
+        <a:font script="Syrc" typeface="Estrangelo Edessa"/>
+        <a:font script="Orya" typeface="Kalinga"/>
+        <a:font script="Mlym" typeface="Kartika"/>
+        <a:font script="Laoo" typeface="DokChampa"/>
+        <a:font script="Sinh" typeface="Iskoola Pota"/>
+        <a:font script="Mong" typeface="Mongolian Baiti"/>
+        <a:font script="Viet" typeface="Times New Roman"/>
+        <a:font script="Uigh" typeface="Microsoft Uighur"/>
+        <a:font script="Geor" typeface="Sylfaen"/>
+      </a:majorFont>
+      <a:minorFont>
+        <a:latin typeface="Calibri"/>
+        <a:ea typeface=""/>
+        <a:cs typeface=""/>
+        <a:font script="Jpan" typeface="ＭＳ Ｐゴシック"/>
+        <a:font script="Hang" typeface="맑은 고딕"/>
+        <a:font script="Hans" typeface="宋体"/>
+        <a:font script="Hant" typeface="新細明體"/>
+        <a:font script="Arab" typeface="Arial"/>
+        <a:font script="Hebr" typeface="Arial"/>
+        <a:font script="Thai" typeface="Cordia New"/>
+        <a:font script="Ethi" typeface="Nyala"/>
+        <a:font script="Beng" typeface="Vrinda"/>
+        <a:font script="Gujr" typeface="Shruti"/>
+        <a:font script="Khmr" typeface="DaunPenh"/>
+        <a:font script="Knda" typeface="Tunga"/>
+        <a:font script="Guru" typeface="Raavi"/>
+        <a:font script="Cans" typeface="Euphemia"/>
+        <a:font script="Cher" typeface="Plantagenet Cherokee"/>
+        <a:font script="Yiii" typeface="Microsoft Yi Baiti"/>
+        <a:font script="Tibt" typeface="Microsoft Himalaya"/>
+        <a:font script="Thaa" typeface="MV Boli"/>
+        <a:font script="Deva" typeface="Mangal"/>
+        <a:font script="Telu" typeface="Gautami"/>
+        <a:font script="Taml" typeface="Latha"/>
+        <a:font script="Syrc" typeface="Estrangelo Edessa"/>
+        <a:font script="Orya" typeface="Kalinga"/>
+        <a:font script="Mlym" typeface="Kartika"/>
+        <a:font script="Laoo" typeface="DokChampa"/>
+        <a:font script="Sinh" typeface="Iskoola Pota"/>
+        <a:font script="Mong" typeface="Mongolian Baiti"/>
+        <a:font script="Viet" typeface="Arial"/>
+        <a:font script="Uigh" typeface="Microsoft Uighur"/>
+        <a:font script="Geor" typeface="Sylfaen"/>
+      </a:minorFont>
+    </a:fontScheme>
+    <a:fmtScheme name="Office">
+      <a:fillStyleLst>
+        <a:solidFill>
+          <a:schemeClr val="phClr"/>
+        </a:solidFill>
+        <a:gradFill rotWithShape="1">
+          <a:gsLst>
+            <a:gs pos="0">
+              <a:schemeClr val="phClr">
+                <a:tint val="50000"/>
+                <a:satMod val="300000"/>
+              </a:schemeClr>
+            </a:gs>
+            <a:gs pos="35000">
+              <a:schemeClr val="phClr">
+                <a:tint val="37000"/>
+                <a:satMod val="300000"/>
+              </a:schemeClr>
+            </a:gs>
+            <a:gs pos="100000">
+              <a:schemeClr val="phClr">
+                <a:tint val="15000"/>
+                <a:satMod val="350000"/>
+              </a:schemeClr>
+            </a:gs>
+          </a:gsLst>
+          <a:lin ang="16200000" scaled="1"/>
+        </a:gradFill>
+        <a:gradFill rotWithShape="1">
+          <a:gsLst>
+            <a:gs pos="0">
+              <a:schemeClr val="phClr">
+                <a:tint val="100000"/>
+                <a:shade val="100000"/>
+                <a:satMod val="130000"/>
+              </a:schemeClr>
+            </a:gs>
+            <a:gs pos="100000">
+              <a:schemeClr val="phClr">
+                <a:tint val="50000"/>
+                <a:shade val="100000"/>
+                <a:satMod val="350000"/>
+              </a:schemeClr>
+            </a:gs>
+          </a:gsLst>
+          <a:lin ang="16200000" scaled="0"/>
+        </a:gradFill>
+      </a:fillStyleLst>
+      <a:lnStyleLst>
+        <a:ln w="9525" cap="flat" cmpd="sng" algn="ctr">
+          <a:solidFill>
+            <a:schemeClr val="phClr">
+              <a:shade val="95000"/>
+              <a:satMod val="105000"/>
+            </a:schemeClr>
+          </a:solidFill>
+          <a:prstDash val="solid"/>
+        </a:ln>
+        <a:ln w="25400" cap="flat" cmpd="sng" algn="ctr">
+          <a:solidFill>
+            <a:schemeClr val="phClr"/>
+          </a:solidFill>
+          <a:prstDash val="solid"/>
+        </a:ln>
+        <a:ln w="38100" cap="flat" cmpd="sng" algn="ctr">
+          <a:solidFill>
+            <a:schemeClr val="phClr"/>
+          </a:solidFill>
+          <a:prstDash val="solid"/>
+        </a:ln>
+      </a:lnStyleLst>
+      <a:effectStyleLst>
+        <a:effectStyle>
+          <a:effectLst>
+            <a:outerShdw blurRad="40000" dist="20000" dir="5400000" rotWithShape="0">
+              <a:srgbClr val="000000">
+                <a:alpha val="38000"/>
+              </a:srgbClr>
+            </a:outerShdw>
+          </a:effectLst>
+        </a:effectStyle>
+        <a:effectStyle>
+          <a:effectLst>
+            <a:outerShdw blurRad="40000" dist="23000" dir="5400000" rotWithShape="0">
+              <a:srgbClr val="000000">
+                <a:alpha val="35000"/>
+              </a:srgbClr>
+            </a:outerShdw>
+          </a:effectLst>
+        </a:effectStyle>
+        <a:effectStyle>
+          <a:effectLst>
+            <a:outerShdw blurRad="40000" dist="23000" dir="5400000" rotWithShape="0">
+              <a:srgbClr val="000000">
+                <a:alpha val="35000"/>
+              </a:srgbClr>
+            </a:outerShdw>
+          </a:effectLst>
+          <a:scene3d>
+            <a:camera prst="orthographicFront">
+              <a:rot lat="0" lon="0" rev="0"/>
+            </a:camera>
+            <a:lightRig rig="threePt" dir="t">
+              <a:rot lat="0" lon="0" rev="1200000"/>
+            </a:lightRig>
+          </a:scene3d>
+          <a:sp3d>
+            <a:bevelT w="63500" h="25400"/>
+          </a:sp3d>
+        </a:effectStyle>
+      </a:effectStyleLst>
+      <a:bgFillStyleLst>
+        <a:solidFill>
+          <a:schemeClr val="phClr"/>
+        </a:solidFill>
+        <a:gradFill rotWithShape="1">
+          <a:gsLst>
+            <a:gs pos="0">
+              <a:schemeClr val="phClr">
+                <a:tint val="40000"/>
+                <a:satMod val="350000"/>
+              </a:schemeClr>
+            </a:gs>
+            <a:gs pos="40000">
+              <a:schemeClr val="phClr">
+                <a:tint val="45000"/>
+                <a:shade val="99000"/>
+                <a:satMod val="350000"/>
+              </a:schemeClr>
+            </a:gs>
+            <a:gs pos="100000">
+              <a:schemeClr val="phClr">
+                <a:shade val="20000"/>
+                <a:satMod val="255000"/>
+              </a:schemeClr>
+            </a:gs>
+          </a:gsLst>
+          <a:path path="circle">
+            <a:fillToRect l="50000" t="-80000" r="50000" b="180000"/>
+          </a:path>
+        </a:gradFill>
+        <a:gradFill rotWithShape="1">
+          <a:gsLst>
+            <a:gs pos="0">
+              <a:schemeClr val="phClr">
+                <a:tint val="80000"/>
+                <a:satMod val="300000"/>
+              </a:schemeClr>
+            </a:gs>
+            <a:gs pos="100000">
+              <a:schemeClr val="phClr">
+                <a:shade val="30000"/>
+                <a:satMod val="200000"/>
+              </a:schemeClr>
+            </a:gs>
+          </a:gsLst>
+          <a:path path="circle">
+            <a:fillToRect l="50000" t="50000" r="50000" b="50000"/>
+          </a:path>
+        </a:gradFill>
+      </a:bgFillStyleLst>
+    </a:fmtScheme>
+  </a:themeElements>
+  <a:objectDefaults>
+    <a:spDef>
+      <a:spPr/>
+      <a:bodyPr/>
+      <a:lstStyle/>
+      <a:style>
+        <a:lnRef idx="1">
+          <a:schemeClr val="accent1"/>
+        </a:lnRef>
+        <a:fillRef idx="3">
+          <a:schemeClr val="accent1"/>
+        </a:fillRef>
+        <a:effectRef idx="2">
+          <a:schemeClr val="accent1"/>
+        </a:effectRef>
+        <a:fontRef idx="minor">
+          <a:schemeClr val="lt1"/>
+        </a:fontRef>
+      </a:style>
+    </a:spDef>
+    <a:lnDef>
+      <a:spPr/>
+      <a:bodyPr/>
+      <a:lstStyle/>
+      <a:style>
+        <a:lnRef idx="2">
+          <a:schemeClr val="accent1"/>
+        </a:lnRef>
+        <a:fillRef idx="0">
+          <a:schemeClr val="accent1"/>
+        </a:fillRef>
+        <a:effectRef idx="1">
+          <a:schemeClr val="accent1"/>
+        </a:effectRef>
+        <a:fontRef idx="minor">
+          <a:schemeClr val="tx1"/>
+        </a:fontRef>
+      </a:style>
+    </a:lnDef>
+  </a:objectDefaults>
+  <a:extraClrSchemeLst/>
+</a:theme>
 </file>
--- a/results_sample/CBCT_pCT_配准汇报.pptx
+++ b/results_sample/CBCT_pCT_配准汇报.pptx
@@ -511,7 +511,7 @@
           <a:lstStyle/>
           <a:p>
             <a:r>
-              <a:t>同一病人 M24557 的计划CT与治疗位锥束CT。三大难点决定了后续方法：坐标系不同→需稳健初始化；灰度不一致→需对线性差异鲁棒的相似性(LNCC)；FOV不同→只在CBCT视野内评估。</a:t>
+              <a:t>同一病人 M24557 的计划CT与治疗位锥束CT。三大难点决定方法：坐标系不同→稳健初始化；灰度不一致→对线性差异鲁棒的 LNCC；FOV 不同→只在 CBCT 视野内评估。</a:t>
             </a:r>
           </a:p>
         </p:txBody>
@@ -581,7 +581,7 @@
           <a:lstStyle/>
           <a:p>
             <a:r>
-              <a:t>CBCT 以治疗机等中心为原点、pCT 以 CT 床为原点；散射导致 cupping 与 HU 偏移；FOV 截断使边缘信息缺失。这些都要求方法对灰度差异鲁棒并限制评估区域。</a:t>
+              <a:t>CBCT 以治疗机等中心为原点、pCT 以 CT 床为原点；散射导致 cupping 与 HU 偏移；FOV 截断使边缘缺失。这些都要求对灰度差异鲁棒并限制评估区域。</a:t>
             </a:r>
           </a:p>
         </p:txBody>
@@ -651,7 +651,7 @@
           <a:lstStyle/>
           <a:p>
             <a:r>
-              <a:t>不是调用黑箱配准软件，而是用 PyTorch 自行实现：对这一对体数据直接用梯度下降优化刚体参数与（可选）微分同胚形变。</a:t>
+              <a:t>不是调用黑箱配准软件，而是用 PyTorch 对这一对体数据直接梯度下降优化刚体参数与受控微分同胚形变。</a:t>
             </a:r>
           </a:p>
         </p:txBody>
@@ -721,7 +721,7 @@
           <a:lstStyle/>
           <a:p>
             <a:r>
-              <a:t>立方体各向同性网格保证 affine_grid 的归一化旋转就是物理刚体旋转、不引入剪切；z 方向用面积剖面互相关比用质心稳健得多。</a:t>
+              <a:t>立方体各向同性网格保证 affine_grid 的归一化旋转就是物理刚体旋转、不引入剪切；z 用面积剖面互相关比用质心稳健得多。</a:t>
             </a:r>
           </a:p>
         </p:txBody>
@@ -791,7 +791,7 @@
           <a:lstStyle/>
           <a:p>
             <a:r>
-              <a:t>CBCT 软组织 HU 低于 pCT（cupping/标定差异），故用对线性灰度差异鲁棒的LNCC。本例戴面罩头颈近似刚体，形变只做小幅平滑细化以避免过度揉变。</a:t>
+              <a:t>CBCT 软组织 HU 低于 pCT（cupping/标定差异），故用对线性灰度差异鲁棒的LNCC。本例戴面罩头颈近似刚体，形变只做小幅平滑细化以免过度揉变。</a:t>
             </a:r>
           </a:p>
         </p:txBody>
@@ -861,7 +861,7 @@
           <a:lstStyle/>
           <a:p>
             <a:r>
-              <a:t>棋盘格中骨与体表轮廓在配准后跨方格连续；差异图整体明显变暗，残留主要在 CBCT FOV 边缘与couch。</a:t>
+              <a:t>棋盘格中骨与体表轮廓在配准后跨方格连续；差异图整体明显变暗，残留主要在 CBCT FOV 边缘与 couch。</a:t>
             </a:r>
           </a:p>
         </p:txBody>
@@ -931,7 +931,7 @@
           <a:lstStyle/>
           <a:p>
             <a:r>
-              <a:t>骨 Dice 用 HU&gt;200 阈值、独立于 LNCC 优化目标，因此大幅提升说明是真实结构对齐而非过拟合相似度。刚体已达到主要精度，形变对 Dice 增益很小。</a:t>
+              <a:t>骨 Dice 用 HU&gt;200、独立于 LNCC，因此大幅提升说明是真实结构对齐而非过拟合。刚体已达主要精度；形变 +0.043 Dice、Jacobian 全正无折叠，仅作小幅细化。</a:t>
             </a:r>
           </a:p>
         </p:txBody>
@@ -1071,7 +1071,7 @@
           <a:lstStyle/>
           <a:p>
             <a:r>
-              <a:t>做了什么 / 验证了什么 / 局限与展望。可拓展：散射与 HU 定量校正、多病例评估、加入标志点 TRE 或轮廓 Dice、学习式配准网络。</a:t>
+              <a:t>做了什么 / 验证了什么 / 局限与展望。受网格分辨率限制，本结果在 3mm 各向同性网格上计算（CPU 单线程，1.5mm 全分辨率刚体单次即需 1 小时以上）；更细网格可进一步提升锐度与刚体精度。可拓展：散射/HU 定量校正、多病例评估、标志点 TRE 或轮廓 Dice、学习式配准网络。</a:t>
             </a:r>
           </a:p>
         </p:txBody>
@@ -4079,7 +4079,7 @@
       <p:grpSpPr/>
       <p:pic>
         <p:nvPicPr>
-          <p:cNvPr id="2" name="Picture 1" descr="checkerboard.png"/>
+          <p:cNvPr id="2" name="Picture 1" descr="checkerboard.png.cover.png"/>
           <p:cNvPicPr>
             <a:picLocks noChangeAspect="1"/>
           </p:cNvPicPr>
@@ -4093,8 +4093,8 @@
         </p:blipFill>
         <p:spPr>
           <a:xfrm>
-            <a:off x="7612972" y="0"/>
-            <a:ext cx="4525095" cy="6858000"/>
+            <a:off x="0" y="0"/>
+            <a:ext cx="4572000" cy="6858000"/>
           </a:xfrm>
           <a:prstGeom prst="rect">
             <a:avLst/>
@@ -4109,18 +4109,19 @@
         </p:nvSpPr>
         <p:spPr>
           <a:xfrm>
-            <a:off x="0" y="0"/>
-            <a:ext cx="7589520" cy="6858000"/>
+            <a:off x="4572000" y="0"/>
+            <a:ext cx="54864" cy="6858000"/>
           </a:xfrm>
           <a:prstGeom prst="rect">
             <a:avLst/>
           </a:prstGeom>
           <a:solidFill>
-            <a:srgbClr val="FFFFFF"/>
+            <a:srgbClr val="1F3B6E"/>
           </a:solidFill>
           <a:ln>
             <a:noFill/>
           </a:ln>
+          <a:effectLst/>
         </p:spPr>
         <p:style>
           <a:lnRef idx="1">
@@ -4146,14 +4147,112 @@
       </p:sp>
       <p:sp>
         <p:nvSpPr>
-          <p:cNvPr id="4" name="Rectangle 3"/>
+          <p:cNvPr id="4" name="TextBox 3"/>
+          <p:cNvSpPr txBox="1"/>
+          <p:nvPr/>
+        </p:nvSpPr>
+        <p:spPr>
+          <a:xfrm>
+            <a:off x="5120640" y="2148840"/>
+            <a:ext cx="6583680" cy="2926080"/>
+          </a:xfrm>
+          <a:prstGeom prst="rect">
+            <a:avLst/>
+          </a:prstGeom>
+          <a:noFill/>
+        </p:spPr>
+        <p:txBody>
+          <a:bodyPr wrap="square">
+            <a:spAutoFit/>
+          </a:bodyPr>
+          <a:lstStyle/>
+          <a:p>
+            <a:r>
+              <a:rPr sz="3600" b="1">
+                <a:solidFill>
+                  <a:srgbClr val="1F3B6E"/>
+                </a:solidFill>
+                <a:latin typeface="Microsoft YaHei"/>
+                <a:ea typeface="Microsoft YaHei"/>
+              </a:rPr>
+              <a:t>CBCT → pCT 医学影像配准</a:t>
+            </a:r>
+          </a:p>
+          <a:p>
+            <a:r>
+              <a:rPr sz="1800" b="0">
+                <a:solidFill>
+                  <a:srgbClr val="6B7280"/>
+                </a:solidFill>
+                <a:latin typeface="Microsoft YaHei"/>
+                <a:ea typeface="Microsoft YaHei"/>
+              </a:rPr>
+              <a:t>刚体配准为主 · 受控微分同胚形变细化</a:t>
+            </a:r>
+          </a:p>
+          <a:p>
+            <a:pPr>
+              <a:spcBef>
+                <a:spcPts val="400"/>
+              </a:spcBef>
+            </a:pPr>
+            <a:r>
+              <a:rPr sz="1400" b="0">
+                <a:solidFill>
+                  <a:srgbClr val="1F2937"/>
+                </a:solidFill>
+                <a:latin typeface="Microsoft YaHei"/>
+                <a:ea typeface="Microsoft YaHei"/>
+              </a:rPr>
+              <a:t>病例 M24557</a:t>
+            </a:r>
+          </a:p>
+          <a:p>
+            <a:pPr>
+              <a:spcBef>
+                <a:spcPts val="400"/>
+              </a:spcBef>
+            </a:pPr>
+            <a:r>
+              <a:rPr sz="1400" b="0">
+                <a:solidFill>
+                  <a:srgbClr val="1F2937"/>
+                </a:solidFill>
+                <a:latin typeface="Microsoft YaHei"/>
+                <a:ea typeface="Microsoft YaHei"/>
+              </a:rPr>
+              <a:t>汇报人：杨同学</a:t>
+            </a:r>
+          </a:p>
+          <a:p>
+            <a:pPr>
+              <a:spcBef>
+                <a:spcPts val="400"/>
+              </a:spcBef>
+            </a:pPr>
+            <a:r>
+              <a:rPr sz="1400" b="0">
+                <a:solidFill>
+                  <a:srgbClr val="1F2937"/>
+                </a:solidFill>
+                <a:latin typeface="Microsoft YaHei"/>
+                <a:ea typeface="Microsoft YaHei"/>
+              </a:rPr>
+              <a:t>2026-06-18</a:t>
+            </a:r>
+          </a:p>
+        </p:txBody>
+      </p:sp>
+      <p:sp>
+        <p:nvSpPr>
+          <p:cNvPr id="5" name="Rectangle 4"/>
           <p:cNvSpPr/>
           <p:nvPr/>
         </p:nvSpPr>
         <p:spPr>
           <a:xfrm>
-            <a:off x="822960" y="2286000"/>
-            <a:ext cx="109728" cy="2011680"/>
+            <a:off x="5138928" y="3383280"/>
+            <a:ext cx="2011680" cy="36576"/>
           </a:xfrm>
           <a:prstGeom prst="rect">
             <a:avLst/>
@@ -4164,6 +4263,7 @@
           <a:ln>
             <a:noFill/>
           </a:ln>
+          <a:effectLst/>
         </p:spPr>
         <p:style>
           <a:lnRef idx="1">
@@ -4184,77 +4284,6 @@
           <a:lstStyle/>
           <a:p>
             <a:pPr algn="ctr"/>
-          </a:p>
-        </p:txBody>
-      </p:sp>
-      <p:sp>
-        <p:nvSpPr>
-          <p:cNvPr id="5" name="TextBox 4"/>
-          <p:cNvSpPr txBox="1"/>
-          <p:nvPr/>
-        </p:nvSpPr>
-        <p:spPr>
-          <a:xfrm>
-            <a:off x="1097280" y="2286000"/>
-            <a:ext cx="6126480" cy="2377440"/>
-          </a:xfrm>
-          <a:prstGeom prst="rect">
-            <a:avLst/>
-          </a:prstGeom>
-          <a:noFill/>
-        </p:spPr>
-        <p:txBody>
-          <a:bodyPr wrap="square">
-            <a:spAutoFit/>
-          </a:bodyPr>
-          <a:lstStyle/>
-          <a:p>
-            <a:r>
-              <a:rPr sz="3800" b="1">
-                <a:solidFill>
-                  <a:srgbClr val="1F3B6E"/>
-                </a:solidFill>
-                <a:latin typeface="Microsoft YaHei"/>
-                <a:ea typeface="Microsoft YaHei"/>
-              </a:rPr>
-              <a:t>CBCT → pCT 医学影像配准</a:t>
-            </a:r>
-          </a:p>
-          <a:p>
-            <a:r>
-              <a:rPr sz="1700" b="0">
-                <a:solidFill>
-                  <a:srgbClr val="5A5A5A"/>
-                </a:solidFill>
-                <a:latin typeface="Microsoft YaHei"/>
-                <a:ea typeface="Microsoft YaHei"/>
-              </a:rPr>
-              <a:t>锥束CT 与 计划CT 的刚体配准（含可选形变细化）</a:t>
-            </a:r>
-          </a:p>
-          <a:p>
-            <a:r>
-              <a:rPr sz="1500" b="0">
-                <a:solidFill>
-                  <a:srgbClr val="222222"/>
-                </a:solidFill>
-                <a:latin typeface="Microsoft YaHei"/>
-                <a:ea typeface="Microsoft YaHei"/>
-              </a:rPr>
-              <a:t>病例 M24557</a:t>
-            </a:r>
-          </a:p>
-          <a:p>
-            <a:r>
-              <a:rPr sz="1400" b="0">
-                <a:solidFill>
-                  <a:srgbClr val="5A5A5A"/>
-                </a:solidFill>
-                <a:latin typeface="Microsoft YaHei"/>
-                <a:ea typeface="Microsoft YaHei"/>
-              </a:rPr>
-              <a:t>汇报人：杨同学      2026-06-18</a:t>
-            </a:r>
           </a:p>
         </p:txBody>
       </p:sp>
@@ -4285,7 +4314,7 @@
         <p:spPr>
           <a:xfrm>
             <a:off x="0" y="0"/>
-            <a:ext cx="12191695" cy="201168"/>
+            <a:ext cx="12191695" cy="109728"/>
           </a:xfrm>
           <a:prstGeom prst="rect">
             <a:avLst/>
@@ -4296,6 +4325,7 @@
           <a:ln>
             <a:noFill/>
           </a:ln>
+          <a:effectLst/>
         </p:spPr>
         <p:style>
           <a:lnRef idx="1">
@@ -4327,8 +4357,8 @@
         </p:nvSpPr>
         <p:spPr>
           <a:xfrm>
-            <a:off x="502920" y="384048"/>
-            <a:ext cx="11155680" cy="822960"/>
+            <a:off x="640080" y="310896"/>
+            <a:ext cx="10911535" cy="777240"/>
           </a:xfrm>
           <a:prstGeom prst="rect">
             <a:avLst/>
@@ -4342,7 +4372,7 @@
           <a:lstStyle/>
           <a:p>
             <a:r>
-              <a:rPr sz="2800" b="1">
+              <a:rPr sz="3000" b="1">
                 <a:solidFill>
                   <a:srgbClr val="1F3B6E"/>
                 </a:solidFill>
@@ -4362,8 +4392,8 @@
         </p:nvSpPr>
         <p:spPr>
           <a:xfrm>
-            <a:off x="502920" y="6419088"/>
-            <a:ext cx="5486400" cy="365760"/>
+            <a:off x="640080" y="6437376"/>
+            <a:ext cx="5486400" cy="329184"/>
           </a:xfrm>
           <a:prstGeom prst="rect">
             <a:avLst/>
@@ -4377,14 +4407,14 @@
           <a:lstStyle/>
           <a:p>
             <a:r>
-              <a:rPr sz="1000" b="0">
+              <a:rPr sz="1100" b="0">
                 <a:solidFill>
-                  <a:srgbClr val="5A5A5A"/>
+                  <a:srgbClr val="6B7280"/>
                 </a:solidFill>
                 <a:latin typeface="Microsoft YaHei"/>
                 <a:ea typeface="Microsoft YaHei"/>
               </a:rPr>
-              <a:t>CBCT → pCT 配准 · 病例 M24557</a:t>
+              <a:t>病例 M24557</a:t>
             </a:r>
           </a:p>
         </p:txBody>
@@ -4397,8 +4427,8 @@
         </p:nvSpPr>
         <p:spPr>
           <a:xfrm>
-            <a:off x="10789920" y="6419088"/>
-            <a:ext cx="914400" cy="365760"/>
+            <a:off x="10637215" y="6437376"/>
+            <a:ext cx="914400" cy="329184"/>
           </a:xfrm>
           <a:prstGeom prst="rect">
             <a:avLst/>
@@ -4413,9 +4443,9 @@
           <a:p>
             <a:pPr algn="r"/>
             <a:r>
-              <a:rPr sz="1000" b="0">
+              <a:rPr sz="1100" b="0">
                 <a:solidFill>
-                  <a:srgbClr val="5A5A5A"/>
+                  <a:srgbClr val="6B7280"/>
                 </a:solidFill>
                 <a:latin typeface="Microsoft YaHei"/>
                 <a:ea typeface="Microsoft YaHei"/>
@@ -4433,8 +4463,8 @@
         </p:nvSpPr>
         <p:spPr>
           <a:xfrm>
-            <a:off x="640080" y="1554480"/>
-            <a:ext cx="10972800" cy="4389120"/>
+            <a:off x="640080" y="1645920"/>
+            <a:ext cx="10972800" cy="4206240"/>
           </a:xfrm>
           <a:prstGeom prst="rect">
             <a:avLst/>
@@ -4448,6 +4478,9 @@
           <a:lstStyle/>
           <a:p>
             <a:pPr>
+              <a:lnSpc>
+                <a:spcPct val="120000"/>
+              </a:lnSpc>
               <a:spcAft>
                 <a:spcPts val="1000"/>
               </a:spcAft>
@@ -4455,16 +4488,19 @@
             <a:r>
               <a:rPr sz="1800" b="0">
                 <a:solidFill>
-                  <a:srgbClr val="222222"/>
+                  <a:srgbClr val="1F2937"/>
                 </a:solidFill>
                 <a:latin typeface="Microsoft YaHei"/>
                 <a:ea typeface="Microsoft YaHei"/>
               </a:rPr>
-              <a:t>▪ 纯 PyTorch 实现 CBCT→pCT 刚体配准，导出物理摆位修正</a:t>
+              <a:t>▪  刚体为主结果，形变为受控的小幅细化（Jacobian 全正、无折叠）</a:t>
             </a:r>
           </a:p>
           <a:p>
             <a:pPr>
+              <a:lnSpc>
+                <a:spcPct val="120000"/>
+              </a:lnSpc>
               <a:spcAft>
                 <a:spcPts val="1000"/>
               </a:spcAft>
@@ -4472,16 +4508,19 @@
             <a:r>
               <a:rPr sz="1800" b="0">
                 <a:solidFill>
-                  <a:srgbClr val="222222"/>
+                  <a:srgbClr val="1F2937"/>
                 </a:solidFill>
                 <a:latin typeface="Microsoft YaHei"/>
                 <a:ea typeface="Microsoft YaHei"/>
               </a:rPr>
-              <a:t>▪ 针对 CBCT 物理特性：稳健初始化 / LNCC / FOV 掩膜 / 真刚体</a:t>
+              <a:t>▪  针对 CBCT 物理特性：稳健初始化 / LNCC / FOV 掩膜 / 真刚体</a:t>
             </a:r>
           </a:p>
           <a:p>
             <a:pPr>
+              <a:lnSpc>
+                <a:spcPct val="120000"/>
+              </a:lnSpc>
               <a:spcAft>
                 <a:spcPts val="1000"/>
               </a:spcAft>
@@ -4489,16 +4528,19 @@
             <a:r>
               <a:rPr sz="1800" b="0">
                 <a:solidFill>
-                  <a:srgbClr val="222222"/>
+                  <a:srgbClr val="1F2937"/>
                 </a:solidFill>
                 <a:latin typeface="Microsoft YaHei"/>
                 <a:ea typeface="Microsoft YaHei"/>
               </a:rPr>
-              <a:t>▪ 独立骨 Dice 验证（0.128→0.832）；形变仅小幅细化、无折叠</a:t>
+              <a:t>▪  独立骨 Dice 验证：0.128 → 0.832（仅刚体）</a:t>
             </a:r>
           </a:p>
           <a:p>
             <a:pPr>
+              <a:lnSpc>
+                <a:spcPct val="120000"/>
+              </a:lnSpc>
               <a:spcAft>
                 <a:spcPts val="1000"/>
               </a:spcAft>
@@ -4506,12 +4548,12 @@
             <a:r>
               <a:rPr sz="1800" b="0">
                 <a:solidFill>
-                  <a:srgbClr val="222222"/>
+                  <a:srgbClr val="1F2937"/>
                 </a:solidFill>
                 <a:latin typeface="Microsoft YaHei"/>
                 <a:ea typeface="Microsoft YaHei"/>
               </a:rPr>
-              <a:t>▪ 局限：未做散射/HU 校正、单病例、未做标志点 TRE</a:t>
+              <a:t>▪  局限：3mm 网格、未做散射/HU 校正、单病例、未做标志点 TRE</a:t>
             </a:r>
           </a:p>
         </p:txBody>
@@ -4543,7 +4585,7 @@
         <p:spPr>
           <a:xfrm>
             <a:off x="0" y="0"/>
-            <a:ext cx="12191695" cy="201168"/>
+            <a:ext cx="12191695" cy="109728"/>
           </a:xfrm>
           <a:prstGeom prst="rect">
             <a:avLst/>
@@ -4554,6 +4596,7 @@
           <a:ln>
             <a:noFill/>
           </a:ln>
+          <a:effectLst/>
         </p:spPr>
         <p:style>
           <a:lnRef idx="1">
@@ -4585,8 +4628,8 @@
         </p:nvSpPr>
         <p:spPr>
           <a:xfrm>
-            <a:off x="502920" y="384048"/>
-            <a:ext cx="11155680" cy="822960"/>
+            <a:off x="640080" y="310896"/>
+            <a:ext cx="10911535" cy="777240"/>
           </a:xfrm>
           <a:prstGeom prst="rect">
             <a:avLst/>
@@ -4600,7 +4643,7 @@
           <a:lstStyle/>
           <a:p>
             <a:r>
-              <a:rPr sz="2800" b="1">
+              <a:rPr sz="3000" b="1">
                 <a:solidFill>
                   <a:srgbClr val="1F3B6E"/>
                 </a:solidFill>
@@ -4620,8 +4663,8 @@
         </p:nvSpPr>
         <p:spPr>
           <a:xfrm>
-            <a:off x="502920" y="6419088"/>
-            <a:ext cx="5486400" cy="365760"/>
+            <a:off x="640080" y="6437376"/>
+            <a:ext cx="5486400" cy="329184"/>
           </a:xfrm>
           <a:prstGeom prst="rect">
             <a:avLst/>
@@ -4635,14 +4678,14 @@
           <a:lstStyle/>
           <a:p>
             <a:r>
-              <a:rPr sz="1000" b="0">
+              <a:rPr sz="1100" b="0">
                 <a:solidFill>
-                  <a:srgbClr val="5A5A5A"/>
+                  <a:srgbClr val="6B7280"/>
                 </a:solidFill>
                 <a:latin typeface="Microsoft YaHei"/>
                 <a:ea typeface="Microsoft YaHei"/>
               </a:rPr>
-              <a:t>CBCT → pCT 配准 · 病例 M24557</a:t>
+              <a:t>病例 M24557</a:t>
             </a:r>
           </a:p>
         </p:txBody>
@@ -4655,8 +4698,8 @@
         </p:nvSpPr>
         <p:spPr>
           <a:xfrm>
-            <a:off x="10789920" y="6419088"/>
-            <a:ext cx="914400" cy="365760"/>
+            <a:off x="10637215" y="6437376"/>
+            <a:ext cx="914400" cy="329184"/>
           </a:xfrm>
           <a:prstGeom prst="rect">
             <a:avLst/>
@@ -4671,9 +4714,9 @@
           <a:p>
             <a:pPr algn="r"/>
             <a:r>
-              <a:rPr sz="1000" b="0">
+              <a:rPr sz="1100" b="0">
                 <a:solidFill>
-                  <a:srgbClr val="5A5A5A"/>
+                  <a:srgbClr val="6B7280"/>
                 </a:solidFill>
                 <a:latin typeface="Microsoft YaHei"/>
                 <a:ea typeface="Microsoft YaHei"/>
@@ -4699,36 +4742,77 @@
         </p:blipFill>
         <p:spPr>
           <a:xfrm>
-            <a:off x="457200" y="1476383"/>
-            <a:ext cx="6583680" cy="4453873"/>
+            <a:off x="640080" y="1370152"/>
+            <a:ext cx="6492240" cy="4392014"/>
           </a:xfrm>
           <a:prstGeom prst="rect">
             <a:avLst/>
           </a:prstGeom>
+          <a:ln w="9525">
+            <a:solidFill>
+              <a:srgbClr val="E5E7EB"/>
+            </a:solidFill>
+          </a:ln>
         </p:spPr>
       </p:pic>
+      <p:sp>
+        <p:nvSpPr>
+          <p:cNvPr id="7" name="TextBox 6"/>
+          <p:cNvSpPr txBox="1"/>
+          <p:nvPr/>
+        </p:nvSpPr>
+        <p:spPr>
+          <a:xfrm>
+            <a:off x="640080" y="5870448"/>
+            <a:ext cx="6492240" cy="310896"/>
+          </a:xfrm>
+          <a:prstGeom prst="rect">
+            <a:avLst/>
+          </a:prstGeom>
+          <a:noFill/>
+        </p:spPr>
+        <p:txBody>
+          <a:bodyPr wrap="square">
+            <a:spAutoFit/>
+          </a:bodyPr>
+          <a:lstStyle/>
+          <a:p>
+            <a:pPr algn="ctr"/>
+            <a:r>
+              <a:rPr sz="1300" b="0">
+                <a:solidFill>
+                  <a:srgbClr val="6B7280"/>
+                </a:solidFill>
+                <a:latin typeface="Microsoft YaHei"/>
+                <a:ea typeface="Microsoft YaHei"/>
+              </a:rPr>
+              <a:t>CBCT / pCT 各取 轴/冠/矢 三视图（统一窗位）</a:t>
+            </a:r>
+          </a:p>
+        </p:txBody>
+      </p:sp>
       <p:graphicFrame>
         <p:nvGraphicFramePr>
-          <p:cNvPr id="7" name="Table 6"/>
+          <p:cNvPr id="8" name="Table 7"/>
           <p:cNvGraphicFramePr>
             <a:graphicFrameLocks noGrp="1"/>
           </p:cNvGraphicFramePr>
           <p:nvPr/>
         </p:nvGraphicFramePr>
         <p:xfrm>
-          <a:off x="7223760" y="1554480"/>
-          <a:ext cx="4572000" cy="2011680"/>
+          <a:off x="7406640" y="1417320"/>
+          <a:ext cx="4114800" cy="2011680"/>
         </p:xfrm>
         <a:graphic>
           <a:graphicData uri="http://schemas.openxmlformats.org/drawingml/2006/table">
             <a:tbl>
-              <a:tblPr firstRow="1" bandRow="1">
-                <a:tableStyleId>{5C22544A-7EE6-4342-B048-85BDC9FD1C3A}</a:tableStyleId>
+              <a:tblPr firstRow="0" bandRow="0">
+                <a:tableStyleId>{2D5ABB26-0587-4C30-8999-92F81FD0307C}</a:tableStyleId>
               </a:tblPr>
               <a:tblGrid>
-                <a:gridCol w="1188720"/>
-                <a:gridCol w="1737360"/>
-                <a:gridCol w="1645920"/>
+                <a:gridCol w="1097280"/>
+                <a:gridCol w="1554480"/>
+                <a:gridCol w="1463040"/>
               </a:tblGrid>
               <a:tr h="402336">
                 <a:tc>
@@ -4737,7 +4821,7 @@
                     <a:lstStyle/>
                     <a:p>
                       <a:r>
-                        <a:rPr sz="1300" b="1">
+                        <a:rPr sz="1500" b="1">
                           <a:solidFill>
                             <a:srgbClr val="FFFFFF"/>
                           </a:solidFill>
@@ -4748,7 +4832,7 @@
                       </a:r>
                     </a:p>
                   </a:txBody>
-                  <a:tcPr anchor="ctr" marT="25400" marB="25400">
+                  <a:tcPr anchor="ctr" marL="101600" marR="101600" marT="38100" marB="38100">
                     <a:solidFill>
                       <a:srgbClr val="1F3B6E"/>
                     </a:solidFill>
@@ -4760,7 +4844,7 @@
                     <a:lstStyle/>
                     <a:p>
                       <a:r>
-                        <a:rPr sz="1300" b="1">
+                        <a:rPr sz="1500" b="1">
                           <a:solidFill>
                             <a:srgbClr val="FFFFFF"/>
                           </a:solidFill>
@@ -4771,7 +4855,7 @@
                       </a:r>
                     </a:p>
                   </a:txBody>
-                  <a:tcPr anchor="ctr" marT="25400" marB="25400">
+                  <a:tcPr anchor="ctr" marL="101600" marR="101600" marT="38100" marB="38100">
                     <a:solidFill>
                       <a:srgbClr val="1F3B6E"/>
                     </a:solidFill>
@@ -4783,7 +4867,7 @@
                     <a:lstStyle/>
                     <a:p>
                       <a:r>
-                        <a:rPr sz="1300" b="1">
+                        <a:rPr sz="1500" b="1">
                           <a:solidFill>
                             <a:srgbClr val="FFFFFF"/>
                           </a:solidFill>
@@ -4794,7 +4878,7 @@
                       </a:r>
                     </a:p>
                   </a:txBody>
-                  <a:tcPr anchor="ctr" marT="25400" marB="25400">
+                  <a:tcPr anchor="ctr" marL="101600" marR="101600" marT="38100" marB="38100">
                     <a:solidFill>
                       <a:srgbClr val="1F3B6E"/>
                     </a:solidFill>
@@ -4808,9 +4892,9 @@
                     <a:lstStyle/>
                     <a:p>
                       <a:r>
-                        <a:rPr sz="1200" b="0">
+                        <a:rPr sz="1500" b="0">
                           <a:solidFill>
-                            <a:srgbClr val="222222"/>
+                            <a:srgbClr val="1F2937"/>
                           </a:solidFill>
                           <a:latin typeface="Microsoft YaHei"/>
                           <a:ea typeface="Microsoft YaHei"/>
@@ -4819,7 +4903,7 @@
                       </a:r>
                     </a:p>
                   </a:txBody>
-                  <a:tcPr anchor="ctr" marT="25400" marB="25400">
+                  <a:tcPr anchor="ctr" marL="101600" marR="101600" marT="38100" marB="38100">
                     <a:solidFill>
                       <a:srgbClr val="FFFFFF"/>
                     </a:solidFill>
@@ -4831,9 +4915,9 @@
                     <a:lstStyle/>
                     <a:p>
                       <a:r>
-                        <a:rPr sz="1200" b="0">
+                        <a:rPr sz="1500" b="0">
                           <a:solidFill>
-                            <a:srgbClr val="222222"/>
+                            <a:srgbClr val="1F2937"/>
                           </a:solidFill>
                           <a:latin typeface="Microsoft YaHei"/>
                           <a:ea typeface="Microsoft YaHei"/>
@@ -4842,7 +4926,7 @@
                       </a:r>
                     </a:p>
                   </a:txBody>
-                  <a:tcPr anchor="ctr" marT="25400" marB="25400">
+                  <a:tcPr anchor="ctr" marL="101600" marR="101600" marT="38100" marB="38100">
                     <a:solidFill>
                       <a:srgbClr val="FFFFFF"/>
                     </a:solidFill>
@@ -4854,9 +4938,9 @@
                     <a:lstStyle/>
                     <a:p>
                       <a:r>
-                        <a:rPr sz="1200" b="0">
+                        <a:rPr sz="1500" b="0">
                           <a:solidFill>
-                            <a:srgbClr val="222222"/>
+                            <a:srgbClr val="1F2937"/>
                           </a:solidFill>
                           <a:latin typeface="Microsoft YaHei"/>
                           <a:ea typeface="Microsoft YaHei"/>
@@ -4865,7 +4949,7 @@
                       </a:r>
                     </a:p>
                   </a:txBody>
-                  <a:tcPr anchor="ctr" marT="25400" marB="25400">
+                  <a:tcPr anchor="ctr" marL="101600" marR="101600" marT="38100" marB="38100">
                     <a:solidFill>
                       <a:srgbClr val="FFFFFF"/>
                     </a:solidFill>
@@ -4879,9 +4963,9 @@
                     <a:lstStyle/>
                     <a:p>
                       <a:r>
-                        <a:rPr sz="1200" b="0">
+                        <a:rPr sz="1500" b="0">
                           <a:solidFill>
-                            <a:srgbClr val="222222"/>
+                            <a:srgbClr val="1F2937"/>
                           </a:solidFill>
                           <a:latin typeface="Microsoft YaHei"/>
                           <a:ea typeface="Microsoft YaHei"/>
@@ -4890,9 +4974,9 @@
                       </a:r>
                     </a:p>
                   </a:txBody>
-                  <a:tcPr anchor="ctr" marT="25400" marB="25400">
+                  <a:tcPr anchor="ctr" marL="101600" marR="101600" marT="38100" marB="38100">
                     <a:solidFill>
-                      <a:srgbClr val="E9EEF6"/>
+                      <a:srgbClr val="F3F6FB"/>
                     </a:solidFill>
                   </a:tcPr>
                 </a:tc>
@@ -4902,9 +4986,9 @@
                     <a:lstStyle/>
                     <a:p>
                       <a:r>
-                        <a:rPr sz="1200" b="0">
+                        <a:rPr sz="1500" b="0">
                           <a:solidFill>
-                            <a:srgbClr val="222222"/>
+                            <a:srgbClr val="1F2937"/>
                           </a:solidFill>
                           <a:latin typeface="Microsoft YaHei"/>
                           <a:ea typeface="Microsoft YaHei"/>
@@ -4913,9 +4997,9 @@
                       </a:r>
                     </a:p>
                   </a:txBody>
-                  <a:tcPr anchor="ctr" marT="25400" marB="25400">
+                  <a:tcPr anchor="ctr" marL="101600" marR="101600" marT="38100" marB="38100">
                     <a:solidFill>
-                      <a:srgbClr val="E9EEF6"/>
+                      <a:srgbClr val="F3F6FB"/>
                     </a:solidFill>
                   </a:tcPr>
                 </a:tc>
@@ -4925,9 +5009,9 @@
                     <a:lstStyle/>
                     <a:p>
                       <a:r>
-                        <a:rPr sz="1200" b="0">
+                        <a:rPr sz="1500" b="0">
                           <a:solidFill>
-                            <a:srgbClr val="222222"/>
+                            <a:srgbClr val="1F2937"/>
                           </a:solidFill>
                           <a:latin typeface="Microsoft YaHei"/>
                           <a:ea typeface="Microsoft YaHei"/>
@@ -4936,9 +5020,9 @@
                       </a:r>
                     </a:p>
                   </a:txBody>
-                  <a:tcPr anchor="ctr" marT="25400" marB="25400">
+                  <a:tcPr anchor="ctr" marL="101600" marR="101600" marT="38100" marB="38100">
                     <a:solidFill>
-                      <a:srgbClr val="E9EEF6"/>
+                      <a:srgbClr val="F3F6FB"/>
                     </a:solidFill>
                   </a:tcPr>
                 </a:tc>
@@ -4950,18 +5034,18 @@
                     <a:lstStyle/>
                     <a:p>
                       <a:r>
-                        <a:rPr sz="1200" b="0">
+                        <a:rPr sz="1500" b="0">
                           <a:solidFill>
-                            <a:srgbClr val="222222"/>
+                            <a:srgbClr val="1F2937"/>
                           </a:solidFill>
                           <a:latin typeface="Microsoft YaHei"/>
                           <a:ea typeface="Microsoft YaHei"/>
                         </a:rPr>
-                        <a:t>体素(mm)</a:t>
+                        <a:t>体素 mm</a:t>
                       </a:r>
                     </a:p>
                   </a:txBody>
-                  <a:tcPr anchor="ctr" marT="25400" marB="25400">
+                  <a:tcPr anchor="ctr" marL="101600" marR="101600" marT="38100" marB="38100">
                     <a:solidFill>
                       <a:srgbClr val="FFFFFF"/>
                     </a:solidFill>
@@ -4973,9 +5057,9 @@
                     <a:lstStyle/>
                     <a:p>
                       <a:r>
-                        <a:rPr sz="1200" b="0">
+                        <a:rPr sz="1500" b="0">
                           <a:solidFill>
-                            <a:srgbClr val="222222"/>
+                            <a:srgbClr val="1F2937"/>
                           </a:solidFill>
                           <a:latin typeface="Microsoft YaHei"/>
                           <a:ea typeface="Microsoft YaHei"/>
@@ -4984,7 +5068,7 @@
                       </a:r>
                     </a:p>
                   </a:txBody>
-                  <a:tcPr anchor="ctr" marT="25400" marB="25400">
+                  <a:tcPr anchor="ctr" marL="101600" marR="101600" marT="38100" marB="38100">
                     <a:solidFill>
                       <a:srgbClr val="FFFFFF"/>
                     </a:solidFill>
@@ -4996,9 +5080,9 @@
                     <a:lstStyle/>
                     <a:p>
                       <a:r>
-                        <a:rPr sz="1200" b="0">
+                        <a:rPr sz="1500" b="0">
                           <a:solidFill>
-                            <a:srgbClr val="222222"/>
+                            <a:srgbClr val="1F2937"/>
                           </a:solidFill>
                           <a:latin typeface="Microsoft YaHei"/>
                           <a:ea typeface="Microsoft YaHei"/>
@@ -5007,7 +5091,7 @@
                       </a:r>
                     </a:p>
                   </a:txBody>
-                  <a:tcPr anchor="ctr" marT="25400" marB="25400">
+                  <a:tcPr anchor="ctr" marL="101600" marR="101600" marT="38100" marB="38100">
                     <a:solidFill>
                       <a:srgbClr val="FFFFFF"/>
                     </a:solidFill>
@@ -5021,9 +5105,9 @@
                     <a:lstStyle/>
                     <a:p>
                       <a:r>
-                        <a:rPr sz="1200" b="0">
+                        <a:rPr sz="1500" b="0">
                           <a:solidFill>
-                            <a:srgbClr val="222222"/>
+                            <a:srgbClr val="1F2937"/>
                           </a:solidFill>
                           <a:latin typeface="Microsoft YaHei"/>
                           <a:ea typeface="Microsoft YaHei"/>
@@ -5032,9 +5116,9 @@
                       </a:r>
                     </a:p>
                   </a:txBody>
-                  <a:tcPr anchor="ctr" marT="25400" marB="25400">
+                  <a:tcPr anchor="ctr" marL="101600" marR="101600" marT="38100" marB="38100">
                     <a:solidFill>
-                      <a:srgbClr val="E9EEF6"/>
+                      <a:srgbClr val="F3F6FB"/>
                     </a:solidFill>
                   </a:tcPr>
                 </a:tc>
@@ -5044,20 +5128,20 @@
                     <a:lstStyle/>
                     <a:p>
                       <a:r>
-                        <a:rPr sz="1200" b="0">
+                        <a:rPr sz="1500" b="0">
                           <a:solidFill>
-                            <a:srgbClr val="222222"/>
+                            <a:srgbClr val="1F2937"/>
                           </a:solidFill>
                           <a:latin typeface="Microsoft YaHei"/>
                           <a:ea typeface="Microsoft YaHei"/>
                         </a:rPr>
-                        <a:t>床坐标 z≈-800</a:t>
+                        <a:t>床 z≈-800</a:t>
                       </a:r>
                     </a:p>
                   </a:txBody>
-                  <a:tcPr anchor="ctr" marT="25400" marB="25400">
+                  <a:tcPr anchor="ctr" marL="101600" marR="101600" marT="38100" marB="38100">
                     <a:solidFill>
-                      <a:srgbClr val="E9EEF6"/>
+                      <a:srgbClr val="F3F6FB"/>
                     </a:solidFill>
                   </a:tcPr>
                 </a:tc>
@@ -5067,9 +5151,9 @@
                     <a:lstStyle/>
                     <a:p>
                       <a:r>
-                        <a:rPr sz="1200" b="0">
+                        <a:rPr sz="1500" b="0">
                           <a:solidFill>
-                            <a:srgbClr val="222222"/>
+                            <a:srgbClr val="1F2937"/>
                           </a:solidFill>
                           <a:latin typeface="Microsoft YaHei"/>
                           <a:ea typeface="Microsoft YaHei"/>
@@ -5078,9 +5162,9 @@
                       </a:r>
                     </a:p>
                   </a:txBody>
-                  <a:tcPr anchor="ctr" marT="25400" marB="25400">
+                  <a:tcPr anchor="ctr" marL="101600" marR="101600" marT="38100" marB="38100">
                     <a:solidFill>
-                      <a:srgbClr val="E9EEF6"/>
+                      <a:srgbClr val="F3F6FB"/>
                     </a:solidFill>
                   </a:tcPr>
                 </a:tc>
@@ -5091,14 +5175,14 @@
       </p:graphicFrame>
       <p:sp>
         <p:nvSpPr>
-          <p:cNvPr id="8" name="TextBox 7"/>
+          <p:cNvPr id="9" name="TextBox 8"/>
           <p:cNvSpPr txBox="1"/>
           <p:nvPr/>
         </p:nvSpPr>
         <p:spPr>
           <a:xfrm>
-            <a:off x="7223760" y="3931920"/>
-            <a:ext cx="4572000" cy="2194560"/>
+            <a:off x="7406640" y="3794760"/>
+            <a:ext cx="4114800" cy="2194560"/>
           </a:xfrm>
           <a:prstGeom prst="rect">
             <a:avLst/>
@@ -5112,6 +5196,9 @@
           <a:lstStyle/>
           <a:p>
             <a:pPr>
+              <a:lnSpc>
+                <a:spcPct val="120000"/>
+              </a:lnSpc>
               <a:spcAft>
                 <a:spcPts val="1000"/>
               </a:spcAft>
@@ -5119,16 +5206,19 @@
             <a:r>
               <a:rPr sz="1800" b="0">
                 <a:solidFill>
-                  <a:srgbClr val="222222"/>
+                  <a:srgbClr val="1F2937"/>
                 </a:solidFill>
                 <a:latin typeface="Microsoft YaHei"/>
                 <a:ea typeface="Microsoft YaHei"/>
               </a:rPr>
-              <a:t>▪ 不同 Frame of Reference（坐标不重叠）</a:t>
+              <a:t>▪  不同 Frame of Reference（坐标不重叠）</a:t>
             </a:r>
           </a:p>
           <a:p>
             <a:pPr>
+              <a:lnSpc>
+                <a:spcPct val="120000"/>
+              </a:lnSpc>
               <a:spcAft>
                 <a:spcPts val="1000"/>
               </a:spcAft>
@@ -5136,16 +5226,19 @@
             <a:r>
               <a:rPr sz="1800" b="0">
                 <a:solidFill>
-                  <a:srgbClr val="222222"/>
+                  <a:srgbClr val="1F2937"/>
                 </a:solidFill>
                 <a:latin typeface="Microsoft YaHei"/>
                 <a:ea typeface="Microsoft YaHei"/>
               </a:rPr>
-              <a:t>▪ 灰度不一致（散射 / HU 标定差异）</a:t>
+              <a:t>▪  灰度不一致（散射 / HU 标定差异）</a:t>
             </a:r>
           </a:p>
           <a:p>
             <a:pPr>
+              <a:lnSpc>
+                <a:spcPct val="120000"/>
+              </a:lnSpc>
               <a:spcAft>
                 <a:spcPts val="1000"/>
               </a:spcAft>
@@ -5153,12 +5246,12 @@
             <a:r>
               <a:rPr sz="1800" b="0">
                 <a:solidFill>
-                  <a:srgbClr val="222222"/>
+                  <a:srgbClr val="1F2937"/>
                 </a:solidFill>
                 <a:latin typeface="Microsoft YaHei"/>
                 <a:ea typeface="Microsoft YaHei"/>
               </a:rPr>
-              <a:t>▪ 分辨率与 FOV 不同（CBCT 视野小）</a:t>
+              <a:t>▪  分辨率与 FOV 不同（CBCT 视野小）</a:t>
             </a:r>
           </a:p>
         </p:txBody>
@@ -5190,7 +5283,7 @@
         <p:spPr>
           <a:xfrm>
             <a:off x="0" y="0"/>
-            <a:ext cx="12191695" cy="201168"/>
+            <a:ext cx="12191695" cy="109728"/>
           </a:xfrm>
           <a:prstGeom prst="rect">
             <a:avLst/>
@@ -5201,6 +5294,7 @@
           <a:ln>
             <a:noFill/>
           </a:ln>
+          <a:effectLst/>
         </p:spPr>
         <p:style>
           <a:lnRef idx="1">
@@ -5232,8 +5326,8 @@
         </p:nvSpPr>
         <p:spPr>
           <a:xfrm>
-            <a:off x="502920" y="384048"/>
-            <a:ext cx="11155680" cy="822960"/>
+            <a:off x="640080" y="310896"/>
+            <a:ext cx="10911535" cy="777240"/>
           </a:xfrm>
           <a:prstGeom prst="rect">
             <a:avLst/>
@@ -5247,7 +5341,7 @@
           <a:lstStyle/>
           <a:p>
             <a:r>
-              <a:rPr sz="2800" b="1">
+              <a:rPr sz="3000" b="1">
                 <a:solidFill>
                   <a:srgbClr val="1F3B6E"/>
                 </a:solidFill>
@@ -5267,8 +5361,8 @@
         </p:nvSpPr>
         <p:spPr>
           <a:xfrm>
-            <a:off x="502920" y="6419088"/>
-            <a:ext cx="5486400" cy="365760"/>
+            <a:off x="640080" y="6437376"/>
+            <a:ext cx="5486400" cy="329184"/>
           </a:xfrm>
           <a:prstGeom prst="rect">
             <a:avLst/>
@@ -5282,14 +5376,14 @@
           <a:lstStyle/>
           <a:p>
             <a:r>
-              <a:rPr sz="1000" b="0">
+              <a:rPr sz="1100" b="0">
                 <a:solidFill>
-                  <a:srgbClr val="5A5A5A"/>
+                  <a:srgbClr val="6B7280"/>
                 </a:solidFill>
                 <a:latin typeface="Microsoft YaHei"/>
                 <a:ea typeface="Microsoft YaHei"/>
               </a:rPr>
-              <a:t>CBCT → pCT 配准 · 病例 M24557</a:t>
+              <a:t>病例 M24557</a:t>
             </a:r>
           </a:p>
         </p:txBody>
@@ -5302,8 +5396,8 @@
         </p:nvSpPr>
         <p:spPr>
           <a:xfrm>
-            <a:off x="10789920" y="6419088"/>
-            <a:ext cx="914400" cy="365760"/>
+            <a:off x="10637215" y="6437376"/>
+            <a:ext cx="914400" cy="329184"/>
           </a:xfrm>
           <a:prstGeom prst="rect">
             <a:avLst/>
@@ -5318,9 +5412,9 @@
           <a:p>
             <a:pPr algn="r"/>
             <a:r>
-              <a:rPr sz="1000" b="0">
+              <a:rPr sz="1100" b="0">
                 <a:solidFill>
-                  <a:srgbClr val="5A5A5A"/>
+                  <a:srgbClr val="6B7280"/>
                 </a:solidFill>
                 <a:latin typeface="Microsoft YaHei"/>
                 <a:ea typeface="Microsoft YaHei"/>
@@ -5346,12 +5440,17 @@
         </p:blipFill>
         <p:spPr>
           <a:xfrm>
-            <a:off x="1265845" y="1280160"/>
+            <a:off x="1311565" y="1234440"/>
             <a:ext cx="9629829" cy="2743200"/>
           </a:xfrm>
           <a:prstGeom prst="rect">
             <a:avLst/>
           </a:prstGeom>
+          <a:ln w="9525">
+            <a:solidFill>
+              <a:srgbClr val="E5E7EB"/>
+            </a:solidFill>
+          </a:ln>
         </p:spPr>
       </p:pic>
       <p:sp>
@@ -5362,8 +5461,8 @@
         </p:nvSpPr>
         <p:spPr>
           <a:xfrm>
-            <a:off x="640080" y="4206240"/>
-            <a:ext cx="10972800" cy="2194560"/>
+            <a:off x="640080" y="4297680"/>
+            <a:ext cx="10972800" cy="2011680"/>
           </a:xfrm>
           <a:prstGeom prst="rect">
             <a:avLst/>
@@ -5377,6 +5476,9 @@
           <a:lstStyle/>
           <a:p>
             <a:pPr>
+              <a:lnSpc>
+                <a:spcPct val="120000"/>
+              </a:lnSpc>
               <a:spcAft>
                 <a:spcPts val="1000"/>
               </a:spcAft>
@@ -5384,16 +5486,19 @@
             <a:r>
               <a:rPr sz="1800" b="0">
                 <a:solidFill>
-                  <a:srgbClr val="222222"/>
+                  <a:srgbClr val="1F2937"/>
                 </a:solidFill>
                 <a:latin typeface="Microsoft YaHei"/>
                 <a:ea typeface="Microsoft YaHei"/>
               </a:rPr>
-              <a:t>▪ 坐标系不同：z 相差约 800 mm，DICOM 头不能直接对齐</a:t>
+              <a:t>▪  坐标系不同：z 相差约 800 mm，DICOM 头不能直接对齐</a:t>
             </a:r>
           </a:p>
           <a:p>
             <a:pPr>
+              <a:lnSpc>
+                <a:spcPct val="120000"/>
+              </a:lnSpc>
               <a:spcAft>
                 <a:spcPts val="1000"/>
               </a:spcAft>
@@ -5401,16 +5506,19 @@
             <a:r>
               <a:rPr sz="1800" b="0">
                 <a:solidFill>
-                  <a:srgbClr val="222222"/>
+                  <a:srgbClr val="1F2937"/>
                 </a:solidFill>
                 <a:latin typeface="Microsoft YaHei"/>
                 <a:ea typeface="Microsoft YaHei"/>
               </a:rPr>
-              <a:t>▪ X 射线散射 → cupping 伪影，软组织 HU 塌陷</a:t>
+              <a:t>▪  散射 → cupping 伪影，软组织 HU 塌陷</a:t>
             </a:r>
           </a:p>
           <a:p>
             <a:pPr>
+              <a:lnSpc>
+                <a:spcPct val="120000"/>
+              </a:lnSpc>
               <a:spcAft>
                 <a:spcPts val="1000"/>
               </a:spcAft>
@@ -5418,16 +5526,19 @@
             <a:r>
               <a:rPr sz="1800" b="0">
                 <a:solidFill>
-                  <a:srgbClr val="222222"/>
+                  <a:srgbClr val="1F2937"/>
                 </a:solidFill>
                 <a:latin typeface="Microsoft YaHei"/>
                 <a:ea typeface="Microsoft YaHei"/>
               </a:rPr>
-              <a:t>▪ HU 标定不准：CBCT 与计划CT 不可直接比较</a:t>
+              <a:t>▪  HU 标定不准，CBCT 与计划CT 不可直接比较</a:t>
             </a:r>
           </a:p>
           <a:p>
             <a:pPr>
+              <a:lnSpc>
+                <a:spcPct val="120000"/>
+              </a:lnSpc>
               <a:spcAft>
                 <a:spcPts val="1000"/>
               </a:spcAft>
@@ -5435,12 +5546,12 @@
             <a:r>
               <a:rPr sz="1800" b="0">
                 <a:solidFill>
-                  <a:srgbClr val="222222"/>
+                  <a:srgbClr val="1F2937"/>
                 </a:solidFill>
                 <a:latin typeface="Microsoft YaHei"/>
                 <a:ea typeface="Microsoft YaHei"/>
               </a:rPr>
-              <a:t>▪ FOV 截断：CBCT 视野小、边缘缺失</a:t>
+              <a:t>▪  FOV 截断：CBCT 视野小、边缘缺失</a:t>
             </a:r>
           </a:p>
         </p:txBody>
@@ -5472,7 +5583,7 @@
         <p:spPr>
           <a:xfrm>
             <a:off x="0" y="0"/>
-            <a:ext cx="12191695" cy="201168"/>
+            <a:ext cx="12191695" cy="109728"/>
           </a:xfrm>
           <a:prstGeom prst="rect">
             <a:avLst/>
@@ -5483,6 +5594,7 @@
           <a:ln>
             <a:noFill/>
           </a:ln>
+          <a:effectLst/>
         </p:spPr>
         <p:style>
           <a:lnRef idx="1">
@@ -5514,8 +5626,8 @@
         </p:nvSpPr>
         <p:spPr>
           <a:xfrm>
-            <a:off x="502920" y="384048"/>
-            <a:ext cx="11155680" cy="822960"/>
+            <a:off x="640080" y="310896"/>
+            <a:ext cx="10911535" cy="777240"/>
           </a:xfrm>
           <a:prstGeom prst="rect">
             <a:avLst/>
@@ -5529,7 +5641,7 @@
           <a:lstStyle/>
           <a:p>
             <a:r>
-              <a:rPr sz="2800" b="1">
+              <a:rPr sz="3000" b="1">
                 <a:solidFill>
                   <a:srgbClr val="1F3B6E"/>
                 </a:solidFill>
@@ -5549,8 +5661,8 @@
         </p:nvSpPr>
         <p:spPr>
           <a:xfrm>
-            <a:off x="502920" y="6419088"/>
-            <a:ext cx="5486400" cy="365760"/>
+            <a:off x="640080" y="6437376"/>
+            <a:ext cx="5486400" cy="329184"/>
           </a:xfrm>
           <a:prstGeom prst="rect">
             <a:avLst/>
@@ -5564,14 +5676,14 @@
           <a:lstStyle/>
           <a:p>
             <a:r>
-              <a:rPr sz="1000" b="0">
+              <a:rPr sz="1100" b="0">
                 <a:solidFill>
-                  <a:srgbClr val="5A5A5A"/>
+                  <a:srgbClr val="6B7280"/>
                 </a:solidFill>
                 <a:latin typeface="Microsoft YaHei"/>
                 <a:ea typeface="Microsoft YaHei"/>
               </a:rPr>
-              <a:t>CBCT → pCT 配准 · 病例 M24557</a:t>
+              <a:t>病例 M24557</a:t>
             </a:r>
           </a:p>
         </p:txBody>
@@ -5584,8 +5696,8 @@
         </p:nvSpPr>
         <p:spPr>
           <a:xfrm>
-            <a:off x="10789920" y="6419088"/>
-            <a:ext cx="914400" cy="365760"/>
+            <a:off x="10637215" y="6437376"/>
+            <a:ext cx="914400" cy="329184"/>
           </a:xfrm>
           <a:prstGeom prst="rect">
             <a:avLst/>
@@ -5600,9 +5712,9 @@
           <a:p>
             <a:pPr algn="r"/>
             <a:r>
-              <a:rPr sz="1000" b="0">
+              <a:rPr sz="1100" b="0">
                 <a:solidFill>
-                  <a:srgbClr val="5A5A5A"/>
+                  <a:srgbClr val="6B7280"/>
                 </a:solidFill>
                 <a:latin typeface="Microsoft YaHei"/>
                 <a:ea typeface="Microsoft YaHei"/>
@@ -5614,26 +5726,25 @@
       </p:sp>
       <p:sp>
         <p:nvSpPr>
-          <p:cNvPr id="6" name="Rounded Rectangle 5"/>
+          <p:cNvPr id="6" name="Rectangle 5"/>
           <p:cNvSpPr/>
           <p:nvPr/>
         </p:nvSpPr>
         <p:spPr>
           <a:xfrm>
-            <a:off x="495147" y="2834640"/>
-            <a:ext cx="1874519" cy="1371600"/>
-          </a:xfrm>
-          <a:prstGeom prst="roundRect">
+            <a:off x="2447391" y="3509467"/>
+            <a:ext cx="384048" cy="21945"/>
+          </a:xfrm>
+          <a:prstGeom prst="rect">
             <a:avLst/>
           </a:prstGeom>
           <a:solidFill>
             <a:srgbClr val="1F3B6E"/>
           </a:solidFill>
-          <a:ln w="12700">
-            <a:solidFill>
-              <a:srgbClr val="1F3B6E"/>
-            </a:solidFill>
+          <a:ln>
+            <a:noFill/>
           </a:ln>
+          <a:effectLst/>
         </p:spPr>
         <p:style>
           <a:lnRef idx="1">
@@ -5650,44 +5761,36 @@
           </a:fontRef>
         </p:style>
         <p:txBody>
-          <a:bodyPr rtlCol="0" anchor="ctr" wrap="square"/>
+          <a:bodyPr rtlCol="0" anchor="ctr"/>
           <a:lstStyle/>
           <a:p>
             <a:pPr algn="ctr"/>
-            <a:r>
-              <a:rPr sz="1400" b="1">
-                <a:solidFill>
-                  <a:srgbClr val="FFFFFF"/>
-                </a:solidFill>
-                <a:latin typeface="Microsoft YaHei"/>
-                <a:ea typeface="Microsoft YaHei"/>
-              </a:rPr>
-              <a:t>DICOM
-→ HU</a:t>
-            </a:r>
-          </a:p>
-        </p:txBody>
-      </p:sp>
-      <p:sp>
-        <p:nvSpPr>
-          <p:cNvPr id="7" name="Right Arrow 6"/>
+          </a:p>
+        </p:txBody>
+      </p:sp>
+      <p:sp>
+        <p:nvSpPr>
+          <p:cNvPr id="7" name="Rounded Rectangle 6"/>
           <p:cNvSpPr/>
           <p:nvPr/>
         </p:nvSpPr>
         <p:spPr>
           <a:xfrm>
-            <a:off x="2424531" y="3374136"/>
-            <a:ext cx="347472" cy="292608"/>
-          </a:xfrm>
-          <a:prstGeom prst="rightArrow">
+            <a:off x="527151" y="2743200"/>
+            <a:ext cx="1920240" cy="1554480"/>
+          </a:xfrm>
+          <a:prstGeom prst="roundRect">
             <a:avLst/>
           </a:prstGeom>
           <a:solidFill>
             <a:srgbClr val="1F3B6E"/>
           </a:solidFill>
-          <a:ln>
-            <a:noFill/>
+          <a:ln w="12700">
+            <a:solidFill>
+              <a:srgbClr val="1F3B6E"/>
+            </a:solidFill>
           </a:ln>
+          <a:effectLst/>
         </p:spPr>
         <p:style>
           <a:lnRef idx="1">
@@ -5704,35 +5807,45 @@
           </a:fontRef>
         </p:style>
         <p:txBody>
-          <a:bodyPr rtlCol="0" anchor="ctr"/>
+          <a:bodyPr rtlCol="0" anchor="ctr" wrap="square"/>
           <a:lstStyle/>
           <a:p>
             <a:pPr algn="ctr"/>
-          </a:p>
-        </p:txBody>
-      </p:sp>
-      <p:sp>
-        <p:nvSpPr>
-          <p:cNvPr id="8" name="Rounded Rectangle 7"/>
+            <a:r>
+              <a:rPr sz="1400" b="1">
+                <a:solidFill>
+                  <a:srgbClr val="FFFFFF"/>
+                </a:solidFill>
+                <a:latin typeface="Microsoft YaHei"/>
+                <a:ea typeface="Microsoft YaHei"/>
+              </a:rPr>
+              <a:t>① DICOM
+→ HU</a:t>
+            </a:r>
+          </a:p>
+        </p:txBody>
+      </p:sp>
+      <p:sp>
+        <p:nvSpPr>
+          <p:cNvPr id="8" name="Rectangle 7"/>
           <p:cNvSpPr/>
           <p:nvPr/>
         </p:nvSpPr>
         <p:spPr>
           <a:xfrm>
-            <a:off x="2826867" y="2834640"/>
-            <a:ext cx="1874519" cy="1371600"/>
-          </a:xfrm>
-          <a:prstGeom prst="roundRect">
+            <a:off x="4751679" y="3509467"/>
+            <a:ext cx="384048" cy="21945"/>
+          </a:xfrm>
+          <a:prstGeom prst="rect">
             <a:avLst/>
           </a:prstGeom>
           <a:solidFill>
-            <a:srgbClr val="5A5A5A"/>
+            <a:srgbClr val="1F3B6E"/>
           </a:solidFill>
-          <a:ln w="12700">
-            <a:solidFill>
-              <a:srgbClr val="1F3B6E"/>
-            </a:solidFill>
+          <a:ln>
+            <a:noFill/>
           </a:ln>
+          <a:effectLst/>
         </p:spPr>
         <p:style>
           <a:lnRef idx="1">
@@ -5749,44 +5862,36 @@
           </a:fontRef>
         </p:style>
         <p:txBody>
-          <a:bodyPr rtlCol="0" anchor="ctr" wrap="square"/>
+          <a:bodyPr rtlCol="0" anchor="ctr"/>
           <a:lstStyle/>
           <a:p>
             <a:pPr algn="ctr"/>
-            <a:r>
-              <a:rPr sz="1400" b="1">
-                <a:solidFill>
-                  <a:srgbClr val="FFFFFF"/>
-                </a:solidFill>
-                <a:latin typeface="Microsoft YaHei"/>
-                <a:ea typeface="Microsoft YaHei"/>
-              </a:rPr>
-              <a:t>立方体网格
-+ 初始对齐</a:t>
-            </a:r>
-          </a:p>
-        </p:txBody>
-      </p:sp>
-      <p:sp>
-        <p:nvSpPr>
-          <p:cNvPr id="9" name="Right Arrow 8"/>
+          </a:p>
+        </p:txBody>
+      </p:sp>
+      <p:sp>
+        <p:nvSpPr>
+          <p:cNvPr id="9" name="Rounded Rectangle 8"/>
           <p:cNvSpPr/>
           <p:nvPr/>
         </p:nvSpPr>
         <p:spPr>
           <a:xfrm>
-            <a:off x="4756251" y="3374136"/>
-            <a:ext cx="347472" cy="292608"/>
-          </a:xfrm>
-          <a:prstGeom prst="rightArrow">
+            <a:off x="2831439" y="2743200"/>
+            <a:ext cx="1920240" cy="1554480"/>
+          </a:xfrm>
+          <a:prstGeom prst="roundRect">
             <a:avLst/>
           </a:prstGeom>
           <a:solidFill>
             <a:srgbClr val="1F3B6E"/>
           </a:solidFill>
-          <a:ln>
-            <a:noFill/>
+          <a:ln w="12700">
+            <a:solidFill>
+              <a:srgbClr val="1F3B6E"/>
+            </a:solidFill>
           </a:ln>
+          <a:effectLst/>
         </p:spPr>
         <p:style>
           <a:lnRef idx="1">
@@ -5803,35 +5908,45 @@
           </a:fontRef>
         </p:style>
         <p:txBody>
-          <a:bodyPr rtlCol="0" anchor="ctr"/>
+          <a:bodyPr rtlCol="0" anchor="ctr" wrap="square"/>
           <a:lstStyle/>
           <a:p>
             <a:pPr algn="ctr"/>
-          </a:p>
-        </p:txBody>
-      </p:sp>
-      <p:sp>
-        <p:nvSpPr>
-          <p:cNvPr id="10" name="Rounded Rectangle 9"/>
+            <a:r>
+              <a:rPr sz="1400" b="1">
+                <a:solidFill>
+                  <a:srgbClr val="FFFFFF"/>
+                </a:solidFill>
+                <a:latin typeface="Microsoft YaHei"/>
+                <a:ea typeface="Microsoft YaHei"/>
+              </a:rPr>
+              <a:t>② 立方体网格
++ 初始对齐</a:t>
+            </a:r>
+          </a:p>
+        </p:txBody>
+      </p:sp>
+      <p:sp>
+        <p:nvSpPr>
+          <p:cNvPr id="10" name="Rectangle 9"/>
           <p:cNvSpPr/>
           <p:nvPr/>
         </p:nvSpPr>
         <p:spPr>
           <a:xfrm>
-            <a:off x="5158587" y="2834640"/>
-            <a:ext cx="1874519" cy="1371600"/>
-          </a:xfrm>
-          <a:prstGeom prst="roundRect">
+            <a:off x="7055967" y="3509467"/>
+            <a:ext cx="384048" cy="21945"/>
+          </a:xfrm>
+          <a:prstGeom prst="rect">
             <a:avLst/>
           </a:prstGeom>
           <a:solidFill>
             <a:srgbClr val="1F3B6E"/>
           </a:solidFill>
-          <a:ln w="12700">
-            <a:solidFill>
-              <a:srgbClr val="1F3B6E"/>
-            </a:solidFill>
+          <a:ln>
+            <a:noFill/>
           </a:ln>
+          <a:effectLst/>
         </p:spPr>
         <p:style>
           <a:lnRef idx="1">
@@ -5848,44 +5963,36 @@
           </a:fontRef>
         </p:style>
         <p:txBody>
-          <a:bodyPr rtlCol="0" anchor="ctr" wrap="square"/>
+          <a:bodyPr rtlCol="0" anchor="ctr"/>
           <a:lstStyle/>
           <a:p>
             <a:pPr algn="ctr"/>
-            <a:r>
-              <a:rPr sz="1400" b="1">
-                <a:solidFill>
-                  <a:srgbClr val="FFFFFF"/>
-                </a:solidFill>
-                <a:latin typeface="Microsoft YaHei"/>
-                <a:ea typeface="Microsoft YaHei"/>
-              </a:rPr>
-              <a:t>多分辨率刚体
-(LNCC)</a:t>
-            </a:r>
-          </a:p>
-        </p:txBody>
-      </p:sp>
-      <p:sp>
-        <p:nvSpPr>
-          <p:cNvPr id="11" name="Right Arrow 10"/>
+          </a:p>
+        </p:txBody>
+      </p:sp>
+      <p:sp>
+        <p:nvSpPr>
+          <p:cNvPr id="11" name="Rounded Rectangle 10"/>
           <p:cNvSpPr/>
           <p:nvPr/>
         </p:nvSpPr>
         <p:spPr>
           <a:xfrm>
-            <a:off x="7087971" y="3374136"/>
-            <a:ext cx="347472" cy="292608"/>
-          </a:xfrm>
-          <a:prstGeom prst="rightArrow">
+            <a:off x="5135727" y="2743200"/>
+            <a:ext cx="1920240" cy="1554480"/>
+          </a:xfrm>
+          <a:prstGeom prst="roundRect">
             <a:avLst/>
           </a:prstGeom>
           <a:solidFill>
             <a:srgbClr val="1F3B6E"/>
           </a:solidFill>
-          <a:ln>
-            <a:noFill/>
+          <a:ln w="12700">
+            <a:solidFill>
+              <a:srgbClr val="1F3B6E"/>
+            </a:solidFill>
           </a:ln>
+          <a:effectLst/>
         </p:spPr>
         <p:style>
           <a:lnRef idx="1">
@@ -5902,35 +6009,45 @@
           </a:fontRef>
         </p:style>
         <p:txBody>
-          <a:bodyPr rtlCol="0" anchor="ctr"/>
+          <a:bodyPr rtlCol="0" anchor="ctr" wrap="square"/>
           <a:lstStyle/>
           <a:p>
             <a:pPr algn="ctr"/>
-          </a:p>
-        </p:txBody>
-      </p:sp>
-      <p:sp>
-        <p:nvSpPr>
-          <p:cNvPr id="12" name="Rounded Rectangle 11"/>
+            <a:r>
+              <a:rPr sz="1400" b="1">
+                <a:solidFill>
+                  <a:srgbClr val="FFFFFF"/>
+                </a:solidFill>
+                <a:latin typeface="Microsoft YaHei"/>
+                <a:ea typeface="Microsoft YaHei"/>
+              </a:rPr>
+              <a:t>③ 多分辨率
+刚体 LNCC</a:t>
+            </a:r>
+          </a:p>
+        </p:txBody>
+      </p:sp>
+      <p:sp>
+        <p:nvSpPr>
+          <p:cNvPr id="12" name="Rectangle 11"/>
           <p:cNvSpPr/>
           <p:nvPr/>
         </p:nvSpPr>
         <p:spPr>
           <a:xfrm>
-            <a:off x="7490307" y="2834640"/>
-            <a:ext cx="1874519" cy="1371600"/>
-          </a:xfrm>
-          <a:prstGeom prst="roundRect">
+            <a:off x="9360255" y="3509467"/>
+            <a:ext cx="384048" cy="21945"/>
+          </a:xfrm>
+          <a:prstGeom prst="rect">
             <a:avLst/>
           </a:prstGeom>
           <a:solidFill>
-            <a:srgbClr val="5A5A5A"/>
+            <a:srgbClr val="1F3B6E"/>
           </a:solidFill>
-          <a:ln w="12700">
-            <a:solidFill>
-              <a:srgbClr val="1F3B6E"/>
-            </a:solidFill>
+          <a:ln>
+            <a:noFill/>
           </a:ln>
+          <a:effectLst/>
         </p:spPr>
         <p:style>
           <a:lnRef idx="1">
@@ -5947,44 +6064,36 @@
           </a:fontRef>
         </p:style>
         <p:txBody>
-          <a:bodyPr rtlCol="0" anchor="ctr" wrap="square"/>
+          <a:bodyPr rtlCol="0" anchor="ctr"/>
           <a:lstStyle/>
           <a:p>
             <a:pPr algn="ctr"/>
-            <a:r>
-              <a:rPr sz="1400" b="1">
-                <a:solidFill>
-                  <a:srgbClr val="FFFFFF"/>
-                </a:solidFill>
-                <a:latin typeface="Microsoft YaHei"/>
-                <a:ea typeface="Microsoft YaHei"/>
-              </a:rPr>
-              <a:t>可选形变
-(微分同胚)</a:t>
-            </a:r>
-          </a:p>
-        </p:txBody>
-      </p:sp>
-      <p:sp>
-        <p:nvSpPr>
-          <p:cNvPr id="13" name="Right Arrow 12"/>
+          </a:p>
+        </p:txBody>
+      </p:sp>
+      <p:sp>
+        <p:nvSpPr>
+          <p:cNvPr id="13" name="Rounded Rectangle 12"/>
           <p:cNvSpPr/>
           <p:nvPr/>
         </p:nvSpPr>
         <p:spPr>
           <a:xfrm>
-            <a:off x="9419691" y="3374136"/>
-            <a:ext cx="347472" cy="292608"/>
-          </a:xfrm>
-          <a:prstGeom prst="rightArrow">
+            <a:off x="7440015" y="2743200"/>
+            <a:ext cx="1920240" cy="1554480"/>
+          </a:xfrm>
+          <a:prstGeom prst="roundRect">
             <a:avLst/>
           </a:prstGeom>
           <a:solidFill>
             <a:srgbClr val="1F3B6E"/>
           </a:solidFill>
-          <a:ln>
-            <a:noFill/>
+          <a:ln w="12700">
+            <a:solidFill>
+              <a:srgbClr val="1F3B6E"/>
+            </a:solidFill>
           </a:ln>
+          <a:effectLst/>
         </p:spPr>
         <p:style>
           <a:lnRef idx="1">
@@ -6001,10 +6110,21 @@
           </a:fontRef>
         </p:style>
         <p:txBody>
-          <a:bodyPr rtlCol="0" anchor="ctr"/>
+          <a:bodyPr rtlCol="0" anchor="ctr" wrap="square"/>
           <a:lstStyle/>
           <a:p>
             <a:pPr algn="ctr"/>
+            <a:r>
+              <a:rPr sz="1400" b="1">
+                <a:solidFill>
+                  <a:srgbClr val="FFFFFF"/>
+                </a:solidFill>
+                <a:latin typeface="Microsoft YaHei"/>
+                <a:ea typeface="Microsoft YaHei"/>
+              </a:rPr>
+              <a:t>④ 受控形变
+微分同胚</a:t>
+            </a:r>
           </a:p>
         </p:txBody>
       </p:sp>
@@ -6016,8 +6136,8 @@
         </p:nvSpPr>
         <p:spPr>
           <a:xfrm>
-            <a:off x="9822027" y="2834640"/>
-            <a:ext cx="1874519" cy="1371600"/>
+            <a:off x="9744303" y="2743200"/>
+            <a:ext cx="1920240" cy="1554480"/>
           </a:xfrm>
           <a:prstGeom prst="roundRect">
             <a:avLst/>
@@ -6030,6 +6150,7 @@
               <a:srgbClr val="1F3B6E"/>
             </a:solidFill>
           </a:ln>
+          <a:effectLst/>
         </p:spPr>
         <p:style>
           <a:lnRef idx="1">
@@ -6058,7 +6179,7 @@
                 <a:latin typeface="Microsoft YaHei"/>
                 <a:ea typeface="Microsoft YaHei"/>
               </a:rPr>
-              <a:t>输出
+              <a:t>⑤ 输出
 变换/指标</a:t>
             </a:r>
           </a:p>
@@ -6072,8 +6193,8 @@
         </p:nvSpPr>
         <p:spPr>
           <a:xfrm>
-            <a:off x="1097280" y="4846320"/>
-            <a:ext cx="10058400" cy="1280160"/>
+            <a:off x="1097280" y="4937760"/>
+            <a:ext cx="10515600" cy="1188720"/>
           </a:xfrm>
           <a:prstGeom prst="rect">
             <a:avLst/>
@@ -6087,6 +6208,9 @@
           <a:lstStyle/>
           <a:p>
             <a:pPr>
+              <a:lnSpc>
+                <a:spcPct val="120000"/>
+              </a:lnSpc>
               <a:spcAft>
                 <a:spcPts val="1000"/>
               </a:spcAft>
@@ -6094,16 +6218,19 @@
             <a:r>
               <a:rPr sz="1800" b="0">
                 <a:solidFill>
-                  <a:srgbClr val="222222"/>
+                  <a:srgbClr val="1F2937"/>
                 </a:solidFill>
                 <a:latin typeface="Microsoft YaHei"/>
                 <a:ea typeface="Microsoft YaHei"/>
               </a:rPr>
-              <a:t>▪ 单对图像实例优化：无需训练数据 / 预训练模型</a:t>
+              <a:t>▪  单对图像实例优化：无需训练数据 / 预训练模型</a:t>
             </a:r>
           </a:p>
           <a:p>
             <a:pPr>
+              <a:lnSpc>
+                <a:spcPct val="120000"/>
+              </a:lnSpc>
               <a:spcAft>
                 <a:spcPts val="1000"/>
               </a:spcAft>
@@ -6111,12 +6238,12 @@
             <a:r>
               <a:rPr sz="1800" b="0">
                 <a:solidFill>
-                  <a:srgbClr val="222222"/>
+                  <a:srgbClr val="1F2937"/>
                 </a:solidFill>
                 <a:latin typeface="Microsoft YaHei"/>
                 <a:ea typeface="Microsoft YaHei"/>
               </a:rPr>
-              <a:t>▪ 全部基于 PyTorch 的 affine_grid / grid_sample 自行实现</a:t>
+              <a:t>▪  全部基于 PyTorch 的 affine_grid / grid_sample 自行实现</a:t>
             </a:r>
           </a:p>
         </p:txBody>
@@ -6148,7 +6275,7 @@
         <p:spPr>
           <a:xfrm>
             <a:off x="0" y="0"/>
-            <a:ext cx="12191695" cy="201168"/>
+            <a:ext cx="12191695" cy="109728"/>
           </a:xfrm>
           <a:prstGeom prst="rect">
             <a:avLst/>
@@ -6159,6 +6286,7 @@
           <a:ln>
             <a:noFill/>
           </a:ln>
+          <a:effectLst/>
         </p:spPr>
         <p:style>
           <a:lnRef idx="1">
@@ -6190,8 +6318,8 @@
         </p:nvSpPr>
         <p:spPr>
           <a:xfrm>
-            <a:off x="502920" y="384048"/>
-            <a:ext cx="11155680" cy="822960"/>
+            <a:off x="640080" y="310896"/>
+            <a:ext cx="10911535" cy="777240"/>
           </a:xfrm>
           <a:prstGeom prst="rect">
             <a:avLst/>
@@ -6205,7 +6333,7 @@
           <a:lstStyle/>
           <a:p>
             <a:r>
-              <a:rPr sz="2800" b="1">
+              <a:rPr sz="3000" b="1">
                 <a:solidFill>
                   <a:srgbClr val="1F3B6E"/>
                 </a:solidFill>
@@ -6225,8 +6353,8 @@
         </p:nvSpPr>
         <p:spPr>
           <a:xfrm>
-            <a:off x="502920" y="6419088"/>
-            <a:ext cx="5486400" cy="365760"/>
+            <a:off x="640080" y="6437376"/>
+            <a:ext cx="5486400" cy="329184"/>
           </a:xfrm>
           <a:prstGeom prst="rect">
             <a:avLst/>
@@ -6240,14 +6368,14 @@
           <a:lstStyle/>
           <a:p>
             <a:r>
-              <a:rPr sz="1000" b="0">
+              <a:rPr sz="1100" b="0">
                 <a:solidFill>
-                  <a:srgbClr val="5A5A5A"/>
+                  <a:srgbClr val="6B7280"/>
                 </a:solidFill>
                 <a:latin typeface="Microsoft YaHei"/>
                 <a:ea typeface="Microsoft YaHei"/>
               </a:rPr>
-              <a:t>CBCT → pCT 配准 · 病例 M24557</a:t>
+              <a:t>病例 M24557</a:t>
             </a:r>
           </a:p>
         </p:txBody>
@@ -6260,8 +6388,8 @@
         </p:nvSpPr>
         <p:spPr>
           <a:xfrm>
-            <a:off x="10789920" y="6419088"/>
-            <a:ext cx="914400" cy="365760"/>
+            <a:off x="10637215" y="6437376"/>
+            <a:ext cx="914400" cy="329184"/>
           </a:xfrm>
           <a:prstGeom prst="rect">
             <a:avLst/>
@@ -6276,9 +6404,9 @@
           <a:p>
             <a:pPr algn="r"/>
             <a:r>
-              <a:rPr sz="1000" b="0">
+              <a:rPr sz="1100" b="0">
                 <a:solidFill>
-                  <a:srgbClr val="5A5A5A"/>
+                  <a:srgbClr val="6B7280"/>
                 </a:solidFill>
                 <a:latin typeface="Microsoft YaHei"/>
                 <a:ea typeface="Microsoft YaHei"/>
@@ -6304,12 +6432,17 @@
         </p:blipFill>
         <p:spPr>
           <a:xfrm>
-            <a:off x="457200" y="2147481"/>
-            <a:ext cx="6583680" cy="3020236"/>
+            <a:off x="640080" y="2235149"/>
+            <a:ext cx="6400800" cy="2936340"/>
           </a:xfrm>
           <a:prstGeom prst="rect">
             <a:avLst/>
           </a:prstGeom>
+          <a:ln w="9525">
+            <a:solidFill>
+              <a:srgbClr val="E5E7EB"/>
+            </a:solidFill>
+          </a:ln>
         </p:spPr>
       </p:pic>
       <p:sp>
@@ -6320,8 +6453,8 @@
         </p:nvSpPr>
         <p:spPr>
           <a:xfrm>
-            <a:off x="7223760" y="1737360"/>
-            <a:ext cx="4572000" cy="4206240"/>
+            <a:off x="7315200" y="1828800"/>
+            <a:ext cx="4206240" cy="4023360"/>
           </a:xfrm>
           <a:prstGeom prst="rect">
             <a:avLst/>
@@ -6335,6 +6468,9 @@
           <a:lstStyle/>
           <a:p>
             <a:pPr>
+              <a:lnSpc>
+                <a:spcPct val="120000"/>
+              </a:lnSpc>
               <a:spcAft>
                 <a:spcPts val="1000"/>
               </a:spcAft>
@@ -6342,16 +6478,19 @@
             <a:r>
               <a:rPr sz="1800" b="0">
                 <a:solidFill>
-                  <a:srgbClr val="222222"/>
+                  <a:srgbClr val="1F2937"/>
                 </a:solidFill>
                 <a:latin typeface="Microsoft YaHei"/>
                 <a:ea typeface="Microsoft YaHei"/>
               </a:rPr>
-              <a:t>▪ 立方体 + 各向同性网格 → 归一化旋转 = 物理刚体</a:t>
+              <a:t>▪  立方体各向同性网格 → 归一化旋转 = 物理刚体</a:t>
             </a:r>
           </a:p>
           <a:p>
             <a:pPr>
+              <a:lnSpc>
+                <a:spcPct val="120000"/>
+              </a:lnSpc>
               <a:spcAft>
                 <a:spcPts val="1000"/>
               </a:spcAft>
@@ -6359,16 +6498,19 @@
             <a:r>
               <a:rPr sz="1800" b="0">
                 <a:solidFill>
-                  <a:srgbClr val="222222"/>
+                  <a:srgbClr val="1F2937"/>
                 </a:solidFill>
                 <a:latin typeface="Microsoft YaHei"/>
                 <a:ea typeface="Microsoft YaHei"/>
               </a:rPr>
-              <a:t>▪ x / y：身体质心对齐</a:t>
+              <a:t>▪  x / y：身体质心对齐</a:t>
             </a:r>
           </a:p>
           <a:p>
             <a:pPr>
+              <a:lnSpc>
+                <a:spcPct val="120000"/>
+              </a:lnSpc>
               <a:spcAft>
                 <a:spcPts val="1000"/>
               </a:spcAft>
@@ -6376,16 +6518,19 @@
             <a:r>
               <a:rPr sz="1800" b="0">
                 <a:solidFill>
-                  <a:srgbClr val="222222"/>
+                  <a:srgbClr val="1F2937"/>
                 </a:solidFill>
                 <a:latin typeface="Microsoft YaHei"/>
                 <a:ea typeface="Microsoft YaHei"/>
               </a:rPr>
-              <a:t>▪ z：横截面积剖面的 1D 互相关</a:t>
+              <a:t>▪  z：横截面积剖面 1D 互相关</a:t>
             </a:r>
           </a:p>
           <a:p>
             <a:pPr>
+              <a:lnSpc>
+                <a:spcPct val="120000"/>
+              </a:lnSpc>
               <a:spcAft>
                 <a:spcPts val="1000"/>
               </a:spcAft>
@@ -6393,12 +6538,12 @@
             <a:r>
               <a:rPr sz="1800" b="0">
                 <a:solidFill>
-                  <a:srgbClr val="222222"/>
+                  <a:srgbClr val="1F2937"/>
                 </a:solidFill>
                 <a:latin typeface="Microsoft YaHei"/>
                 <a:ea typeface="Microsoft YaHei"/>
               </a:rPr>
-              <a:t>▪ 因 pCT 的 z 覆盖远大于 CBCT，z 质心不可比</a:t>
+              <a:t>▪  因 pCT 的 z 覆盖远大于 CBCT，z 质心不可比</a:t>
             </a:r>
           </a:p>
         </p:txBody>
@@ -6430,7 +6575,7 @@
         <p:spPr>
           <a:xfrm>
             <a:off x="0" y="0"/>
-            <a:ext cx="12191695" cy="201168"/>
+            <a:ext cx="12191695" cy="109728"/>
           </a:xfrm>
           <a:prstGeom prst="rect">
             <a:avLst/>
@@ -6441,6 +6586,7 @@
           <a:ln>
             <a:noFill/>
           </a:ln>
+          <a:effectLst/>
         </p:spPr>
         <p:style>
           <a:lnRef idx="1">
@@ -6472,8 +6618,8 @@
         </p:nvSpPr>
         <p:spPr>
           <a:xfrm>
-            <a:off x="502920" y="384048"/>
-            <a:ext cx="11155680" cy="822960"/>
+            <a:off x="640080" y="310896"/>
+            <a:ext cx="10911535" cy="777240"/>
           </a:xfrm>
           <a:prstGeom prst="rect">
             <a:avLst/>
@@ -6487,7 +6633,7 @@
           <a:lstStyle/>
           <a:p>
             <a:r>
-              <a:rPr sz="2800" b="1">
+              <a:rPr sz="3000" b="1">
                 <a:solidFill>
                   <a:srgbClr val="1F3B6E"/>
                 </a:solidFill>
@@ -6507,8 +6653,8 @@
         </p:nvSpPr>
         <p:spPr>
           <a:xfrm>
-            <a:off x="502920" y="6419088"/>
-            <a:ext cx="5486400" cy="365760"/>
+            <a:off x="640080" y="6437376"/>
+            <a:ext cx="5486400" cy="329184"/>
           </a:xfrm>
           <a:prstGeom prst="rect">
             <a:avLst/>
@@ -6522,14 +6668,14 @@
           <a:lstStyle/>
           <a:p>
             <a:r>
-              <a:rPr sz="1000" b="0">
+              <a:rPr sz="1100" b="0">
                 <a:solidFill>
-                  <a:srgbClr val="5A5A5A"/>
+                  <a:srgbClr val="6B7280"/>
                 </a:solidFill>
                 <a:latin typeface="Microsoft YaHei"/>
                 <a:ea typeface="Microsoft YaHei"/>
               </a:rPr>
-              <a:t>CBCT → pCT 配准 · 病例 M24557</a:t>
+              <a:t>病例 M24557</a:t>
             </a:r>
           </a:p>
         </p:txBody>
@@ -6542,8 +6688,8 @@
         </p:nvSpPr>
         <p:spPr>
           <a:xfrm>
-            <a:off x="10789920" y="6419088"/>
-            <a:ext cx="914400" cy="365760"/>
+            <a:off x="10637215" y="6437376"/>
+            <a:ext cx="914400" cy="329184"/>
           </a:xfrm>
           <a:prstGeom prst="rect">
             <a:avLst/>
@@ -6558,9 +6704,9 @@
           <a:p>
             <a:pPr algn="r"/>
             <a:r>
-              <a:rPr sz="1000" b="0">
+              <a:rPr sz="1100" b="0">
                 <a:solidFill>
-                  <a:srgbClr val="5A5A5A"/>
+                  <a:srgbClr val="6B7280"/>
                 </a:solidFill>
                 <a:latin typeface="Microsoft YaHei"/>
                 <a:ea typeface="Microsoft YaHei"/>
@@ -6586,12 +6732,17 @@
         </p:blipFill>
         <p:spPr>
           <a:xfrm>
-            <a:off x="457200" y="2144310"/>
-            <a:ext cx="6583680" cy="3026579"/>
+            <a:off x="640080" y="2232066"/>
+            <a:ext cx="6400800" cy="2942507"/>
           </a:xfrm>
           <a:prstGeom prst="rect">
             <a:avLst/>
           </a:prstGeom>
+          <a:ln w="9525">
+            <a:solidFill>
+              <a:srgbClr val="E5E7EB"/>
+            </a:solidFill>
+          </a:ln>
         </p:spPr>
       </p:pic>
       <p:sp>
@@ -6602,8 +6753,8 @@
         </p:nvSpPr>
         <p:spPr>
           <a:xfrm>
-            <a:off x="7223760" y="1737360"/>
-            <a:ext cx="4572000" cy="4206240"/>
+            <a:off x="7315200" y="1828800"/>
+            <a:ext cx="4206240" cy="4023360"/>
           </a:xfrm>
           <a:prstGeom prst="rect">
             <a:avLst/>
@@ -6617,6 +6768,9 @@
           <a:lstStyle/>
           <a:p>
             <a:pPr>
+              <a:lnSpc>
+                <a:spcPct val="120000"/>
+              </a:lnSpc>
               <a:spcAft>
                 <a:spcPts val="1000"/>
               </a:spcAft>
@@ -6624,16 +6778,19 @@
             <a:r>
               <a:rPr sz="1800" b="0">
                 <a:solidFill>
-                  <a:srgbClr val="222222"/>
+                  <a:srgbClr val="1F2937"/>
                 </a:solidFill>
                 <a:latin typeface="Microsoft YaHei"/>
                 <a:ea typeface="Microsoft YaHei"/>
               </a:rPr>
-              <a:t>▪ 相似性：局部归一化互相关 LNCC（抗灰度差异）</a:t>
+              <a:t>▪  相似性：局部归一化互相关 LNCC（抗灰度差异）</a:t>
             </a:r>
           </a:p>
           <a:p>
             <a:pPr>
+              <a:lnSpc>
+                <a:spcPct val="120000"/>
+              </a:lnSpc>
               <a:spcAft>
                 <a:spcPts val="1000"/>
               </a:spcAft>
@@ -6641,16 +6798,19 @@
             <a:r>
               <a:rPr sz="1800" b="0">
                 <a:solidFill>
-                  <a:srgbClr val="222222"/>
+                  <a:srgbClr val="1F2937"/>
                 </a:solidFill>
                 <a:latin typeface="Microsoft YaHei"/>
                 <a:ea typeface="Microsoft YaHei"/>
               </a:rPr>
-              <a:t>▪ 多分辨率金字塔 4×→2×→1× 扩大捕获范围</a:t>
+              <a:t>▪  多分辨率金字塔 4×→2×→1× 扩大捕获范围</a:t>
             </a:r>
           </a:p>
           <a:p>
             <a:pPr>
+              <a:lnSpc>
+                <a:spcPct val="120000"/>
+              </a:lnSpc>
               <a:spcAft>
                 <a:spcPts val="1000"/>
               </a:spcAft>
@@ -6658,16 +6818,19 @@
             <a:r>
               <a:rPr sz="1800" b="0">
                 <a:solidFill>
-                  <a:srgbClr val="222222"/>
+                  <a:srgbClr val="1F2937"/>
                 </a:solidFill>
                 <a:latin typeface="Microsoft YaHei"/>
                 <a:ea typeface="Microsoft YaHei"/>
               </a:rPr>
-              <a:t>▪ 形变：速度场积分得微分同胚位移场</a:t>
+              <a:t>▪  形变：速度场积分得微分同胚位移场</a:t>
             </a:r>
           </a:p>
           <a:p>
             <a:pPr>
+              <a:lnSpc>
+                <a:spcPct val="120000"/>
+              </a:lnSpc>
               <a:spcAft>
                 <a:spcPts val="1000"/>
               </a:spcAft>
@@ -6675,12 +6838,12 @@
             <a:r>
               <a:rPr sz="1800" b="0">
                 <a:solidFill>
-                  <a:srgbClr val="222222"/>
+                  <a:srgbClr val="1F2937"/>
                 </a:solidFill>
                 <a:latin typeface="Microsoft YaHei"/>
                 <a:ea typeface="Microsoft YaHei"/>
               </a:rPr>
-              <a:t>▪ 强正则 + 粗网格 + 平滑 → 仅小幅细化</a:t>
+              <a:t>▪  强正则 + 粗网格 + 平滑 → 仅小幅、无折叠</a:t>
             </a:r>
           </a:p>
         </p:txBody>
@@ -6712,7 +6875,7 @@
         <p:spPr>
           <a:xfrm>
             <a:off x="0" y="0"/>
-            <a:ext cx="12191695" cy="201168"/>
+            <a:ext cx="12191695" cy="109728"/>
           </a:xfrm>
           <a:prstGeom prst="rect">
             <a:avLst/>
@@ -6723,6 +6886,7 @@
           <a:ln>
             <a:noFill/>
           </a:ln>
+          <a:effectLst/>
         </p:spPr>
         <p:style>
           <a:lnRef idx="1">
@@ -6754,8 +6918,8 @@
         </p:nvSpPr>
         <p:spPr>
           <a:xfrm>
-            <a:off x="502920" y="384048"/>
-            <a:ext cx="11155680" cy="822960"/>
+            <a:off x="640080" y="310896"/>
+            <a:ext cx="10911535" cy="777240"/>
           </a:xfrm>
           <a:prstGeom prst="rect">
             <a:avLst/>
@@ -6769,7 +6933,7 @@
           <a:lstStyle/>
           <a:p>
             <a:r>
-              <a:rPr sz="2800" b="1">
+              <a:rPr sz="3000" b="1">
                 <a:solidFill>
                   <a:srgbClr val="1F3B6E"/>
                 </a:solidFill>
@@ -6789,8 +6953,8 @@
         </p:nvSpPr>
         <p:spPr>
           <a:xfrm>
-            <a:off x="502920" y="6419088"/>
-            <a:ext cx="5486400" cy="365760"/>
+            <a:off x="640080" y="6437376"/>
+            <a:ext cx="5486400" cy="329184"/>
           </a:xfrm>
           <a:prstGeom prst="rect">
             <a:avLst/>
@@ -6804,14 +6968,14 @@
           <a:lstStyle/>
           <a:p>
             <a:r>
-              <a:rPr sz="1000" b="0">
+              <a:rPr sz="1100" b="0">
                 <a:solidFill>
-                  <a:srgbClr val="5A5A5A"/>
+                  <a:srgbClr val="6B7280"/>
                 </a:solidFill>
                 <a:latin typeface="Microsoft YaHei"/>
                 <a:ea typeface="Microsoft YaHei"/>
               </a:rPr>
-              <a:t>CBCT → pCT 配准 · 病例 M24557</a:t>
+              <a:t>病例 M24557</a:t>
             </a:r>
           </a:p>
         </p:txBody>
@@ -6824,8 +6988,8 @@
         </p:nvSpPr>
         <p:spPr>
           <a:xfrm>
-            <a:off x="10789920" y="6419088"/>
-            <a:ext cx="914400" cy="365760"/>
+            <a:off x="10637215" y="6437376"/>
+            <a:ext cx="914400" cy="329184"/>
           </a:xfrm>
           <a:prstGeom prst="rect">
             <a:avLst/>
@@ -6840,9 +7004,9 @@
           <a:p>
             <a:pPr algn="r"/>
             <a:r>
-              <a:rPr sz="1000" b="0">
+              <a:rPr sz="1100" b="0">
                 <a:solidFill>
-                  <a:srgbClr val="5A5A5A"/>
+                  <a:srgbClr val="6B7280"/>
                 </a:solidFill>
                 <a:latin typeface="Microsoft YaHei"/>
                 <a:ea typeface="Microsoft YaHei"/>
@@ -6868,17 +7032,58 @@
         </p:blipFill>
         <p:spPr>
           <a:xfrm>
-            <a:off x="1510093" y="1325880"/>
-            <a:ext cx="3197733" cy="4846320"/>
+            <a:off x="1737754" y="1325880"/>
+            <a:ext cx="3016730" cy="4572000"/>
           </a:xfrm>
           <a:prstGeom prst="rect">
             <a:avLst/>
           </a:prstGeom>
+          <a:ln w="9525">
+            <a:solidFill>
+              <a:srgbClr val="E5E7EB"/>
+            </a:solidFill>
+          </a:ln>
         </p:spPr>
       </p:pic>
+      <p:sp>
+        <p:nvSpPr>
+          <p:cNvPr id="7" name="TextBox 6"/>
+          <p:cNvSpPr txBox="1"/>
+          <p:nvPr/>
+        </p:nvSpPr>
+        <p:spPr>
+          <a:xfrm>
+            <a:off x="640080" y="5916168"/>
+            <a:ext cx="5212080" cy="310896"/>
+          </a:xfrm>
+          <a:prstGeom prst="rect">
+            <a:avLst/>
+          </a:prstGeom>
+          <a:noFill/>
+        </p:spPr>
+        <p:txBody>
+          <a:bodyPr wrap="square">
+            <a:spAutoFit/>
+          </a:bodyPr>
+          <a:lstStyle/>
+          <a:p>
+            <a:pPr algn="ctr"/>
+            <a:r>
+              <a:rPr sz="1300" b="0">
+                <a:solidFill>
+                  <a:srgbClr val="6B7280"/>
+                </a:solidFill>
+                <a:latin typeface="Microsoft YaHei"/>
+                <a:ea typeface="Microsoft YaHei"/>
+              </a:rPr>
+              <a:t>三视图棋盘格（配准前 vs 后）</a:t>
+            </a:r>
+          </a:p>
+        </p:txBody>
+      </p:sp>
       <p:pic>
         <p:nvPicPr>
-          <p:cNvPr id="7" name="Picture 6" descr="difference.png"/>
+          <p:cNvPr id="8" name="Picture 7" descr="difference.png"/>
           <p:cNvPicPr>
             <a:picLocks noChangeAspect="1"/>
           </p:cNvPicPr>
@@ -6892,14 +7097,55 @@
         </p:blipFill>
         <p:spPr>
           <a:xfrm>
-            <a:off x="6611990" y="1325880"/>
-            <a:ext cx="4698258" cy="4846320"/>
+            <a:off x="6699240" y="1325880"/>
+            <a:ext cx="4432318" cy="4572000"/>
           </a:xfrm>
           <a:prstGeom prst="rect">
             <a:avLst/>
           </a:prstGeom>
+          <a:ln w="9525">
+            <a:solidFill>
+              <a:srgbClr val="E5E7EB"/>
+            </a:solidFill>
+          </a:ln>
         </p:spPr>
       </p:pic>
+      <p:sp>
+        <p:nvSpPr>
+          <p:cNvPr id="9" name="TextBox 8"/>
+          <p:cNvSpPr txBox="1"/>
+          <p:nvPr/>
+        </p:nvSpPr>
+        <p:spPr>
+          <a:xfrm>
+            <a:off x="6309360" y="5916168"/>
+            <a:ext cx="5212080" cy="310896"/>
+          </a:xfrm>
+          <a:prstGeom prst="rect">
+            <a:avLst/>
+          </a:prstGeom>
+          <a:noFill/>
+        </p:spPr>
+        <p:txBody>
+          <a:bodyPr wrap="square">
+            <a:spAutoFit/>
+          </a:bodyPr>
+          <a:lstStyle/>
+          <a:p>
+            <a:pPr algn="ctr"/>
+            <a:r>
+              <a:rPr sz="1300" b="0">
+                <a:solidFill>
+                  <a:srgbClr val="6B7280"/>
+                </a:solidFill>
+                <a:latin typeface="Microsoft YaHei"/>
+                <a:ea typeface="Microsoft YaHei"/>
+              </a:rPr>
+              <a:t>差异图 |CBCT − pCT|（前 vs 后）</a:t>
+            </a:r>
+          </a:p>
+        </p:txBody>
+      </p:sp>
     </p:spTree>
   </p:cSld>
   <p:clrMapOvr>
@@ -6927,7 +7173,7 @@
         <p:spPr>
           <a:xfrm>
             <a:off x="0" y="0"/>
-            <a:ext cx="12191695" cy="201168"/>
+            <a:ext cx="12191695" cy="109728"/>
           </a:xfrm>
           <a:prstGeom prst="rect">
             <a:avLst/>
@@ -6938,6 +7184,7 @@
           <a:ln>
             <a:noFill/>
           </a:ln>
+          <a:effectLst/>
         </p:spPr>
         <p:style>
           <a:lnRef idx="1">
@@ -6969,8 +7216,8 @@
         </p:nvSpPr>
         <p:spPr>
           <a:xfrm>
-            <a:off x="502920" y="384048"/>
-            <a:ext cx="11155680" cy="822960"/>
+            <a:off x="640080" y="310896"/>
+            <a:ext cx="10911535" cy="777240"/>
           </a:xfrm>
           <a:prstGeom prst="rect">
             <a:avLst/>
@@ -6984,7 +7231,7 @@
           <a:lstStyle/>
           <a:p>
             <a:r>
-              <a:rPr sz="2800" b="1">
+              <a:rPr sz="3000" b="1">
                 <a:solidFill>
                   <a:srgbClr val="1F3B6E"/>
                 </a:solidFill>
@@ -7004,8 +7251,8 @@
         </p:nvSpPr>
         <p:spPr>
           <a:xfrm>
-            <a:off x="502920" y="6419088"/>
-            <a:ext cx="5486400" cy="365760"/>
+            <a:off x="640080" y="6437376"/>
+            <a:ext cx="5486400" cy="329184"/>
           </a:xfrm>
           <a:prstGeom prst="rect">
             <a:avLst/>
@@ -7019,14 +7266,14 @@
           <a:lstStyle/>
           <a:p>
             <a:r>
-              <a:rPr sz="1000" b="0">
+              <a:rPr sz="1100" b="0">
                 <a:solidFill>
-                  <a:srgbClr val="5A5A5A"/>
+                  <a:srgbClr val="6B7280"/>
                 </a:solidFill>
                 <a:latin typeface="Microsoft YaHei"/>
                 <a:ea typeface="Microsoft YaHei"/>
               </a:rPr>
-              <a:t>CBCT → pCT 配准 · 病例 M24557</a:t>
+              <a:t>病例 M24557</a:t>
             </a:r>
           </a:p>
         </p:txBody>
@@ -7039,8 +7286,8 @@
         </p:nvSpPr>
         <p:spPr>
           <a:xfrm>
-            <a:off x="10789920" y="6419088"/>
-            <a:ext cx="914400" cy="365760"/>
+            <a:off x="10637215" y="6437376"/>
+            <a:ext cx="914400" cy="329184"/>
           </a:xfrm>
           <a:prstGeom prst="rect">
             <a:avLst/>
@@ -7055,9 +7302,9 @@
           <a:p>
             <a:pPr algn="r"/>
             <a:r>
-              <a:rPr sz="1000" b="0">
+              <a:rPr sz="1100" b="0">
                 <a:solidFill>
-                  <a:srgbClr val="5A5A5A"/>
+                  <a:srgbClr val="6B7280"/>
                 </a:solidFill>
                 <a:latin typeface="Microsoft YaHei"/>
                 <a:ea typeface="Microsoft YaHei"/>
@@ -7083,45 +7330,130 @@
         </p:blipFill>
         <p:spPr>
           <a:xfrm>
-            <a:off x="457200" y="2011680"/>
-            <a:ext cx="5760720" cy="2651760"/>
+            <a:off x="640080" y="2004422"/>
+            <a:ext cx="5394960" cy="2483394"/>
           </a:xfrm>
           <a:prstGeom prst="rect">
             <a:avLst/>
           </a:prstGeom>
+          <a:ln w="9525">
+            <a:solidFill>
+              <a:srgbClr val="E5E7EB"/>
+            </a:solidFill>
+          </a:ln>
         </p:spPr>
       </p:pic>
+      <p:sp>
+        <p:nvSpPr>
+          <p:cNvPr id="7" name="Rounded Rectangle 6"/>
+          <p:cNvSpPr/>
+          <p:nvPr/>
+        </p:nvSpPr>
+        <p:spPr>
+          <a:xfrm>
+            <a:off x="6309360" y="1371600"/>
+            <a:ext cx="5212080" cy="1600200"/>
+          </a:xfrm>
+          <a:prstGeom prst="roundRect">
+            <a:avLst/>
+          </a:prstGeom>
+          <a:solidFill>
+            <a:srgbClr val="F3F6FB"/>
+          </a:solidFill>
+          <a:ln w="22225">
+            <a:solidFill>
+              <a:srgbClr val="1F3B6E"/>
+            </a:solidFill>
+          </a:ln>
+          <a:effectLst/>
+        </p:spPr>
+        <p:style>
+          <a:lnRef idx="1">
+            <a:schemeClr val="accent1"/>
+          </a:lnRef>
+          <a:fillRef idx="3">
+            <a:schemeClr val="accent1"/>
+          </a:fillRef>
+          <a:effectRef idx="2">
+            <a:schemeClr val="accent1"/>
+          </a:effectRef>
+          <a:fontRef idx="minor">
+            <a:schemeClr val="lt1"/>
+          </a:fontRef>
+        </p:style>
+        <p:txBody>
+          <a:bodyPr rtlCol="0" anchor="ctr" wrap="square" lIns="127000" tIns="76200"/>
+          <a:lstStyle/>
+          <a:p>
+            <a:pPr algn="ctr"/>
+            <a:r>
+              <a:rPr sz="1400" b="1">
+                <a:solidFill>
+                  <a:srgbClr val="1F3B6E"/>
+                </a:solidFill>
+                <a:latin typeface="Microsoft YaHei"/>
+                <a:ea typeface="Microsoft YaHei"/>
+              </a:rPr>
+              <a:t>刚体摆位修正（CBCT → pCT）</a:t>
+            </a:r>
+          </a:p>
+          <a:p>
+            <a:r>
+              <a:rPr sz="1700" b="1">
+                <a:solidFill>
+                  <a:srgbClr val="1F2937"/>
+                </a:solidFill>
+                <a:latin typeface="Microsoft YaHei"/>
+                <a:ea typeface="Microsoft YaHei"/>
+              </a:rPr>
+              <a:t>平移 3.90, -37.85, 1.65 mm</a:t>
+            </a:r>
+          </a:p>
+          <a:p>
+            <a:r>
+              <a:rPr sz="1700" b="1">
+                <a:solidFill>
+                  <a:srgbClr val="1F2937"/>
+                </a:solidFill>
+                <a:latin typeface="Microsoft YaHei"/>
+                <a:ea typeface="Microsoft YaHei"/>
+              </a:rPr>
+              <a:t>旋转 -0.87, 0.37, 0.16 °</a:t>
+            </a:r>
+          </a:p>
+        </p:txBody>
+      </p:sp>
       <p:graphicFrame>
         <p:nvGraphicFramePr>
-          <p:cNvPr id="7" name="Table 6"/>
+          <p:cNvPr id="8" name="Table 7"/>
           <p:cNvGraphicFramePr>
             <a:graphicFrameLocks noGrp="1"/>
           </p:cNvGraphicFramePr>
           <p:nvPr/>
         </p:nvGraphicFramePr>
         <p:xfrm>
-          <a:off x="6400800" y="1554480"/>
-          <a:ext cx="5394960" cy="1280160"/>
+          <a:off x="6309360" y="3200400"/>
+          <a:ext cx="5212080" cy="1737360"/>
         </p:xfrm>
         <a:graphic>
           <a:graphicData uri="http://schemas.openxmlformats.org/drawingml/2006/table">
             <a:tbl>
-              <a:tblPr firstRow="1" bandRow="1">
-                <a:tableStyleId>{5C22544A-7EE6-4342-B048-85BDC9FD1C3A}</a:tableStyleId>
+              <a:tblPr firstRow="0" bandRow="0">
+                <a:tableStyleId>{2D5ABB26-0587-4C30-8999-92F81FD0307C}</a:tableStyleId>
               </a:tblPr>
               <a:tblGrid>
                 <a:gridCol w="1920240"/>
-                <a:gridCol w="1737360"/>
-                <a:gridCol w="1737360"/>
+                <a:gridCol w="1645920"/>
+                <a:gridCol w="1645920"/>
               </a:tblGrid>
-              <a:tr h="426720">
+              <a:tr h="434340">
                 <a:tc>
                   <a:txBody>
                     <a:bodyPr/>
                     <a:lstStyle/>
                     <a:p>
                       <a:r>
-                        <a:rPr sz="1300" b="1">
+                        <a:rPr sz="1500" b="1">
                           <a:solidFill>
                             <a:srgbClr val="FFFFFF"/>
                           </a:solidFill>
@@ -7132,7 +7464,7 @@
                       </a:r>
                     </a:p>
                   </a:txBody>
-                  <a:tcPr anchor="ctr" marT="25400" marB="25400">
+                  <a:tcPr anchor="ctr" marL="101600" marR="101600" marT="38100" marB="38100">
                     <a:solidFill>
                       <a:srgbClr val="1F3B6E"/>
                     </a:solidFill>
@@ -7144,7 +7476,7 @@
                     <a:lstStyle/>
                     <a:p>
                       <a:r>
-                        <a:rPr sz="1300" b="1">
+                        <a:rPr sz="1500" b="1">
                           <a:solidFill>
                             <a:srgbClr val="FFFFFF"/>
                           </a:solidFill>
@@ -7155,7 +7487,7 @@
                       </a:r>
                     </a:p>
                   </a:txBody>
-                  <a:tcPr anchor="ctr" marT="25400" marB="25400">
+                  <a:tcPr anchor="ctr" marL="101600" marR="101600" marT="38100" marB="38100">
                     <a:solidFill>
                       <a:srgbClr val="1F3B6E"/>
                     </a:solidFill>
@@ -7167,7 +7499,7 @@
                     <a:lstStyle/>
                     <a:p>
                       <a:r>
-                        <a:rPr sz="1300" b="1">
+                        <a:rPr sz="1500" b="1">
                           <a:solidFill>
                             <a:srgbClr val="FFFFFF"/>
                           </a:solidFill>
@@ -7178,23 +7510,23 @@
                       </a:r>
                     </a:p>
                   </a:txBody>
-                  <a:tcPr anchor="ctr" marT="25400" marB="25400">
+                  <a:tcPr anchor="ctr" marL="101600" marR="101600" marT="38100" marB="38100">
                     <a:solidFill>
                       <a:srgbClr val="1F3B6E"/>
                     </a:solidFill>
                   </a:tcPr>
                 </a:tc>
               </a:tr>
-              <a:tr h="426720">
+              <a:tr h="434340">
                 <a:tc>
                   <a:txBody>
                     <a:bodyPr/>
                     <a:lstStyle/>
                     <a:p>
                       <a:r>
-                        <a:rPr sz="1200" b="0">
+                        <a:rPr sz="1500" b="0">
                           <a:solidFill>
-                            <a:srgbClr val="222222"/>
+                            <a:srgbClr val="1F2937"/>
                           </a:solidFill>
                           <a:latin typeface="Microsoft YaHei"/>
                           <a:ea typeface="Microsoft YaHei"/>
@@ -7203,7 +7535,7 @@
                       </a:r>
                     </a:p>
                   </a:txBody>
-                  <a:tcPr anchor="ctr" marT="25400" marB="25400">
+                  <a:tcPr anchor="ctr" marL="101600" marR="101600" marT="38100" marB="38100">
                     <a:solidFill>
                       <a:srgbClr val="FFFFFF"/>
                     </a:solidFill>
@@ -7216,9 +7548,9 @@
                     <a:p>
                       <a:pPr algn="r"/>
                       <a:r>
-                        <a:rPr sz="1200" b="0">
+                        <a:rPr sz="1500" b="0">
                           <a:solidFill>
-                            <a:srgbClr val="222222"/>
+                            <a:srgbClr val="1F2937"/>
                           </a:solidFill>
                           <a:latin typeface="Microsoft YaHei"/>
                           <a:ea typeface="Microsoft YaHei"/>
@@ -7227,7 +7559,7 @@
                       </a:r>
                     </a:p>
                   </a:txBody>
-                  <a:tcPr anchor="ctr" marT="25400" marB="25400">
+                  <a:tcPr anchor="ctr" marL="101600" marR="101600" marT="38100" marB="38100">
                     <a:solidFill>
                       <a:srgbClr val="FFFFFF"/>
                     </a:solidFill>
@@ -7240,9 +7572,9 @@
                     <a:p>
                       <a:pPr algn="r"/>
                       <a:r>
-                        <a:rPr sz="1200" b="0">
+                        <a:rPr sz="1500" b="0">
                           <a:solidFill>
-                            <a:srgbClr val="222222"/>
+                            <a:srgbClr val="1F2937"/>
                           </a:solidFill>
                           <a:latin typeface="Microsoft YaHei"/>
                           <a:ea typeface="Microsoft YaHei"/>
@@ -7251,23 +7583,23 @@
                       </a:r>
                     </a:p>
                   </a:txBody>
-                  <a:tcPr anchor="ctr" marT="25400" marB="25400">
+                  <a:tcPr anchor="ctr" marL="101600" marR="101600" marT="38100" marB="38100">
                     <a:solidFill>
                       <a:srgbClr val="FFFFFF"/>
                     </a:solidFill>
                   </a:tcPr>
                 </a:tc>
               </a:tr>
-              <a:tr h="426720">
+              <a:tr h="434340">
                 <a:tc>
                   <a:txBody>
                     <a:bodyPr/>
                     <a:lstStyle/>
                     <a:p>
                       <a:r>
-                        <a:rPr sz="1200" b="0">
+                        <a:rPr sz="1500" b="0">
                           <a:solidFill>
-                            <a:srgbClr val="222222"/>
+                            <a:srgbClr val="1F2937"/>
                           </a:solidFill>
                           <a:latin typeface="Microsoft YaHei"/>
                           <a:ea typeface="Microsoft YaHei"/>
@@ -7276,9 +7608,9 @@
                       </a:r>
                     </a:p>
                   </a:txBody>
-                  <a:tcPr anchor="ctr" marT="25400" marB="25400">
+                  <a:tcPr anchor="ctr" marL="101600" marR="101600" marT="38100" marB="38100">
                     <a:solidFill>
-                      <a:srgbClr val="E9EEF6"/>
+                      <a:srgbClr val="F3F6FB"/>
                     </a:solidFill>
                   </a:tcPr>
                 </a:tc>
@@ -7289,9 +7621,9 @@
                     <a:p>
                       <a:pPr algn="r"/>
                       <a:r>
-                        <a:rPr sz="1200" b="0">
+                        <a:rPr sz="1500" b="0">
                           <a:solidFill>
-                            <a:srgbClr val="222222"/>
+                            <a:srgbClr val="1F2937"/>
                           </a:solidFill>
                           <a:latin typeface="Microsoft YaHei"/>
                           <a:ea typeface="Microsoft YaHei"/>
@@ -7300,9 +7632,9 @@
                       </a:r>
                     </a:p>
                   </a:txBody>
-                  <a:tcPr anchor="ctr" marT="25400" marB="25400">
+                  <a:tcPr anchor="ctr" marL="101600" marR="101600" marT="38100" marB="38100">
                     <a:solidFill>
-                      <a:srgbClr val="E9EEF6"/>
+                      <a:srgbClr val="F3F6FB"/>
                     </a:solidFill>
                   </a:tcPr>
                 </a:tc>
@@ -7313,9 +7645,9 @@
                     <a:p>
                       <a:pPr algn="r"/>
                       <a:r>
-                        <a:rPr sz="1200" b="0">
+                        <a:rPr sz="1500" b="0">
                           <a:solidFill>
-                            <a:srgbClr val="222222"/>
+                            <a:srgbClr val="1F2937"/>
                           </a:solidFill>
                           <a:latin typeface="Microsoft YaHei"/>
                           <a:ea typeface="Microsoft YaHei"/>
@@ -7324,106 +7656,32 @@
                       </a:r>
                     </a:p>
                   </a:txBody>
-                  <a:tcPr anchor="ctr" marT="25400" marB="25400">
+                  <a:tcPr anchor="ctr" marL="101600" marR="101600" marT="38100" marB="38100">
                     <a:solidFill>
-                      <a:srgbClr val="E9EEF6"/>
+                      <a:srgbClr val="F3F6FB"/>
                     </a:solidFill>
                   </a:tcPr>
                 </a:tc>
               </a:tr>
-            </a:tbl>
-          </a:graphicData>
-        </a:graphic>
-      </p:graphicFrame>
-      <p:graphicFrame>
-        <p:nvGraphicFramePr>
-          <p:cNvPr id="8" name="Table 7"/>
-          <p:cNvGraphicFramePr>
-            <a:graphicFrameLocks noGrp="1"/>
-          </p:cNvGraphicFramePr>
-          <p:nvPr/>
-        </p:nvGraphicFramePr>
-        <p:xfrm>
-          <a:off x="6400800" y="3063240"/>
-          <a:ext cx="5394960" cy="2103120"/>
-        </p:xfrm>
-        <a:graphic>
-          <a:graphicData uri="http://schemas.openxmlformats.org/drawingml/2006/table">
-            <a:tbl>
-              <a:tblPr firstRow="1" bandRow="1">
-                <a:tableStyleId>{5C22544A-7EE6-4342-B048-85BDC9FD1C3A}</a:tableStyleId>
-              </a:tblPr>
-              <a:tblGrid>
-                <a:gridCol w="2834640"/>
-                <a:gridCol w="2560320"/>
-              </a:tblGrid>
-              <a:tr h="420624">
+              <a:tr h="434340">
                 <a:tc>
                   <a:txBody>
                     <a:bodyPr/>
                     <a:lstStyle/>
                     <a:p>
                       <a:r>
-                        <a:rPr sz="1300" b="1">
+                        <a:rPr sz="1500" b="0">
                           <a:solidFill>
-                            <a:srgbClr val="FFFFFF"/>
+                            <a:srgbClr val="1F2937"/>
                           </a:solidFill>
                           <a:latin typeface="Microsoft YaHei"/>
                           <a:ea typeface="Microsoft YaHei"/>
                         </a:rPr>
-                        <a:t>刚体摆位修正</a:t>
+                        <a:t>Jacobian min</a:t>
                       </a:r>
                     </a:p>
                   </a:txBody>
-                  <a:tcPr anchor="ctr" marT="25400" marB="25400">
-                    <a:solidFill>
-                      <a:srgbClr val="1F3B6E"/>
-                    </a:solidFill>
-                  </a:tcPr>
-                </a:tc>
-                <a:tc>
-                  <a:txBody>
-                    <a:bodyPr/>
-                    <a:lstStyle/>
-                    <a:p>
-                      <a:r>
-                        <a:rPr sz="1300" b="1">
-                          <a:solidFill>
-                            <a:srgbClr val="FFFFFF"/>
-                          </a:solidFill>
-                          <a:latin typeface="Microsoft YaHei"/>
-                          <a:ea typeface="Microsoft YaHei"/>
-                        </a:rPr>
-                        <a:t>数值</a:t>
-                      </a:r>
-                    </a:p>
-                  </a:txBody>
-                  <a:tcPr anchor="ctr" marT="25400" marB="25400">
-                    <a:solidFill>
-                      <a:srgbClr val="1F3B6E"/>
-                    </a:solidFill>
-                  </a:tcPr>
-                </a:tc>
-              </a:tr>
-              <a:tr h="420624">
-                <a:tc>
-                  <a:txBody>
-                    <a:bodyPr/>
-                    <a:lstStyle/>
-                    <a:p>
-                      <a:r>
-                        <a:rPr sz="1200" b="0">
-                          <a:solidFill>
-                            <a:srgbClr val="222222"/>
-                          </a:solidFill>
-                          <a:latin typeface="Microsoft YaHei"/>
-                          <a:ea typeface="Microsoft YaHei"/>
-                        </a:rPr>
-                        <a:t>平移 tx,ty,tz (mm)</a:t>
-                      </a:r>
-                    </a:p>
-                  </a:txBody>
-                  <a:tcPr anchor="ctr" marT="25400" marB="25400">
+                  <a:tcPr anchor="ctr" marL="101600" marR="101600" marT="38100" marB="38100">
                     <a:solidFill>
                       <a:srgbClr val="FFFFFF"/>
                     </a:solidFill>
@@ -7436,92 +7694,18 @@
                     <a:p>
                       <a:pPr algn="r"/>
                       <a:r>
-                        <a:rPr sz="1200" b="0">
+                        <a:rPr sz="1500" b="0">
                           <a:solidFill>
-                            <a:srgbClr val="222222"/>
+                            <a:srgbClr val="1F2937"/>
                           </a:solidFill>
                           <a:latin typeface="Microsoft YaHei"/>
                           <a:ea typeface="Microsoft YaHei"/>
                         </a:rPr>
-                        <a:t>3.90, -37.85, 1.65</a:t>
+                        <a:t>0.506</a:t>
                       </a:r>
                     </a:p>
                   </a:txBody>
-                  <a:tcPr anchor="ctr" marT="25400" marB="25400">
-                    <a:solidFill>
-                      <a:srgbClr val="FFFFFF"/>
-                    </a:solidFill>
-                  </a:tcPr>
-                </a:tc>
-              </a:tr>
-              <a:tr h="420624">
-                <a:tc>
-                  <a:txBody>
-                    <a:bodyPr/>
-                    <a:lstStyle/>
-                    <a:p>
-                      <a:r>
-                        <a:rPr sz="1200" b="0">
-                          <a:solidFill>
-                            <a:srgbClr val="222222"/>
-                          </a:solidFill>
-                          <a:latin typeface="Microsoft YaHei"/>
-                          <a:ea typeface="Microsoft YaHei"/>
-                        </a:rPr>
-                        <a:t>旋转 rx,ry,rz (度)</a:t>
-                      </a:r>
-                    </a:p>
-                  </a:txBody>
-                  <a:tcPr anchor="ctr" marT="25400" marB="25400">
-                    <a:solidFill>
-                      <a:srgbClr val="E9EEF6"/>
-                    </a:solidFill>
-                  </a:tcPr>
-                </a:tc>
-                <a:tc>
-                  <a:txBody>
-                    <a:bodyPr/>
-                    <a:lstStyle/>
-                    <a:p>
-                      <a:pPr algn="r"/>
-                      <a:r>
-                        <a:rPr sz="1200" b="0">
-                          <a:solidFill>
-                            <a:srgbClr val="222222"/>
-                          </a:solidFill>
-                          <a:latin typeface="Microsoft YaHei"/>
-                          <a:ea typeface="Microsoft YaHei"/>
-                        </a:rPr>
-                        <a:t>-0.87, 0.37, 0.16</a:t>
-                      </a:r>
-                    </a:p>
-                  </a:txBody>
-                  <a:tcPr anchor="ctr" marT="25400" marB="25400">
-                    <a:solidFill>
-                      <a:srgbClr val="E9EEF6"/>
-                    </a:solidFill>
-                  </a:tcPr>
-                </a:tc>
-              </a:tr>
-              <a:tr h="420624">
-                <a:tc>
-                  <a:txBody>
-                    <a:bodyPr/>
-                    <a:lstStyle/>
-                    <a:p>
-                      <a:r>
-                        <a:rPr sz="1200" b="0">
-                          <a:solidFill>
-                            <a:srgbClr val="222222"/>
-                          </a:solidFill>
-                          <a:latin typeface="Microsoft YaHei"/>
-                          <a:ea typeface="Microsoft YaHei"/>
-                        </a:rPr>
-                        <a:t>骨 Dice（前→后）</a:t>
-                      </a:r>
-                    </a:p>
-                  </a:txBody>
-                  <a:tcPr anchor="ctr" marT="25400" marB="25400">
+                  <a:tcPr anchor="ctr" marL="101600" marR="101600" marT="38100" marB="38100">
                     <a:solidFill>
                       <a:srgbClr val="FFFFFF"/>
                     </a:solidFill>
@@ -7534,69 +7718,20 @@
                     <a:p>
                       <a:pPr algn="r"/>
                       <a:r>
-                        <a:rPr sz="1200" b="0">
+                        <a:rPr sz="1500" b="0">
                           <a:solidFill>
-                            <a:srgbClr val="222222"/>
+                            <a:srgbClr val="1F2937"/>
                           </a:solidFill>
                           <a:latin typeface="Microsoft YaHei"/>
                           <a:ea typeface="Microsoft YaHei"/>
                         </a:rPr>
-                        <a:t>0.128→0.832</a:t>
+                        <a:t>负值 0.0%</a:t>
                       </a:r>
                     </a:p>
                   </a:txBody>
-                  <a:tcPr anchor="ctr" marT="25400" marB="25400">
+                  <a:tcPr anchor="ctr" marL="101600" marR="101600" marT="38100" marB="38100">
                     <a:solidFill>
                       <a:srgbClr val="FFFFFF"/>
-                    </a:solidFill>
-                  </a:tcPr>
-                </a:tc>
-              </a:tr>
-              <a:tr h="420624">
-                <a:tc>
-                  <a:txBody>
-                    <a:bodyPr/>
-                    <a:lstStyle/>
-                    <a:p>
-                      <a:r>
-                        <a:rPr sz="1200" b="0">
-                          <a:solidFill>
-                            <a:srgbClr val="222222"/>
-                          </a:solidFill>
-                          <a:latin typeface="Microsoft YaHei"/>
-                          <a:ea typeface="Microsoft YaHei"/>
-                        </a:rPr>
-                        <a:t>Jacobian min / 负值占比</a:t>
-                      </a:r>
-                    </a:p>
-                  </a:txBody>
-                  <a:tcPr anchor="ctr" marT="25400" marB="25400">
-                    <a:solidFill>
-                      <a:srgbClr val="E9EEF6"/>
-                    </a:solidFill>
-                  </a:tcPr>
-                </a:tc>
-                <a:tc>
-                  <a:txBody>
-                    <a:bodyPr/>
-                    <a:lstStyle/>
-                    <a:p>
-                      <a:pPr algn="r"/>
-                      <a:r>
-                        <a:rPr sz="1200" b="0">
-                          <a:solidFill>
-                            <a:srgbClr val="222222"/>
-                          </a:solidFill>
-                          <a:latin typeface="Microsoft YaHei"/>
-                          <a:ea typeface="Microsoft YaHei"/>
-                        </a:rPr>
-                        <a:t>0.506 / 0.00%</a:t>
-                      </a:r>
-                    </a:p>
-                  </a:txBody>
-                  <a:tcPr anchor="ctr" marT="25400" marB="25400">
-                    <a:solidFill>
-                      <a:srgbClr val="E9EEF6"/>
                     </a:solidFill>
                   </a:tcPr>
                 </a:tc>
@@ -7613,8 +7748,8 @@
         </p:nvSpPr>
         <p:spPr>
           <a:xfrm>
-            <a:off x="6400800" y="5349240"/>
-            <a:ext cx="5394960" cy="1005840"/>
+            <a:off x="6309360" y="5074920"/>
+            <a:ext cx="5394960" cy="1188720"/>
           </a:xfrm>
           <a:prstGeom prst="rect">
             <a:avLst/>
@@ -7628,6 +7763,9 @@
           <a:lstStyle/>
           <a:p>
             <a:pPr>
+              <a:lnSpc>
+                <a:spcPct val="120000"/>
+              </a:lnSpc>
               <a:spcAft>
                 <a:spcPts val="1000"/>
               </a:spcAft>
@@ -7635,16 +7773,19 @@
             <a:r>
               <a:rPr sz="1400" b="0">
                 <a:solidFill>
-                  <a:srgbClr val="222222"/>
+                  <a:srgbClr val="1F2937"/>
                 </a:solidFill>
                 <a:latin typeface="Microsoft YaHei"/>
                 <a:ea typeface="Microsoft YaHei"/>
               </a:rPr>
-              <a:t>▪ 骨 Dice 独立于优化目标，证明真实结构对齐</a:t>
+              <a:t>▪  骨 Dice 独立于优化目标，证明真实结构对齐</a:t>
             </a:r>
           </a:p>
           <a:p>
             <a:pPr>
+              <a:lnSpc>
+                <a:spcPct val="120000"/>
+              </a:lnSpc>
               <a:spcAft>
                 <a:spcPts val="1000"/>
               </a:spcAft>
@@ -7652,12 +7793,12 @@
             <a:r>
               <a:rPr sz="1400" b="0">
                 <a:solidFill>
-                  <a:srgbClr val="222222"/>
+                  <a:srgbClr val="1F2937"/>
                 </a:solidFill>
                 <a:latin typeface="Microsoft YaHei"/>
                 <a:ea typeface="Microsoft YaHei"/>
               </a:rPr>
-              <a:t>▪ 刚体为主结果；形变仅小幅细化</a:t>
+              <a:t>▪  刚体为主结果，形变为受控的小幅细化（Jacobian 全正、无折叠）</a:t>
             </a:r>
           </a:p>
         </p:txBody>
@@ -7689,7 +7830,7 @@
         <p:spPr>
           <a:xfrm>
             <a:off x="0" y="0"/>
-            <a:ext cx="12191695" cy="201168"/>
+            <a:ext cx="12191695" cy="109728"/>
           </a:xfrm>
           <a:prstGeom prst="rect">
             <a:avLst/>
@@ -7700,6 +7841,7 @@
           <a:ln>
             <a:noFill/>
           </a:ln>
+          <a:effectLst/>
         </p:spPr>
         <p:style>
           <a:lnRef idx="1">
@@ -7731,8 +7873,8 @@
         </p:nvSpPr>
         <p:spPr>
           <a:xfrm>
-            <a:off x="502920" y="384048"/>
-            <a:ext cx="11155680" cy="822960"/>
+            <a:off x="640080" y="310896"/>
+            <a:ext cx="10911535" cy="777240"/>
           </a:xfrm>
           <a:prstGeom prst="rect">
             <a:avLst/>
@@ -7746,7 +7888,7 @@
           <a:lstStyle/>
           <a:p>
             <a:r>
-              <a:rPr sz="2800" b="1">
+              <a:rPr sz="3000" b="1">
                 <a:solidFill>
                   <a:srgbClr val="1F3B6E"/>
                 </a:solidFill>
@@ -7766,8 +7908,8 @@
         </p:nvSpPr>
         <p:spPr>
           <a:xfrm>
-            <a:off x="502920" y="6419088"/>
-            <a:ext cx="5486400" cy="365760"/>
+            <a:off x="640080" y="6437376"/>
+            <a:ext cx="5486400" cy="329184"/>
           </a:xfrm>
           <a:prstGeom prst="rect">
             <a:avLst/>
@@ -7781,14 +7923,14 @@
           <a:lstStyle/>
           <a:p>
             <a:r>
-              <a:rPr sz="1000" b="0">
+              <a:rPr sz="1100" b="0">
                 <a:solidFill>
-                  <a:srgbClr val="5A5A5A"/>
+                  <a:srgbClr val="6B7280"/>
                 </a:solidFill>
                 <a:latin typeface="Microsoft YaHei"/>
                 <a:ea typeface="Microsoft YaHei"/>
               </a:rPr>
-              <a:t>CBCT → pCT 配准 · 病例 M24557</a:t>
+              <a:t>病例 M24557</a:t>
             </a:r>
           </a:p>
         </p:txBody>
@@ -7801,8 +7943,8 @@
         </p:nvSpPr>
         <p:spPr>
           <a:xfrm>
-            <a:off x="10789920" y="6419088"/>
-            <a:ext cx="914400" cy="365760"/>
+            <a:off x="10637215" y="6437376"/>
+            <a:ext cx="914400" cy="329184"/>
           </a:xfrm>
           <a:prstGeom prst="rect">
             <a:avLst/>
@@ -7817,9 +7959,9 @@
           <a:p>
             <a:pPr algn="r"/>
             <a:r>
-              <a:rPr sz="1000" b="0">
+              <a:rPr sz="1100" b="0">
                 <a:solidFill>
-                  <a:srgbClr val="5A5A5A"/>
+                  <a:srgbClr val="6B7280"/>
                 </a:solidFill>
                 <a:latin typeface="Microsoft YaHei"/>
                 <a:ea typeface="Microsoft YaHei"/>
@@ -7845,12 +7987,17 @@
         </p:blipFill>
         <p:spPr>
           <a:xfrm>
-            <a:off x="457200" y="2402378"/>
-            <a:ext cx="6400800" cy="2327563"/>
+            <a:off x="640080" y="2373283"/>
+            <a:ext cx="6309360" cy="2294312"/>
           </a:xfrm>
           <a:prstGeom prst="rect">
             <a:avLst/>
           </a:prstGeom>
+          <a:ln w="9525">
+            <a:solidFill>
+              <a:srgbClr val="E5E7EB"/>
+            </a:solidFill>
+          </a:ln>
         </p:spPr>
       </p:pic>
       <p:pic>
@@ -7869,12 +8016,17 @@
         </p:blipFill>
         <p:spPr>
           <a:xfrm>
-            <a:off x="7040880" y="1409160"/>
-            <a:ext cx="4754880" cy="4313998"/>
+            <a:off x="7040880" y="1446402"/>
+            <a:ext cx="4572000" cy="4148075"/>
           </a:xfrm>
           <a:prstGeom prst="rect">
             <a:avLst/>
           </a:prstGeom>
+          <a:ln w="9525">
+            <a:solidFill>
+              <a:srgbClr val="E5E7EB"/>
+            </a:solidFill>
+          </a:ln>
         </p:spPr>
       </p:pic>
       <p:sp>
@@ -7885,8 +8037,8 @@
         </p:nvSpPr>
         <p:spPr>
           <a:xfrm>
-            <a:off x="548640" y="5806440"/>
-            <a:ext cx="10972800" cy="640080"/>
+            <a:off x="640080" y="5806440"/>
+            <a:ext cx="10972800" cy="548640"/>
           </a:xfrm>
           <a:prstGeom prst="rect">
             <a:avLst/>
@@ -7900,6 +8052,9 @@
           <a:lstStyle/>
           <a:p>
             <a:pPr>
+              <a:lnSpc>
+                <a:spcPct val="120000"/>
+              </a:lnSpc>
               <a:spcAft>
                 <a:spcPts val="1000"/>
               </a:spcAft>
@@ -7907,12 +8062,12 @@
             <a:r>
               <a:rPr sz="1500" b="0">
                 <a:solidFill>
-                  <a:srgbClr val="222222"/>
+                  <a:srgbClr val="1F2937"/>
                 </a:solidFill>
                 <a:latin typeface="Microsoft YaHei"/>
                 <a:ea typeface="Microsoft YaHei"/>
               </a:rPr>
-              <a:t>▪ 形变场 Jacobian 处处为正、无折叠（微分同胚）</a:t>
+              <a:t>▪  形变场 Jacobian 处处为正、无折叠（微分同胚）</a:t>
             </a:r>
           </a:p>
         </p:txBody>

--- a/results_sample/CBCT_pCT_配准汇报.pptx
+++ b/results_sample/CBCT_pCT_配准汇报.pptx
@@ -4079,7 +4079,7 @@
       <p:grpSpPr/>
       <p:pic>
         <p:nvPicPr>
-          <p:cNvPr id="2" name="Picture 1" descr="checkerboard.png.cover.png"/>
+          <p:cNvPr id="2" name="Picture 1" descr="hero.png.cover.png"/>
           <p:cNvPicPr>
             <a:picLocks noChangeAspect="1"/>
           </p:cNvPicPr>
@@ -4154,7 +4154,7 @@
         <p:spPr>
           <a:xfrm>
             <a:off x="5120640" y="2148840"/>
-            <a:ext cx="6583680" cy="2926080"/>
+            <a:ext cx="6583680" cy="1554480"/>
           </a:xfrm>
           <a:prstGeom prst="rect">
             <a:avLst/>
@@ -4190,11 +4190,34 @@
               <a:t>刚体配准为主 · 受控微分同胚形变细化</a:t>
             </a:r>
           </a:p>
+        </p:txBody>
+      </p:sp>
+      <p:sp>
+        <p:nvSpPr>
+          <p:cNvPr id="5" name="TextBox 4"/>
+          <p:cNvSpPr txBox="1"/>
+          <p:nvPr/>
+        </p:nvSpPr>
+        <p:spPr>
+          <a:xfrm>
+            <a:off x="5120640" y="3703320"/>
+            <a:ext cx="6583680" cy="1188720"/>
+          </a:xfrm>
+          <a:prstGeom prst="rect">
+            <a:avLst/>
+          </a:prstGeom>
+          <a:noFill/>
+        </p:spPr>
+        <p:txBody>
+          <a:bodyPr wrap="square">
+            <a:spAutoFit/>
+          </a:bodyPr>
+          <a:lstStyle/>
           <a:p>
             <a:pPr>
-              <a:spcBef>
-                <a:spcPts val="400"/>
-              </a:spcBef>
+              <a:spcAft>
+                <a:spcPts val="300"/>
+              </a:spcAft>
             </a:pPr>
             <a:r>
               <a:rPr sz="1400" b="0">
@@ -4209,9 +4232,9 @@
           </a:p>
           <a:p>
             <a:pPr>
-              <a:spcBef>
-                <a:spcPts val="400"/>
-              </a:spcBef>
+              <a:spcAft>
+                <a:spcPts val="300"/>
+              </a:spcAft>
             </a:pPr>
             <a:r>
               <a:rPr sz="1400" b="0">
@@ -4226,9 +4249,9 @@
           </a:p>
           <a:p>
             <a:pPr>
-              <a:spcBef>
-                <a:spcPts val="400"/>
-              </a:spcBef>
+              <a:spcAft>
+                <a:spcPts val="300"/>
+              </a:spcAft>
             </a:pPr>
             <a:r>
               <a:rPr sz="1400" b="0">
@@ -4245,14 +4268,14 @@
       </p:sp>
       <p:sp>
         <p:nvSpPr>
-          <p:cNvPr id="5" name="Rectangle 4"/>
+          <p:cNvPr id="6" name="Rectangle 5"/>
           <p:cNvSpPr/>
           <p:nvPr/>
         </p:nvSpPr>
         <p:spPr>
           <a:xfrm>
-            <a:off x="5138928" y="3383280"/>
-            <a:ext cx="2011680" cy="36576"/>
+            <a:off x="5138928" y="4983480"/>
+            <a:ext cx="2011680" cy="32004"/>
           </a:xfrm>
           <a:prstGeom prst="rect">
             <a:avLst/>
@@ -4463,8 +4486,8 @@
         </p:nvSpPr>
         <p:spPr>
           <a:xfrm>
-            <a:off x="640080" y="1645920"/>
-            <a:ext cx="10972800" cy="4206240"/>
+            <a:off x="640080" y="2103120"/>
+            <a:ext cx="6675120" cy="3291840"/>
           </a:xfrm>
           <a:prstGeom prst="rect">
             <a:avLst/>
@@ -4477,13 +4500,15 @@
           </a:bodyPr>
           <a:lstStyle/>
           <a:p>
-            <a:pPr>
+            <a:pPr marL="254000" indent="-254000">
               <a:lnSpc>
                 <a:spcPct val="120000"/>
               </a:lnSpc>
               <a:spcAft>
                 <a:spcPts val="1000"/>
               </a:spcAft>
+              <a:buFont typeface="Microsoft YaHei"/>
+              <a:buChar char="▪"/>
             </a:pPr>
             <a:r>
               <a:rPr sz="1800" b="0">
@@ -4493,17 +4518,19 @@
                 <a:latin typeface="Microsoft YaHei"/>
                 <a:ea typeface="Microsoft YaHei"/>
               </a:rPr>
-              <a:t>▪  刚体为主结果，形变为受控的小幅细化（Jacobian 全正、无折叠）</a:t>
-            </a:r>
-          </a:p>
-          <a:p>
-            <a:pPr>
+              <a:t>刚体为主结果，形变为受控的小幅细化（Jacobian 全正、无折叠）</a:t>
+            </a:r>
+          </a:p>
+          <a:p>
+            <a:pPr marL="254000" indent="-254000">
               <a:lnSpc>
                 <a:spcPct val="120000"/>
               </a:lnSpc>
               <a:spcAft>
                 <a:spcPts val="1000"/>
               </a:spcAft>
+              <a:buFont typeface="Microsoft YaHei"/>
+              <a:buChar char="▪"/>
             </a:pPr>
             <a:r>
               <a:rPr sz="1800" b="0">
@@ -4513,17 +4540,19 @@
                 <a:latin typeface="Microsoft YaHei"/>
                 <a:ea typeface="Microsoft YaHei"/>
               </a:rPr>
-              <a:t>▪  针对 CBCT 物理特性：稳健初始化 / LNCC / FOV 掩膜 / 真刚体</a:t>
-            </a:r>
-          </a:p>
-          <a:p>
-            <a:pPr>
+              <a:t>针对 CBCT 物理特性：稳健初始化 / LNCC / FOV 掩膜 / 真刚体</a:t>
+            </a:r>
+          </a:p>
+          <a:p>
+            <a:pPr marL="254000" indent="-254000">
               <a:lnSpc>
                 <a:spcPct val="120000"/>
               </a:lnSpc>
               <a:spcAft>
                 <a:spcPts val="1000"/>
               </a:spcAft>
+              <a:buFont typeface="Microsoft YaHei"/>
+              <a:buChar char="▪"/>
             </a:pPr>
             <a:r>
               <a:rPr sz="1800" b="0">
@@ -4533,17 +4562,19 @@
                 <a:latin typeface="Microsoft YaHei"/>
                 <a:ea typeface="Microsoft YaHei"/>
               </a:rPr>
-              <a:t>▪  独立骨 Dice 验证：0.128 → 0.832（仅刚体）</a:t>
-            </a:r>
-          </a:p>
-          <a:p>
-            <a:pPr>
+              <a:t>独立骨 Dice 验证：0.128 → 0.832（仅刚体）</a:t>
+            </a:r>
+          </a:p>
+          <a:p>
+            <a:pPr marL="254000" indent="-254000">
               <a:lnSpc>
                 <a:spcPct val="120000"/>
               </a:lnSpc>
               <a:spcAft>
                 <a:spcPts val="1000"/>
               </a:spcAft>
+              <a:buFont typeface="Microsoft YaHei"/>
+              <a:buChar char="▪"/>
             </a:pPr>
             <a:r>
               <a:rPr sz="1800" b="0">
@@ -4553,7 +4584,72 @@
                 <a:latin typeface="Microsoft YaHei"/>
                 <a:ea typeface="Microsoft YaHei"/>
               </a:rPr>
-              <a:t>▪  局限：3mm 网格、未做散射/HU 校正、单病例、未做标志点 TRE</a:t>
+              <a:t>局限：3mm 网格、未做散射/HU 校正、单病例、未做标志点 TRE</a:t>
+            </a:r>
+          </a:p>
+        </p:txBody>
+      </p:sp>
+      <p:pic>
+        <p:nvPicPr>
+          <p:cNvPr id="7" name="Picture 6" descr="hero.png"/>
+          <p:cNvPicPr>
+            <a:picLocks noChangeAspect="1"/>
+          </p:cNvPicPr>
+          <p:nvPr/>
+        </p:nvPicPr>
+        <p:blipFill>
+          <a:blip r:embed="rId2"/>
+          <a:stretch>
+            <a:fillRect/>
+          </a:stretch>
+        </p:blipFill>
+        <p:spPr>
+          <a:xfrm>
+            <a:off x="7726680" y="1828800"/>
+            <a:ext cx="3657600" cy="3657600"/>
+          </a:xfrm>
+          <a:prstGeom prst="rect">
+            <a:avLst/>
+          </a:prstGeom>
+          <a:ln w="9525">
+            <a:solidFill>
+              <a:srgbClr val="E5E7EB"/>
+            </a:solidFill>
+          </a:ln>
+        </p:spPr>
+      </p:pic>
+      <p:sp>
+        <p:nvSpPr>
+          <p:cNvPr id="8" name="TextBox 7"/>
+          <p:cNvSpPr txBox="1"/>
+          <p:nvPr/>
+        </p:nvSpPr>
+        <p:spPr>
+          <a:xfrm>
+            <a:off x="7589520" y="5504688"/>
+            <a:ext cx="3931920" cy="310896"/>
+          </a:xfrm>
+          <a:prstGeom prst="rect">
+            <a:avLst/>
+          </a:prstGeom>
+          <a:noFill/>
+        </p:spPr>
+        <p:txBody>
+          <a:bodyPr wrap="square">
+            <a:spAutoFit/>
+          </a:bodyPr>
+          <a:lstStyle/>
+          <a:p>
+            <a:pPr algn="ctr"/>
+            <a:r>
+              <a:rPr sz="1300" b="0">
+                <a:solidFill>
+                  <a:srgbClr val="6B7280"/>
+                </a:solidFill>
+                <a:latin typeface="Microsoft YaHei"/>
+                <a:ea typeface="Microsoft YaHei"/>
+              </a:rPr>
+              <a:t>配准后（轴位：pCT + CBCT 骨结构）</a:t>
             </a:r>
           </a:p>
         </p:txBody>
@@ -4742,8 +4838,8 @@
         </p:blipFill>
         <p:spPr>
           <a:xfrm>
-            <a:off x="640080" y="1370152"/>
-            <a:ext cx="6492240" cy="4392014"/>
+            <a:off x="640080" y="1493871"/>
+            <a:ext cx="6126480" cy="4144576"/>
           </a:xfrm>
           <a:prstGeom prst="rect">
             <a:avLst/>
@@ -4764,7 +4860,7 @@
         <p:spPr>
           <a:xfrm>
             <a:off x="640080" y="5870448"/>
-            <a:ext cx="6492240" cy="310896"/>
+            <a:ext cx="6126480" cy="310896"/>
           </a:xfrm>
           <a:prstGeom prst="rect">
             <a:avLst/>
@@ -4800,8 +4896,8 @@
           <p:nvPr/>
         </p:nvGraphicFramePr>
         <p:xfrm>
-          <a:off x="7406640" y="1417320"/>
-          <a:ext cx="4114800" cy="2011680"/>
+          <a:off x="6903720" y="1417320"/>
+          <a:ext cx="4617719" cy="2011680"/>
         </p:xfrm>
         <a:graphic>
           <a:graphicData uri="http://schemas.openxmlformats.org/drawingml/2006/table">
@@ -4810,9 +4906,9 @@
                 <a:tableStyleId>{2D5ABB26-0587-4C30-8999-92F81FD0307C}</a:tableStyleId>
               </a:tblPr>
               <a:tblGrid>
-                <a:gridCol w="1097280"/>
-                <a:gridCol w="1554480"/>
-                <a:gridCol w="1463040"/>
+                <a:gridCol w="914400"/>
+                <a:gridCol w="1874519"/>
+                <a:gridCol w="1828800"/>
               </a:tblGrid>
               <a:tr h="402336">
                 <a:tc>
@@ -4821,7 +4917,7 @@
                     <a:lstStyle/>
                     <a:p>
                       <a:r>
-                        <a:rPr sz="1500" b="1">
+                        <a:rPr sz="1200" b="1">
                           <a:solidFill>
                             <a:srgbClr val="FFFFFF"/>
                           </a:solidFill>
@@ -4844,7 +4940,7 @@
                     <a:lstStyle/>
                     <a:p>
                       <a:r>
-                        <a:rPr sz="1500" b="1">
+                        <a:rPr sz="1200" b="1">
                           <a:solidFill>
                             <a:srgbClr val="FFFFFF"/>
                           </a:solidFill>
@@ -4867,7 +4963,7 @@
                     <a:lstStyle/>
                     <a:p>
                       <a:r>
-                        <a:rPr sz="1500" b="1">
+                        <a:rPr sz="1200" b="1">
                           <a:solidFill>
                             <a:srgbClr val="FFFFFF"/>
                           </a:solidFill>
@@ -4892,7 +4988,7 @@
                     <a:lstStyle/>
                     <a:p>
                       <a:r>
-                        <a:rPr sz="1500" b="0">
+                        <a:rPr sz="1200" b="0">
                           <a:solidFill>
                             <a:srgbClr val="1F2937"/>
                           </a:solidFill>
@@ -4915,7 +5011,7 @@
                     <a:lstStyle/>
                     <a:p>
                       <a:r>
-                        <a:rPr sz="1500" b="0">
+                        <a:rPr sz="1200" b="0">
                           <a:solidFill>
                             <a:srgbClr val="1F2937"/>
                           </a:solidFill>
@@ -4938,7 +5034,7 @@
                     <a:lstStyle/>
                     <a:p>
                       <a:r>
-                        <a:rPr sz="1500" b="0">
+                        <a:rPr sz="1200" b="0">
                           <a:solidFill>
                             <a:srgbClr val="1F2937"/>
                           </a:solidFill>
@@ -4963,7 +5059,7 @@
                     <a:lstStyle/>
                     <a:p>
                       <a:r>
-                        <a:rPr sz="1500" b="0">
+                        <a:rPr sz="1200" b="0">
                           <a:solidFill>
                             <a:srgbClr val="1F2937"/>
                           </a:solidFill>
@@ -4986,7 +5082,7 @@
                     <a:lstStyle/>
                     <a:p>
                       <a:r>
-                        <a:rPr sz="1500" b="0">
+                        <a:rPr sz="1200" b="0">
                           <a:solidFill>
                             <a:srgbClr val="1F2937"/>
                           </a:solidFill>
@@ -5009,7 +5105,7 @@
                     <a:lstStyle/>
                     <a:p>
                       <a:r>
-                        <a:rPr sz="1500" b="0">
+                        <a:rPr sz="1200" b="0">
                           <a:solidFill>
                             <a:srgbClr val="1F2937"/>
                           </a:solidFill>
@@ -5034,7 +5130,7 @@
                     <a:lstStyle/>
                     <a:p>
                       <a:r>
-                        <a:rPr sz="1500" b="0">
+                        <a:rPr sz="1200" b="0">
                           <a:solidFill>
                             <a:srgbClr val="1F2937"/>
                           </a:solidFill>
@@ -5057,7 +5153,7 @@
                     <a:lstStyle/>
                     <a:p>
                       <a:r>
-                        <a:rPr sz="1500" b="0">
+                        <a:rPr sz="1200" b="0">
                           <a:solidFill>
                             <a:srgbClr val="1F2937"/>
                           </a:solidFill>
@@ -5080,7 +5176,7 @@
                     <a:lstStyle/>
                     <a:p>
                       <a:r>
-                        <a:rPr sz="1500" b="0">
+                        <a:rPr sz="1200" b="0">
                           <a:solidFill>
                             <a:srgbClr val="1F2937"/>
                           </a:solidFill>
@@ -5105,7 +5201,7 @@
                     <a:lstStyle/>
                     <a:p>
                       <a:r>
-                        <a:rPr sz="1500" b="0">
+                        <a:rPr sz="1200" b="0">
                           <a:solidFill>
                             <a:srgbClr val="1F2937"/>
                           </a:solidFill>
@@ -5128,7 +5224,7 @@
                     <a:lstStyle/>
                     <a:p>
                       <a:r>
-                        <a:rPr sz="1500" b="0">
+                        <a:rPr sz="1200" b="0">
                           <a:solidFill>
                             <a:srgbClr val="1F2937"/>
                           </a:solidFill>
@@ -5151,7 +5247,7 @@
                     <a:lstStyle/>
                     <a:p>
                       <a:r>
-                        <a:rPr sz="1500" b="0">
+                        <a:rPr sz="1200" b="0">
                           <a:solidFill>
                             <a:srgbClr val="1F2937"/>
                           </a:solidFill>
@@ -5181,8 +5277,8 @@
         </p:nvSpPr>
         <p:spPr>
           <a:xfrm>
-            <a:off x="7406640" y="3794760"/>
-            <a:ext cx="4114800" cy="2194560"/>
+            <a:off x="6903720" y="3794760"/>
+            <a:ext cx="4617720" cy="2194560"/>
           </a:xfrm>
           <a:prstGeom prst="rect">
             <a:avLst/>
@@ -5195,13 +5291,15 @@
           </a:bodyPr>
           <a:lstStyle/>
           <a:p>
-            <a:pPr>
+            <a:pPr marL="254000" indent="-254000">
               <a:lnSpc>
                 <a:spcPct val="120000"/>
               </a:lnSpc>
               <a:spcAft>
                 <a:spcPts val="1000"/>
               </a:spcAft>
+              <a:buFont typeface="Microsoft YaHei"/>
+              <a:buChar char="▪"/>
             </a:pPr>
             <a:r>
               <a:rPr sz="1800" b="0">
@@ -5211,17 +5309,19 @@
                 <a:latin typeface="Microsoft YaHei"/>
                 <a:ea typeface="Microsoft YaHei"/>
               </a:rPr>
-              <a:t>▪  不同 Frame of Reference（坐标不重叠）</a:t>
-            </a:r>
-          </a:p>
-          <a:p>
-            <a:pPr>
+              <a:t>不同 Frame of Reference（坐标不重叠）</a:t>
+            </a:r>
+          </a:p>
+          <a:p>
+            <a:pPr marL="254000" indent="-254000">
               <a:lnSpc>
                 <a:spcPct val="120000"/>
               </a:lnSpc>
               <a:spcAft>
                 <a:spcPts val="1000"/>
               </a:spcAft>
+              <a:buFont typeface="Microsoft YaHei"/>
+              <a:buChar char="▪"/>
             </a:pPr>
             <a:r>
               <a:rPr sz="1800" b="0">
@@ -5231,17 +5331,19 @@
                 <a:latin typeface="Microsoft YaHei"/>
                 <a:ea typeface="Microsoft YaHei"/>
               </a:rPr>
-              <a:t>▪  灰度不一致（散射 / HU 标定差异）</a:t>
-            </a:r>
-          </a:p>
-          <a:p>
-            <a:pPr>
+              <a:t>灰度不一致（散射 / HU 标定差异）</a:t>
+            </a:r>
+          </a:p>
+          <a:p>
+            <a:pPr marL="254000" indent="-254000">
               <a:lnSpc>
                 <a:spcPct val="120000"/>
               </a:lnSpc>
               <a:spcAft>
                 <a:spcPts val="1000"/>
               </a:spcAft>
+              <a:buFont typeface="Microsoft YaHei"/>
+              <a:buChar char="▪"/>
             </a:pPr>
             <a:r>
               <a:rPr sz="1800" b="0">
@@ -5251,7 +5353,7 @@
                 <a:latin typeface="Microsoft YaHei"/>
                 <a:ea typeface="Microsoft YaHei"/>
               </a:rPr>
-              <a:t>▪  分辨率与 FOV 不同（CBCT 视野小）</a:t>
+              <a:t>分辨率与 FOV 不同（CBCT 视野小）</a:t>
             </a:r>
           </a:p>
         </p:txBody>
@@ -5475,13 +5577,15 @@
           </a:bodyPr>
           <a:lstStyle/>
           <a:p>
-            <a:pPr>
+            <a:pPr marL="254000" indent="-254000">
               <a:lnSpc>
                 <a:spcPct val="120000"/>
               </a:lnSpc>
               <a:spcAft>
                 <a:spcPts val="1000"/>
               </a:spcAft>
+              <a:buFont typeface="Microsoft YaHei"/>
+              <a:buChar char="▪"/>
             </a:pPr>
             <a:r>
               <a:rPr sz="1800" b="0">
@@ -5491,17 +5595,19 @@
                 <a:latin typeface="Microsoft YaHei"/>
                 <a:ea typeface="Microsoft YaHei"/>
               </a:rPr>
-              <a:t>▪  坐标系不同：z 相差约 800 mm，DICOM 头不能直接对齐</a:t>
-            </a:r>
-          </a:p>
-          <a:p>
-            <a:pPr>
+              <a:t>坐标系不同：z 相差约 800 mm，DICOM 头不能直接对齐</a:t>
+            </a:r>
+          </a:p>
+          <a:p>
+            <a:pPr marL="254000" indent="-254000">
               <a:lnSpc>
                 <a:spcPct val="120000"/>
               </a:lnSpc>
               <a:spcAft>
                 <a:spcPts val="1000"/>
               </a:spcAft>
+              <a:buFont typeface="Microsoft YaHei"/>
+              <a:buChar char="▪"/>
             </a:pPr>
             <a:r>
               <a:rPr sz="1800" b="0">
@@ -5511,17 +5617,19 @@
                 <a:latin typeface="Microsoft YaHei"/>
                 <a:ea typeface="Microsoft YaHei"/>
               </a:rPr>
-              <a:t>▪  散射 → cupping 伪影，软组织 HU 塌陷</a:t>
-            </a:r>
-          </a:p>
-          <a:p>
-            <a:pPr>
+              <a:t>散射 → cupping 伪影，软组织 HU 塌陷</a:t>
+            </a:r>
+          </a:p>
+          <a:p>
+            <a:pPr marL="254000" indent="-254000">
               <a:lnSpc>
                 <a:spcPct val="120000"/>
               </a:lnSpc>
               <a:spcAft>
                 <a:spcPts val="1000"/>
               </a:spcAft>
+              <a:buFont typeface="Microsoft YaHei"/>
+              <a:buChar char="▪"/>
             </a:pPr>
             <a:r>
               <a:rPr sz="1800" b="0">
@@ -5531,17 +5639,19 @@
                 <a:latin typeface="Microsoft YaHei"/>
                 <a:ea typeface="Microsoft YaHei"/>
               </a:rPr>
-              <a:t>▪  HU 标定不准，CBCT 与计划CT 不可直接比较</a:t>
-            </a:r>
-          </a:p>
-          <a:p>
-            <a:pPr>
+              <a:t>HU 标定不准，CBCT 与计划CT 不可直接比较</a:t>
+            </a:r>
+          </a:p>
+          <a:p>
+            <a:pPr marL="254000" indent="-254000">
               <a:lnSpc>
                 <a:spcPct val="120000"/>
               </a:lnSpc>
               <a:spcAft>
                 <a:spcPts val="1000"/>
               </a:spcAft>
+              <a:buFont typeface="Microsoft YaHei"/>
+              <a:buChar char="▪"/>
             </a:pPr>
             <a:r>
               <a:rPr sz="1800" b="0">
@@ -5551,7 +5661,7 @@
                 <a:latin typeface="Microsoft YaHei"/>
                 <a:ea typeface="Microsoft YaHei"/>
               </a:rPr>
-              <a:t>▪  FOV 截断：CBCT 视野小、边缘缺失</a:t>
+              <a:t>FOV 截断：CBCT 视野小、边缘缺失</a:t>
             </a:r>
           </a:p>
         </p:txBody>
@@ -5732,8 +5842,8 @@
         </p:nvSpPr>
         <p:spPr>
           <a:xfrm>
-            <a:off x="2447391" y="3509467"/>
-            <a:ext cx="384048" cy="21945"/>
+            <a:off x="2429103" y="3497580"/>
+            <a:ext cx="420623" cy="45720"/>
           </a:xfrm>
           <a:prstGeom prst="rect">
             <a:avLst/>
@@ -5770,25 +5880,23 @@
       </p:sp>
       <p:sp>
         <p:nvSpPr>
-          <p:cNvPr id="7" name="Rounded Rectangle 6"/>
+          <p:cNvPr id="7" name="Chevron 6"/>
           <p:cNvSpPr/>
           <p:nvPr/>
         </p:nvSpPr>
         <p:spPr>
           <a:xfrm>
-            <a:off x="527151" y="2743200"/>
-            <a:ext cx="1920240" cy="1554480"/>
-          </a:xfrm>
-          <a:prstGeom prst="roundRect">
+            <a:off x="2538831" y="3419856"/>
+            <a:ext cx="201168" cy="201168"/>
+          </a:xfrm>
+          <a:prstGeom prst="chevron">
             <a:avLst/>
           </a:prstGeom>
           <a:solidFill>
             <a:srgbClr val="1F3B6E"/>
           </a:solidFill>
-          <a:ln w="12700">
-            <a:solidFill>
-              <a:srgbClr val="1F3B6E"/>
-            </a:solidFill>
+          <a:ln>
+            <a:noFill/>
           </a:ln>
           <a:effectLst/>
         </p:spPr>
@@ -5807,43 +5915,34 @@
           </a:fontRef>
         </p:style>
         <p:txBody>
-          <a:bodyPr rtlCol="0" anchor="ctr" wrap="square"/>
+          <a:bodyPr rtlCol="0" anchor="ctr"/>
           <a:lstStyle/>
           <a:p>
             <a:pPr algn="ctr"/>
-            <a:r>
-              <a:rPr sz="1400" b="1">
-                <a:solidFill>
-                  <a:srgbClr val="FFFFFF"/>
-                </a:solidFill>
-                <a:latin typeface="Microsoft YaHei"/>
-                <a:ea typeface="Microsoft YaHei"/>
-              </a:rPr>
-              <a:t>① DICOM
-→ HU</a:t>
-            </a:r>
-          </a:p>
-        </p:txBody>
-      </p:sp>
-      <p:sp>
-        <p:nvSpPr>
-          <p:cNvPr id="8" name="Rectangle 7"/>
+          </a:p>
+        </p:txBody>
+      </p:sp>
+      <p:sp>
+        <p:nvSpPr>
+          <p:cNvPr id="8" name="Rounded Rectangle 7"/>
           <p:cNvSpPr/>
           <p:nvPr/>
         </p:nvSpPr>
         <p:spPr>
           <a:xfrm>
-            <a:off x="4751679" y="3509467"/>
-            <a:ext cx="384048" cy="21945"/>
-          </a:xfrm>
-          <a:prstGeom prst="rect">
+            <a:off x="527151" y="2743200"/>
+            <a:ext cx="1920240" cy="1554480"/>
+          </a:xfrm>
+          <a:prstGeom prst="roundRect">
             <a:avLst/>
           </a:prstGeom>
           <a:solidFill>
             <a:srgbClr val="1F3B6E"/>
           </a:solidFill>
-          <a:ln>
-            <a:noFill/>
+          <a:ln w="12700">
+            <a:solidFill>
+              <a:srgbClr val="1F3B6E"/>
+            </a:solidFill>
           </a:ln>
           <a:effectLst/>
         </p:spPr>
@@ -5862,34 +5961,43 @@
           </a:fontRef>
         </p:style>
         <p:txBody>
-          <a:bodyPr rtlCol="0" anchor="ctr"/>
+          <a:bodyPr rtlCol="0" anchor="ctr" wrap="square"/>
           <a:lstStyle/>
           <a:p>
             <a:pPr algn="ctr"/>
-          </a:p>
-        </p:txBody>
-      </p:sp>
-      <p:sp>
-        <p:nvSpPr>
-          <p:cNvPr id="9" name="Rounded Rectangle 8"/>
+            <a:r>
+              <a:rPr sz="1400" b="1">
+                <a:solidFill>
+                  <a:srgbClr val="FFFFFF"/>
+                </a:solidFill>
+                <a:latin typeface="Microsoft YaHei"/>
+                <a:ea typeface="Microsoft YaHei"/>
+              </a:rPr>
+              <a:t>① DICOM
+→ HU</a:t>
+            </a:r>
+          </a:p>
+        </p:txBody>
+      </p:sp>
+      <p:sp>
+        <p:nvSpPr>
+          <p:cNvPr id="9" name="Rectangle 8"/>
           <p:cNvSpPr/>
           <p:nvPr/>
         </p:nvSpPr>
         <p:spPr>
           <a:xfrm>
-            <a:off x="2831439" y="2743200"/>
-            <a:ext cx="1920240" cy="1554480"/>
-          </a:xfrm>
-          <a:prstGeom prst="roundRect">
+            <a:off x="4733391" y="3497580"/>
+            <a:ext cx="420623" cy="45720"/>
+          </a:xfrm>
+          <a:prstGeom prst="rect">
             <a:avLst/>
           </a:prstGeom>
           <a:solidFill>
             <a:srgbClr val="1F3B6E"/>
           </a:solidFill>
-          <a:ln w="12700">
-            <a:solidFill>
-              <a:srgbClr val="1F3B6E"/>
-            </a:solidFill>
+          <a:ln>
+            <a:noFill/>
           </a:ln>
           <a:effectLst/>
         </p:spPr>
@@ -5908,36 +6016,25 @@
           </a:fontRef>
         </p:style>
         <p:txBody>
-          <a:bodyPr rtlCol="0" anchor="ctr" wrap="square"/>
+          <a:bodyPr rtlCol="0" anchor="ctr"/>
           <a:lstStyle/>
           <a:p>
             <a:pPr algn="ctr"/>
-            <a:r>
-              <a:rPr sz="1400" b="1">
-                <a:solidFill>
-                  <a:srgbClr val="FFFFFF"/>
-                </a:solidFill>
-                <a:latin typeface="Microsoft YaHei"/>
-                <a:ea typeface="Microsoft YaHei"/>
-              </a:rPr>
-              <a:t>② 立方体网格
-+ 初始对齐</a:t>
-            </a:r>
-          </a:p>
-        </p:txBody>
-      </p:sp>
-      <p:sp>
-        <p:nvSpPr>
-          <p:cNvPr id="10" name="Rectangle 9"/>
+          </a:p>
+        </p:txBody>
+      </p:sp>
+      <p:sp>
+        <p:nvSpPr>
+          <p:cNvPr id="10" name="Chevron 9"/>
           <p:cNvSpPr/>
           <p:nvPr/>
         </p:nvSpPr>
         <p:spPr>
           <a:xfrm>
-            <a:off x="7055967" y="3509467"/>
-            <a:ext cx="384048" cy="21945"/>
-          </a:xfrm>
-          <a:prstGeom prst="rect">
+            <a:off x="4843119" y="3419856"/>
+            <a:ext cx="201168" cy="201168"/>
+          </a:xfrm>
+          <a:prstGeom prst="chevron">
             <a:avLst/>
           </a:prstGeom>
           <a:solidFill>
@@ -5978,7 +6075,7 @@
         </p:nvSpPr>
         <p:spPr>
           <a:xfrm>
-            <a:off x="5135727" y="2743200"/>
+            <a:off x="2831439" y="2743200"/>
             <a:ext cx="1920240" cy="1554480"/>
           </a:xfrm>
           <a:prstGeom prst="roundRect">
@@ -6021,8 +6118,8 @@
                 <a:latin typeface="Microsoft YaHei"/>
                 <a:ea typeface="Microsoft YaHei"/>
               </a:rPr>
-              <a:t>③ 多分辨率
-刚体 LNCC</a:t>
+              <a:t>② 立方体网格
++ 初始对齐</a:t>
             </a:r>
           </a:p>
         </p:txBody>
@@ -6035,8 +6132,8 @@
         </p:nvSpPr>
         <p:spPr>
           <a:xfrm>
-            <a:off x="9360255" y="3509467"/>
-            <a:ext cx="384048" cy="21945"/>
+            <a:off x="7037679" y="3497580"/>
+            <a:ext cx="420623" cy="45720"/>
           </a:xfrm>
           <a:prstGeom prst="rect">
             <a:avLst/>
@@ -6073,25 +6170,23 @@
       </p:sp>
       <p:sp>
         <p:nvSpPr>
-          <p:cNvPr id="13" name="Rounded Rectangle 12"/>
+          <p:cNvPr id="13" name="Chevron 12"/>
           <p:cNvSpPr/>
           <p:nvPr/>
         </p:nvSpPr>
         <p:spPr>
           <a:xfrm>
-            <a:off x="7440015" y="2743200"/>
-            <a:ext cx="1920240" cy="1554480"/>
-          </a:xfrm>
-          <a:prstGeom prst="roundRect">
+            <a:off x="7147407" y="3419856"/>
+            <a:ext cx="201168" cy="201168"/>
+          </a:xfrm>
+          <a:prstGeom prst="chevron">
             <a:avLst/>
           </a:prstGeom>
           <a:solidFill>
             <a:srgbClr val="1F3B6E"/>
           </a:solidFill>
-          <a:ln w="12700">
-            <a:solidFill>
-              <a:srgbClr val="1F3B6E"/>
-            </a:solidFill>
+          <a:ln>
+            <a:noFill/>
           </a:ln>
           <a:effectLst/>
         </p:spPr>
@@ -6110,21 +6205,10 @@
           </a:fontRef>
         </p:style>
         <p:txBody>
-          <a:bodyPr rtlCol="0" anchor="ctr" wrap="square"/>
+          <a:bodyPr rtlCol="0" anchor="ctr"/>
           <a:lstStyle/>
           <a:p>
             <a:pPr algn="ctr"/>
-            <a:r>
-              <a:rPr sz="1400" b="1">
-                <a:solidFill>
-                  <a:srgbClr val="FFFFFF"/>
-                </a:solidFill>
-                <a:latin typeface="Microsoft YaHei"/>
-                <a:ea typeface="Microsoft YaHei"/>
-              </a:rPr>
-              <a:t>④ 受控形变
-微分同胚</a:t>
-            </a:r>
           </a:p>
         </p:txBody>
       </p:sp>
@@ -6136,7 +6220,7 @@
         </p:nvSpPr>
         <p:spPr>
           <a:xfrm>
-            <a:off x="9744303" y="2743200"/>
+            <a:off x="5135727" y="2743200"/>
             <a:ext cx="1920240" cy="1554480"/>
           </a:xfrm>
           <a:prstGeom prst="roundRect">
@@ -6179,6 +6263,208 @@
                 <a:latin typeface="Microsoft YaHei"/>
                 <a:ea typeface="Microsoft YaHei"/>
               </a:rPr>
+              <a:t>③ 多分辨率
+刚体 LNCC</a:t>
+            </a:r>
+          </a:p>
+        </p:txBody>
+      </p:sp>
+      <p:sp>
+        <p:nvSpPr>
+          <p:cNvPr id="15" name="Rectangle 14"/>
+          <p:cNvSpPr/>
+          <p:nvPr/>
+        </p:nvSpPr>
+        <p:spPr>
+          <a:xfrm>
+            <a:off x="9341967" y="3497580"/>
+            <a:ext cx="420623" cy="45720"/>
+          </a:xfrm>
+          <a:prstGeom prst="rect">
+            <a:avLst/>
+          </a:prstGeom>
+          <a:solidFill>
+            <a:srgbClr val="1F3B6E"/>
+          </a:solidFill>
+          <a:ln>
+            <a:noFill/>
+          </a:ln>
+          <a:effectLst/>
+        </p:spPr>
+        <p:style>
+          <a:lnRef idx="1">
+            <a:schemeClr val="accent1"/>
+          </a:lnRef>
+          <a:fillRef idx="3">
+            <a:schemeClr val="accent1"/>
+          </a:fillRef>
+          <a:effectRef idx="2">
+            <a:schemeClr val="accent1"/>
+          </a:effectRef>
+          <a:fontRef idx="minor">
+            <a:schemeClr val="lt1"/>
+          </a:fontRef>
+        </p:style>
+        <p:txBody>
+          <a:bodyPr rtlCol="0" anchor="ctr"/>
+          <a:lstStyle/>
+          <a:p>
+            <a:pPr algn="ctr"/>
+          </a:p>
+        </p:txBody>
+      </p:sp>
+      <p:sp>
+        <p:nvSpPr>
+          <p:cNvPr id="16" name="Chevron 15"/>
+          <p:cNvSpPr/>
+          <p:nvPr/>
+        </p:nvSpPr>
+        <p:spPr>
+          <a:xfrm>
+            <a:off x="9451695" y="3419856"/>
+            <a:ext cx="201168" cy="201168"/>
+          </a:xfrm>
+          <a:prstGeom prst="chevron">
+            <a:avLst/>
+          </a:prstGeom>
+          <a:solidFill>
+            <a:srgbClr val="1F3B6E"/>
+          </a:solidFill>
+          <a:ln>
+            <a:noFill/>
+          </a:ln>
+          <a:effectLst/>
+        </p:spPr>
+        <p:style>
+          <a:lnRef idx="1">
+            <a:schemeClr val="accent1"/>
+          </a:lnRef>
+          <a:fillRef idx="3">
+            <a:schemeClr val="accent1"/>
+          </a:fillRef>
+          <a:effectRef idx="2">
+            <a:schemeClr val="accent1"/>
+          </a:effectRef>
+          <a:fontRef idx="minor">
+            <a:schemeClr val="lt1"/>
+          </a:fontRef>
+        </p:style>
+        <p:txBody>
+          <a:bodyPr rtlCol="0" anchor="ctr"/>
+          <a:lstStyle/>
+          <a:p>
+            <a:pPr algn="ctr"/>
+          </a:p>
+        </p:txBody>
+      </p:sp>
+      <p:sp>
+        <p:nvSpPr>
+          <p:cNvPr id="17" name="Rounded Rectangle 16"/>
+          <p:cNvSpPr/>
+          <p:nvPr/>
+        </p:nvSpPr>
+        <p:spPr>
+          <a:xfrm>
+            <a:off x="7440015" y="2743200"/>
+            <a:ext cx="1920240" cy="1554480"/>
+          </a:xfrm>
+          <a:prstGeom prst="roundRect">
+            <a:avLst/>
+          </a:prstGeom>
+          <a:solidFill>
+            <a:srgbClr val="1F3B6E"/>
+          </a:solidFill>
+          <a:ln w="12700">
+            <a:solidFill>
+              <a:srgbClr val="1F3B6E"/>
+            </a:solidFill>
+          </a:ln>
+          <a:effectLst/>
+        </p:spPr>
+        <p:style>
+          <a:lnRef idx="1">
+            <a:schemeClr val="accent1"/>
+          </a:lnRef>
+          <a:fillRef idx="3">
+            <a:schemeClr val="accent1"/>
+          </a:fillRef>
+          <a:effectRef idx="2">
+            <a:schemeClr val="accent1"/>
+          </a:effectRef>
+          <a:fontRef idx="minor">
+            <a:schemeClr val="lt1"/>
+          </a:fontRef>
+        </p:style>
+        <p:txBody>
+          <a:bodyPr rtlCol="0" anchor="ctr" wrap="square"/>
+          <a:lstStyle/>
+          <a:p>
+            <a:pPr algn="ctr"/>
+            <a:r>
+              <a:rPr sz="1400" b="1">
+                <a:solidFill>
+                  <a:srgbClr val="FFFFFF"/>
+                </a:solidFill>
+                <a:latin typeface="Microsoft YaHei"/>
+                <a:ea typeface="Microsoft YaHei"/>
+              </a:rPr>
+              <a:t>④ 受控形变
+微分同胚</a:t>
+            </a:r>
+          </a:p>
+        </p:txBody>
+      </p:sp>
+      <p:sp>
+        <p:nvSpPr>
+          <p:cNvPr id="18" name="Rounded Rectangle 17"/>
+          <p:cNvSpPr/>
+          <p:nvPr/>
+        </p:nvSpPr>
+        <p:spPr>
+          <a:xfrm>
+            <a:off x="9744303" y="2743200"/>
+            <a:ext cx="1920240" cy="1554480"/>
+          </a:xfrm>
+          <a:prstGeom prst="roundRect">
+            <a:avLst/>
+          </a:prstGeom>
+          <a:solidFill>
+            <a:srgbClr val="1F3B6E"/>
+          </a:solidFill>
+          <a:ln w="12700">
+            <a:solidFill>
+              <a:srgbClr val="1F3B6E"/>
+            </a:solidFill>
+          </a:ln>
+          <a:effectLst/>
+        </p:spPr>
+        <p:style>
+          <a:lnRef idx="1">
+            <a:schemeClr val="accent1"/>
+          </a:lnRef>
+          <a:fillRef idx="3">
+            <a:schemeClr val="accent1"/>
+          </a:fillRef>
+          <a:effectRef idx="2">
+            <a:schemeClr val="accent1"/>
+          </a:effectRef>
+          <a:fontRef idx="minor">
+            <a:schemeClr val="lt1"/>
+          </a:fontRef>
+        </p:style>
+        <p:txBody>
+          <a:bodyPr rtlCol="0" anchor="ctr" wrap="square"/>
+          <a:lstStyle/>
+          <a:p>
+            <a:pPr algn="ctr"/>
+            <a:r>
+              <a:rPr sz="1400" b="1">
+                <a:solidFill>
+                  <a:srgbClr val="FFFFFF"/>
+                </a:solidFill>
+                <a:latin typeface="Microsoft YaHei"/>
+                <a:ea typeface="Microsoft YaHei"/>
+              </a:rPr>
               <a:t>⑤ 输出
 变换/指标</a:t>
             </a:r>
@@ -6187,7 +6473,7 @@
       </p:sp>
       <p:sp>
         <p:nvSpPr>
-          <p:cNvPr id="15" name="TextBox 14"/>
+          <p:cNvPr id="19" name="TextBox 18"/>
           <p:cNvSpPr txBox="1"/>
           <p:nvPr/>
         </p:nvSpPr>
@@ -6207,13 +6493,15 @@
           </a:bodyPr>
           <a:lstStyle/>
           <a:p>
-            <a:pPr>
+            <a:pPr marL="254000" indent="-254000">
               <a:lnSpc>
                 <a:spcPct val="120000"/>
               </a:lnSpc>
               <a:spcAft>
                 <a:spcPts val="1000"/>
               </a:spcAft>
+              <a:buFont typeface="Microsoft YaHei"/>
+              <a:buChar char="▪"/>
             </a:pPr>
             <a:r>
               <a:rPr sz="1800" b="0">
@@ -6223,17 +6511,19 @@
                 <a:latin typeface="Microsoft YaHei"/>
                 <a:ea typeface="Microsoft YaHei"/>
               </a:rPr>
-              <a:t>▪  单对图像实例优化：无需训练数据 / 预训练模型</a:t>
-            </a:r>
-          </a:p>
-          <a:p>
-            <a:pPr>
+              <a:t>单对图像实例优化：无需训练数据 / 预训练模型</a:t>
+            </a:r>
+          </a:p>
+          <a:p>
+            <a:pPr marL="254000" indent="-254000">
               <a:lnSpc>
                 <a:spcPct val="120000"/>
               </a:lnSpc>
               <a:spcAft>
                 <a:spcPts val="1000"/>
               </a:spcAft>
+              <a:buFont typeface="Microsoft YaHei"/>
+              <a:buChar char="▪"/>
             </a:pPr>
             <a:r>
               <a:rPr sz="1800" b="0">
@@ -6243,7 +6533,7 @@
                 <a:latin typeface="Microsoft YaHei"/>
                 <a:ea typeface="Microsoft YaHei"/>
               </a:rPr>
-              <a:t>▪  全部基于 PyTorch 的 affine_grid / grid_sample 自行实现</a:t>
+              <a:t>全部基于 PyTorch 的 affine_grid / grid_sample 自行实现</a:t>
             </a:r>
           </a:p>
         </p:txBody>
@@ -6467,13 +6757,15 @@
           </a:bodyPr>
           <a:lstStyle/>
           <a:p>
-            <a:pPr>
+            <a:pPr marL="254000" indent="-254000">
               <a:lnSpc>
                 <a:spcPct val="120000"/>
               </a:lnSpc>
               <a:spcAft>
                 <a:spcPts val="1000"/>
               </a:spcAft>
+              <a:buFont typeface="Microsoft YaHei"/>
+              <a:buChar char="▪"/>
             </a:pPr>
             <a:r>
               <a:rPr sz="1800" b="0">
@@ -6483,17 +6775,19 @@
                 <a:latin typeface="Microsoft YaHei"/>
                 <a:ea typeface="Microsoft YaHei"/>
               </a:rPr>
-              <a:t>▪  立方体各向同性网格 → 归一化旋转 = 物理刚体</a:t>
-            </a:r>
-          </a:p>
-          <a:p>
-            <a:pPr>
+              <a:t>立方体各向同性网格 → 归一化旋转 = 物理刚体</a:t>
+            </a:r>
+          </a:p>
+          <a:p>
+            <a:pPr marL="254000" indent="-254000">
               <a:lnSpc>
                 <a:spcPct val="120000"/>
               </a:lnSpc>
               <a:spcAft>
                 <a:spcPts val="1000"/>
               </a:spcAft>
+              <a:buFont typeface="Microsoft YaHei"/>
+              <a:buChar char="▪"/>
             </a:pPr>
             <a:r>
               <a:rPr sz="1800" b="0">
@@ -6503,17 +6797,19 @@
                 <a:latin typeface="Microsoft YaHei"/>
                 <a:ea typeface="Microsoft YaHei"/>
               </a:rPr>
-              <a:t>▪  x / y：身体质心对齐</a:t>
-            </a:r>
-          </a:p>
-          <a:p>
-            <a:pPr>
+              <a:t>x / y：身体质心对齐</a:t>
+            </a:r>
+          </a:p>
+          <a:p>
+            <a:pPr marL="254000" indent="-254000">
               <a:lnSpc>
                 <a:spcPct val="120000"/>
               </a:lnSpc>
               <a:spcAft>
                 <a:spcPts val="1000"/>
               </a:spcAft>
+              <a:buFont typeface="Microsoft YaHei"/>
+              <a:buChar char="▪"/>
             </a:pPr>
             <a:r>
               <a:rPr sz="1800" b="0">
@@ -6523,17 +6819,19 @@
                 <a:latin typeface="Microsoft YaHei"/>
                 <a:ea typeface="Microsoft YaHei"/>
               </a:rPr>
-              <a:t>▪  z：横截面积剖面 1D 互相关</a:t>
-            </a:r>
-          </a:p>
-          <a:p>
-            <a:pPr>
+              <a:t>z：横截面积剖面 1D 互相关</a:t>
+            </a:r>
+          </a:p>
+          <a:p>
+            <a:pPr marL="254000" indent="-254000">
               <a:lnSpc>
                 <a:spcPct val="120000"/>
               </a:lnSpc>
               <a:spcAft>
                 <a:spcPts val="1000"/>
               </a:spcAft>
+              <a:buFont typeface="Microsoft YaHei"/>
+              <a:buChar char="▪"/>
             </a:pPr>
             <a:r>
               <a:rPr sz="1800" b="0">
@@ -6543,7 +6841,7 @@
                 <a:latin typeface="Microsoft YaHei"/>
                 <a:ea typeface="Microsoft YaHei"/>
               </a:rPr>
-              <a:t>▪  因 pCT 的 z 覆盖远大于 CBCT，z 质心不可比</a:t>
+              <a:t>因 pCT 的 z 覆盖远大于 CBCT，z 质心不可比</a:t>
             </a:r>
           </a:p>
         </p:txBody>
@@ -6767,13 +7065,15 @@
           </a:bodyPr>
           <a:lstStyle/>
           <a:p>
-            <a:pPr>
+            <a:pPr marL="254000" indent="-254000">
               <a:lnSpc>
                 <a:spcPct val="120000"/>
               </a:lnSpc>
               <a:spcAft>
                 <a:spcPts val="1000"/>
               </a:spcAft>
+              <a:buFont typeface="Microsoft YaHei"/>
+              <a:buChar char="▪"/>
             </a:pPr>
             <a:r>
               <a:rPr sz="1800" b="0">
@@ -6783,17 +7083,19 @@
                 <a:latin typeface="Microsoft YaHei"/>
                 <a:ea typeface="Microsoft YaHei"/>
               </a:rPr>
-              <a:t>▪  相似性：局部归一化互相关 LNCC（抗灰度差异）</a:t>
-            </a:r>
-          </a:p>
-          <a:p>
-            <a:pPr>
+              <a:t>相似性：局部归一化互相关 LNCC（抗灰度差异）</a:t>
+            </a:r>
+          </a:p>
+          <a:p>
+            <a:pPr marL="254000" indent="-254000">
               <a:lnSpc>
                 <a:spcPct val="120000"/>
               </a:lnSpc>
               <a:spcAft>
                 <a:spcPts val="1000"/>
               </a:spcAft>
+              <a:buFont typeface="Microsoft YaHei"/>
+              <a:buChar char="▪"/>
             </a:pPr>
             <a:r>
               <a:rPr sz="1800" b="0">
@@ -6803,17 +7105,19 @@
                 <a:latin typeface="Microsoft YaHei"/>
                 <a:ea typeface="Microsoft YaHei"/>
               </a:rPr>
-              <a:t>▪  多分辨率金字塔 4×→2×→1× 扩大捕获范围</a:t>
-            </a:r>
-          </a:p>
-          <a:p>
-            <a:pPr>
+              <a:t>多分辨率金字塔 4×→2×→1× 扩大捕获范围</a:t>
+            </a:r>
+          </a:p>
+          <a:p>
+            <a:pPr marL="254000" indent="-254000">
               <a:lnSpc>
                 <a:spcPct val="120000"/>
               </a:lnSpc>
               <a:spcAft>
                 <a:spcPts val="1000"/>
               </a:spcAft>
+              <a:buFont typeface="Microsoft YaHei"/>
+              <a:buChar char="▪"/>
             </a:pPr>
             <a:r>
               <a:rPr sz="1800" b="0">
@@ -6823,17 +7127,19 @@
                 <a:latin typeface="Microsoft YaHei"/>
                 <a:ea typeface="Microsoft YaHei"/>
               </a:rPr>
-              <a:t>▪  形变：速度场积分得微分同胚位移场</a:t>
-            </a:r>
-          </a:p>
-          <a:p>
-            <a:pPr>
+              <a:t>形变：速度场积分得微分同胚位移场</a:t>
+            </a:r>
+          </a:p>
+          <a:p>
+            <a:pPr marL="254000" indent="-254000">
               <a:lnSpc>
                 <a:spcPct val="120000"/>
               </a:lnSpc>
               <a:spcAft>
                 <a:spcPts val="1000"/>
               </a:spcAft>
+              <a:buFont typeface="Microsoft YaHei"/>
+              <a:buChar char="▪"/>
             </a:pPr>
             <a:r>
               <a:rPr sz="1800" b="0">
@@ -6843,7 +7149,7 @@
                 <a:latin typeface="Microsoft YaHei"/>
                 <a:ea typeface="Microsoft YaHei"/>
               </a:rPr>
-              <a:t>▪  强正则 + 粗网格 + 平滑 → 仅小幅、无折叠</a:t>
+              <a:t>强正则 + 粗网格 + 平滑 → 仅小幅、无折叠</a:t>
             </a:r>
           </a:p>
         </p:txBody>
@@ -7762,13 +8068,15 @@
           </a:bodyPr>
           <a:lstStyle/>
           <a:p>
-            <a:pPr>
+            <a:pPr marL="254000" indent="-254000">
               <a:lnSpc>
                 <a:spcPct val="120000"/>
               </a:lnSpc>
               <a:spcAft>
                 <a:spcPts val="1000"/>
               </a:spcAft>
+              <a:buFont typeface="Microsoft YaHei"/>
+              <a:buChar char="▪"/>
             </a:pPr>
             <a:r>
               <a:rPr sz="1400" b="0">
@@ -7778,17 +8086,19 @@
                 <a:latin typeface="Microsoft YaHei"/>
                 <a:ea typeface="Microsoft YaHei"/>
               </a:rPr>
-              <a:t>▪  骨 Dice 独立于优化目标，证明真实结构对齐</a:t>
-            </a:r>
-          </a:p>
-          <a:p>
-            <a:pPr>
+              <a:t>骨 Dice 独立于优化目标，证明真实结构对齐</a:t>
+            </a:r>
+          </a:p>
+          <a:p>
+            <a:pPr marL="254000" indent="-254000">
               <a:lnSpc>
                 <a:spcPct val="120000"/>
               </a:lnSpc>
               <a:spcAft>
                 <a:spcPts val="1000"/>
               </a:spcAft>
+              <a:buFont typeface="Microsoft YaHei"/>
+              <a:buChar char="▪"/>
             </a:pPr>
             <a:r>
               <a:rPr sz="1400" b="0">
@@ -7798,7 +8108,7 @@
                 <a:latin typeface="Microsoft YaHei"/>
                 <a:ea typeface="Microsoft YaHei"/>
               </a:rPr>
-              <a:t>▪  刚体为主结果，形变为受控的小幅细化（Jacobian 全正、无折叠）</a:t>
+              <a:t>刚体为主结果，形变为受控的小幅细化（Jacobian 全正、无折叠）</a:t>
             </a:r>
           </a:p>
         </p:txBody>
@@ -8051,13 +8361,15 @@
           </a:bodyPr>
           <a:lstStyle/>
           <a:p>
-            <a:pPr>
+            <a:pPr marL="254000" indent="-254000">
               <a:lnSpc>
                 <a:spcPct val="120000"/>
               </a:lnSpc>
               <a:spcAft>
                 <a:spcPts val="1000"/>
               </a:spcAft>
+              <a:buFont typeface="Microsoft YaHei"/>
+              <a:buChar char="▪"/>
             </a:pPr>
             <a:r>
               <a:rPr sz="1500" b="0">
@@ -8067,7 +8379,7 @@
                 <a:latin typeface="Microsoft YaHei"/>
                 <a:ea typeface="Microsoft YaHei"/>
               </a:rPr>
-              <a:t>▪  形变场 Jacobian 处处为正、无折叠（微分同胚）</a:t>
+              <a:t>形变场 Jacobian 处处为正、无折叠（微分同胚）</a:t>
             </a:r>
           </a:p>
         </p:txBody>
